--- a/pitch/SIH26025_WE_COOK_IDEA.pptx
+++ b/pitch/SIH26025_WE_COOK_IDEA.pptx
@@ -5545,9 +5545,23 @@
           </a:xfrm>
         </p:spPr>
         <p:txBody>
-          <a:bodyPr/>
+          <a:bodyPr wrap="square"/>
           <a:lstStyle/>
           <a:p>
+            <a:pPr algn="l">
+              <a:spcAft>
+                <a:spcPts val="200"/>
+              </a:spcAft>
+            </a:pPr>
+            <a:r>
+              <a:rPr sz="2000" b="1">
+                <a:solidFill>
+                  <a:srgbClr val="0B2C4A"/>
+                </a:solidFill>
+                <a:latin typeface="Calibri"/>
+              </a:rPr>
+              <a:t>TITLE PAGE</a:t>
+            </a:r>
             <a:endParaRPr lang="en-US" b="1" dirty="0">
               <a:solidFill>
                 <a:schemeClr val="tx1"/>
@@ -5557,23 +5571,20 @@
             </a:endParaRPr>
           </a:p>
           <a:p>
-            <a:r>
-              <a:rPr lang="en-US" b="1" dirty="0">
+            <a:pPr algn="l">
+              <a:spcAft>
+                <a:spcPts val="200"/>
+              </a:spcAft>
+            </a:pPr>
+            <a:r>
+              <a:rPr sz="1600" b="0">
                 <a:solidFill>
-                  <a:schemeClr val="tx1"/>
+                  <a:srgbClr val="F47B20"/>
                 </a:solidFill>
-                <a:latin typeface="Times New Roman" panose="02020603050405020304" pitchFamily="18" charset="0"/>
-                <a:cs typeface="Times New Roman" panose="02020603050405020304" pitchFamily="18" charset="0"/>
+                <a:latin typeface="Calibri"/>
               </a:rPr>
-              <a:t>TITLE PAGE</a:t>
-            </a:r>
-            <a:endParaRPr lang="en-IN" b="1" dirty="0">
-              <a:solidFill>
-                <a:schemeClr val="tx1"/>
-              </a:solidFill>
-              <a:latin typeface="Times New Roman" panose="02020603050405020304" pitchFamily="18" charset="0"/>
-              <a:cs typeface="Times New Roman" panose="02020603050405020304" pitchFamily="18" charset="0"/>
-            </a:endParaRPr>
+              <a:t>MOLE  ·  Mine Observation &amp; Live-alert Engine</a:t>
+            </a:r>
           </a:p>
         </p:txBody>
       </p:sp>
@@ -5648,7 +5659,7 @@
           <a:p>
             <a:pPr>
               <a:spcAft>
-                <a:spcPts val="800"/>
+                <a:spcPts val="700"/>
               </a:spcAft>
             </a:pPr>
             <a:r>
@@ -5658,12 +5669,12 @@
                 </a:solidFill>
                 <a:latin typeface="Calibri"/>
               </a:rPr>
-              <a:t>Problem Statement ID  </a:t>
+              <a:t>Problem Statement ID   </a:t>
             </a:r>
             <a:r>
               <a:rPr sz="1300" b="0">
                 <a:solidFill>
-                  <a:srgbClr val="FFFFFF"/>
+                  <a:srgbClr val="0B2C4A"/>
                 </a:solidFill>
                 <a:latin typeface="Calibri"/>
               </a:rPr>
@@ -5674,7 +5685,7 @@
           <a:p>
             <a:pPr>
               <a:spcAft>
-                <a:spcPts val="800"/>
+                <a:spcPts val="700"/>
               </a:spcAft>
             </a:pPr>
             <a:r>
@@ -5684,12 +5695,12 @@
                 </a:solidFill>
                 <a:latin typeface="Calibri"/>
               </a:rPr>
-              <a:t>Problem Statement Title  </a:t>
+              <a:t>Problem Statement Title   </a:t>
             </a:r>
             <a:r>
               <a:rPr sz="1300" b="0">
                 <a:solidFill>
-                  <a:srgbClr val="FFFFFF"/>
+                  <a:srgbClr val="0B2C4A"/>
                 </a:solidFill>
                 <a:latin typeface="Calibri"/>
               </a:rPr>
@@ -5699,7 +5710,7 @@
           <a:p>
             <a:pPr>
               <a:spcAft>
-                <a:spcPts val="800"/>
+                <a:spcPts val="700"/>
               </a:spcAft>
             </a:pPr>
             <a:r>
@@ -5709,12 +5720,12 @@
                 </a:solidFill>
                 <a:latin typeface="Calibri"/>
               </a:rPr>
-              <a:t>Theme  </a:t>
+              <a:t>Theme   </a:t>
             </a:r>
             <a:r>
               <a:rPr sz="1300" b="0">
                 <a:solidFill>
-                  <a:srgbClr val="FFFFFF"/>
+                  <a:srgbClr val="0B2C4A"/>
                 </a:solidFill>
                 <a:latin typeface="Calibri"/>
               </a:rPr>
@@ -5724,7 +5735,7 @@
           <a:p>
             <a:pPr>
               <a:spcAft>
-                <a:spcPts val="800"/>
+                <a:spcPts val="700"/>
               </a:spcAft>
             </a:pPr>
             <a:r>
@@ -5734,12 +5745,12 @@
                 </a:solidFill>
                 <a:latin typeface="Calibri"/>
               </a:rPr>
-              <a:t>PS Category  </a:t>
+              <a:t>PS Category   </a:t>
             </a:r>
             <a:r>
               <a:rPr sz="1300" b="0">
                 <a:solidFill>
-                  <a:srgbClr val="FFFFFF"/>
+                  <a:srgbClr val="0B2C4A"/>
                 </a:solidFill>
                 <a:latin typeface="Calibri"/>
               </a:rPr>
@@ -5749,7 +5760,7 @@
           <a:p>
             <a:pPr>
               <a:spcAft>
-                <a:spcPts val="800"/>
+                <a:spcPts val="700"/>
               </a:spcAft>
             </a:pPr>
             <a:r>
@@ -5759,12 +5770,12 @@
                 </a:solidFill>
                 <a:latin typeface="Calibri"/>
               </a:rPr>
-              <a:t>Organisation  </a:t>
+              <a:t>Organisation   </a:t>
             </a:r>
             <a:r>
               <a:rPr sz="1300" b="0">
                 <a:solidFill>
-                  <a:srgbClr val="FFFFFF"/>
+                  <a:srgbClr val="0B2C4A"/>
                 </a:solidFill>
                 <a:latin typeface="Calibri"/>
               </a:rPr>
@@ -5774,7 +5785,7 @@
           <a:p>
             <a:pPr>
               <a:spcAft>
-                <a:spcPts val="800"/>
+                <a:spcPts val="700"/>
               </a:spcAft>
             </a:pPr>
             <a:r>
@@ -5784,22 +5795,22 @@
                 </a:solidFill>
                 <a:latin typeface="Calibri"/>
               </a:rPr>
-              <a:t>Team ID  </a:t>
+              <a:t>Team ID   </a:t>
             </a:r>
             <a:r>
               <a:rPr sz="1300" b="0">
                 <a:solidFill>
-                  <a:srgbClr val="FFFFFF"/>
+                  <a:srgbClr val="0B2C4A"/>
                 </a:solidFill>
                 <a:latin typeface="Calibri"/>
               </a:rPr>
-              <a:t>[fill after SIH portal]</a:t>
+              <a:t>To be filled on the SIH portal after college shortlist</a:t>
             </a:r>
           </a:p>
           <a:p>
             <a:pPr>
               <a:spcAft>
-                <a:spcPts val="800"/>
+                <a:spcPts val="700"/>
               </a:spcAft>
             </a:pPr>
             <a:r>
@@ -5809,12 +5820,12 @@
                 </a:solidFill>
                 <a:latin typeface="Calibri"/>
               </a:rPr>
-              <a:t>Team Name  </a:t>
+              <a:t>Team Name   </a:t>
             </a:r>
             <a:r>
               <a:rPr sz="1300" b="0">
                 <a:solidFill>
-                  <a:srgbClr val="FFFFFF"/>
+                  <a:srgbClr val="0B2C4A"/>
                 </a:solidFill>
                 <a:latin typeface="Calibri"/>
               </a:rPr>
@@ -5824,7 +5835,7 @@
           <a:p>
             <a:pPr>
               <a:spcAft>
-                <a:spcPts val="800"/>
+                <a:spcPts val="700"/>
               </a:spcAft>
             </a:pPr>
             <a:r>
@@ -5834,12 +5845,12 @@
                 </a:solidFill>
                 <a:latin typeface="Calibri"/>
               </a:rPr>
-              <a:t>Idea  </a:t>
+              <a:t>Idea   </a:t>
             </a:r>
             <a:r>
               <a:rPr sz="1300" b="0">
                 <a:solidFill>
-                  <a:srgbClr val="FFFFFF"/>
+                  <a:srgbClr val="0B2C4A"/>
                 </a:solidFill>
                 <a:latin typeface="Calibri"/>
               </a:rPr>
@@ -5973,8 +5984,8 @@
         </p:nvSpPr>
         <p:spPr>
           <a:xfrm>
-            <a:off x="0" y="0"/>
-            <a:ext cx="1" cy="1"/>
+            <a:off x="1719072" y="91440"/>
+            <a:ext cx="7818120" cy="804672"/>
           </a:xfrm>
         </p:spPr>
         <p:txBody>
@@ -5983,9 +5994,18 @@
           <a:p>
             <a:pPr eaLnBrk="1" hangingPunct="1" algn="l">
               <a:spcAft>
-                <a:spcPts val="400"/>
+                <a:spcPts val="0"/>
               </a:spcAft>
             </a:pPr>
+            <a:r>
+              <a:rPr sz="2600" b="1">
+                <a:solidFill>
+                  <a:srgbClr val="0B2C4A"/>
+                </a:solidFill>
+                <a:latin typeface="Calibri"/>
+              </a:rPr>
+              <a:t>MOLE — Proposed Solution</a:t>
+            </a:r>
           </a:p>
         </p:txBody>
       </p:sp>
@@ -6127,6 +6147,12 @@
           <a:prstGeom prst="ellipse">
             <a:avLst/>
           </a:prstGeom>
+          <a:solidFill>
+            <a:srgbClr val="F47B20"/>
+          </a:solidFill>
+          <a:ln>
+            <a:noFill/>
+          </a:ln>
         </p:spPr>
         <p:style>
           <a:lnRef idx="2">
@@ -6148,7 +6174,7 @@
           <a:p>
             <a:pPr algn="ctr">
               <a:spcAft>
-                <a:spcPts val="400"/>
+                <a:spcPts val="0"/>
               </a:spcAft>
             </a:pPr>
             <a:r>
@@ -6202,8 +6228,8 @@
         </p:nvSpPr>
         <p:spPr>
           <a:xfrm>
-            <a:off x="320040" y="1051560"/>
-            <a:ext cx="11521440" cy="347472"/>
+            <a:off x="320040" y="987552"/>
+            <a:ext cx="11521440" cy="292608"/>
           </a:xfrm>
           <a:prstGeom prst="rect">
             <a:avLst/>
@@ -6211,12 +6237,14 @@
           <a:noFill/>
         </p:spPr>
         <p:txBody>
-          <a:bodyPr wrap="square" anchor="t"/>
+          <a:bodyPr wrap="square">
+            <a:spAutoFit/>
+          </a:bodyPr>
           <a:lstStyle/>
           <a:p>
             <a:pPr algn="l">
               <a:spcAft>
-                <a:spcPts val="200"/>
+                <a:spcPts val="0"/>
               </a:spcAft>
             </a:pPr>
             <a:r>
@@ -6226,58 +6254,35 @@
                 </a:solidFill>
                 <a:latin typeface="Calibri"/>
               </a:rPr>
-              <a:t>One product: two fixed nodes + laptop ML + one dashboard + a remote rover. Officer sees a change, understands the numbers, then inspects.</a:t>
-            </a:r>
-          </a:p>
-        </p:txBody>
-      </p:sp>
-      <p:sp>
-        <p:nvSpPr>
-          <p:cNvPr id="15364" name="Rounded Rectangle 15363"/>
-          <p:cNvSpPr/>
+              <a:t>Two fixed nodes watch the model. Laptop rules + sklearn explain. Rover inspects only after the officer decides.</a:t>
+            </a:r>
+          </a:p>
+        </p:txBody>
+      </p:sp>
+      <p:pic>
+        <p:nvPicPr>
+          <p:cNvPr id="15364" name="Picture 15363" descr="solution_flow.png"/>
+          <p:cNvPicPr>
+            <a:picLocks noChangeAspect="1"/>
+          </p:cNvPicPr>
           <p:nvPr/>
-        </p:nvSpPr>
-        <p:spPr>
-          <a:xfrm>
-            <a:off x="320040" y="1417320"/>
-            <a:ext cx="3703320" cy="1417320"/>
-          </a:xfrm>
-          <a:prstGeom prst="roundRect">
-            <a:avLst>
-              <a:gd name="adj" fmla="val 8000"/>
-            </a:avLst>
+        </p:nvPicPr>
+        <p:blipFill>
+          <a:blip r:embed="rId4"/>
+          <a:stretch>
+            <a:fillRect/>
+          </a:stretch>
+        </p:blipFill>
+        <p:spPr>
+          <a:xfrm>
+            <a:off x="320040" y="1298448"/>
+            <a:ext cx="11521440" cy="2029968"/>
+          </a:xfrm>
+          <a:prstGeom prst="rect">
+            <a:avLst/>
           </a:prstGeom>
-          <a:solidFill>
-            <a:srgbClr val="0B2C4A"/>
-          </a:solidFill>
-          <a:ln w="9525">
-            <a:solidFill>
-              <a:srgbClr val="0B2C4A"/>
-            </a:solidFill>
-          </a:ln>
-        </p:spPr>
-        <p:style>
-          <a:lnRef idx="1">
-            <a:schemeClr val="accent1"/>
-          </a:lnRef>
-          <a:fillRef idx="3">
-            <a:schemeClr val="accent1"/>
-          </a:fillRef>
-          <a:effectRef idx="2">
-            <a:schemeClr val="accent1"/>
-          </a:effectRef>
-          <a:fontRef idx="minor">
-            <a:schemeClr val="lt1"/>
-          </a:fontRef>
-        </p:style>
-        <p:txBody>
-          <a:bodyPr rtlCol="0" anchor="ctr"/>
-          <a:lstStyle/>
-          <a:p>
-            <a:pPr algn="ctr"/>
-          </a:p>
-        </p:txBody>
-      </p:sp>
+        </p:spPr>
+      </p:pic>
       <p:sp>
         <p:nvSpPr>
           <p:cNvPr id="15365" name="TextBox 15364"/>
@@ -6286,8 +6291,8 @@
         </p:nvSpPr>
         <p:spPr>
           <a:xfrm>
-            <a:off x="429768" y="1463040"/>
-            <a:ext cx="3474720" cy="292608"/>
+            <a:off x="320040" y="3383280"/>
+            <a:ext cx="11521440" cy="219456"/>
           </a:xfrm>
           <a:prstGeom prst="rect">
             <a:avLst/>
@@ -6295,424 +6300,14 @@
           <a:noFill/>
         </p:spPr>
         <p:txBody>
-          <a:bodyPr wrap="square" anchor="t"/>
+          <a:bodyPr wrap="square">
+            <a:spAutoFit/>
+          </a:bodyPr>
           <a:lstStyle/>
           <a:p>
             <a:pPr algn="l">
               <a:spcAft>
-                <a:spcPts val="200"/>
-              </a:spcAft>
-            </a:pPr>
-            <a:r>
-              <a:rPr sz="1300" b="1">
-                <a:solidFill>
-                  <a:srgbClr val="FFFFFF"/>
-                </a:solidFill>
-                <a:latin typeface="Calibri"/>
-              </a:rPr>
-              <a:t>1. MONITOR</a:t>
-            </a:r>
-          </a:p>
-        </p:txBody>
-      </p:sp>
-      <p:sp>
-        <p:nvSpPr>
-          <p:cNvPr id="15366" name="TextBox 15365"/>
-          <p:cNvSpPr txBox="1"/>
-          <p:nvPr/>
-        </p:nvSpPr>
-        <p:spPr>
-          <a:xfrm>
-            <a:off x="429768" y="1755648"/>
-            <a:ext cx="3474720" cy="1005840"/>
-          </a:xfrm>
-          <a:prstGeom prst="rect">
-            <a:avLst/>
-          </a:prstGeom>
-          <a:noFill/>
-        </p:spPr>
-        <p:txBody>
-          <a:bodyPr wrap="square" anchor="t"/>
-          <a:lstStyle/>
-          <a:p>
-            <a:pPr algn="l">
-              <a:spcAft>
-                <a:spcPts val="200"/>
-              </a:spcAft>
-            </a:pPr>
-            <a:r>
-              <a:rPr sz="1200" b="0">
-                <a:solidFill>
-                  <a:srgbClr val="FFFFFF"/>
-                </a:solidFill>
-                <a:latin typeface="Calibri"/>
-              </a:rPr>
-              <a:t>Node A: tilt + crack slider</a:t>
-            </a:r>
-          </a:p>
-          <a:p>
-            <a:pPr algn="l">
-              <a:spcAft>
-                <a:spcPts val="200"/>
-              </a:spcAft>
-            </a:pPr>
-            <a:r>
-              <a:rPr sz="1200" b="0">
-                <a:solidFill>
-                  <a:srgbClr val="FFFFFF"/>
-                </a:solidFill>
-                <a:latin typeface="Calibri"/>
-              </a:rPr>
-              <a:t>Node B: comparison IMU</a:t>
-            </a:r>
-          </a:p>
-          <a:p>
-            <a:pPr algn="l">
-              <a:spcAft>
-                <a:spcPts val="200"/>
-              </a:spcAft>
-            </a:pPr>
-            <a:r>
-              <a:rPr sz="1200" b="0">
-                <a:solidFill>
-                  <a:srgbClr val="FFFFFF"/>
-                </a:solidFill>
-                <a:latin typeface="Calibri"/>
-              </a:rPr>
-              <a:t>ESP-NOW → S3-Zero USB JSON</a:t>
-            </a:r>
-          </a:p>
-        </p:txBody>
-      </p:sp>
-      <p:sp>
-        <p:nvSpPr>
-          <p:cNvPr id="15367" name="Rounded Rectangle 15366"/>
-          <p:cNvSpPr/>
-          <p:nvPr/>
-        </p:nvSpPr>
-        <p:spPr>
-          <a:xfrm>
-            <a:off x="4160520" y="1417320"/>
-            <a:ext cx="3703320" cy="1417320"/>
-          </a:xfrm>
-          <a:prstGeom prst="roundRect">
-            <a:avLst>
-              <a:gd name="adj" fmla="val 8000"/>
-            </a:avLst>
-          </a:prstGeom>
-          <a:solidFill>
-            <a:srgbClr val="0E7C7B"/>
-          </a:solidFill>
-          <a:ln w="9525">
-            <a:solidFill>
-              <a:srgbClr val="0E7C7B"/>
-            </a:solidFill>
-          </a:ln>
-        </p:spPr>
-        <p:style>
-          <a:lnRef idx="1">
-            <a:schemeClr val="accent1"/>
-          </a:lnRef>
-          <a:fillRef idx="3">
-            <a:schemeClr val="accent1"/>
-          </a:fillRef>
-          <a:effectRef idx="2">
-            <a:schemeClr val="accent1"/>
-          </a:effectRef>
-          <a:fontRef idx="minor">
-            <a:schemeClr val="lt1"/>
-          </a:fontRef>
-        </p:style>
-        <p:txBody>
-          <a:bodyPr rtlCol="0" anchor="ctr"/>
-          <a:lstStyle/>
-          <a:p>
-            <a:pPr algn="ctr"/>
-          </a:p>
-        </p:txBody>
-      </p:sp>
-      <p:sp>
-        <p:nvSpPr>
-          <p:cNvPr id="15368" name="TextBox 15367"/>
-          <p:cNvSpPr txBox="1"/>
-          <p:nvPr/>
-        </p:nvSpPr>
-        <p:spPr>
-          <a:xfrm>
-            <a:off x="4270248" y="1463040"/>
-            <a:ext cx="3474720" cy="292608"/>
-          </a:xfrm>
-          <a:prstGeom prst="rect">
-            <a:avLst/>
-          </a:prstGeom>
-          <a:noFill/>
-        </p:spPr>
-        <p:txBody>
-          <a:bodyPr wrap="square" anchor="t"/>
-          <a:lstStyle/>
-          <a:p>
-            <a:pPr algn="l">
-              <a:spcAft>
-                <a:spcPts val="200"/>
-              </a:spcAft>
-            </a:pPr>
-            <a:r>
-              <a:rPr sz="1300" b="1">
-                <a:solidFill>
-                  <a:srgbClr val="FFFFFF"/>
-                </a:solidFill>
-                <a:latin typeface="Calibri"/>
-              </a:rPr>
-              <a:t>2. WARN + PREDICT</a:t>
-            </a:r>
-          </a:p>
-        </p:txBody>
-      </p:sp>
-      <p:sp>
-        <p:nvSpPr>
-          <p:cNvPr id="15369" name="TextBox 15368"/>
-          <p:cNvSpPr txBox="1"/>
-          <p:nvPr/>
-        </p:nvSpPr>
-        <p:spPr>
-          <a:xfrm>
-            <a:off x="4270248" y="1755648"/>
-            <a:ext cx="3474720" cy="1005840"/>
-          </a:xfrm>
-          <a:prstGeom prst="rect">
-            <a:avLst/>
-          </a:prstGeom>
-          <a:noFill/>
-        </p:spPr>
-        <p:txBody>
-          <a:bodyPr wrap="square" anchor="t"/>
-          <a:lstStyle/>
-          <a:p>
-            <a:pPr algn="l">
-              <a:spcAft>
-                <a:spcPts val="200"/>
-              </a:spcAft>
-            </a:pPr>
-            <a:r>
-              <a:rPr sz="1200" b="0">
-                <a:solidFill>
-                  <a:srgbClr val="FFFFFF"/>
-                </a:solidFill>
-                <a:latin typeface="Calibri"/>
-              </a:rPr>
-              <a:t>Rules latch WATCH / ALERT</a:t>
-            </a:r>
-          </a:p>
-          <a:p>
-            <a:pPr algn="l">
-              <a:spcAft>
-                <a:spcPts val="200"/>
-              </a:spcAft>
-            </a:pPr>
-            <a:r>
-              <a:rPr sz="1200" b="0">
-                <a:solidFill>
-                  <a:srgbClr val="FFFFFF"/>
-                </a:solidFill>
-                <a:latin typeface="Calibri"/>
-              </a:rPr>
-              <a:t>Isolation Forest = unusual</a:t>
-            </a:r>
-          </a:p>
-          <a:p>
-            <a:pPr algn="l">
-              <a:spcAft>
-                <a:spcPts val="200"/>
-              </a:spcAft>
-            </a:pPr>
-            <a:r>
-              <a:rPr sz="1200" b="0">
-                <a:solidFill>
-                  <a:srgbClr val="FFFFFF"/>
-                </a:solidFill>
-                <a:latin typeface="Calibri"/>
-              </a:rPr>
-              <a:t>Ridge = next 30 s of signals</a:t>
-            </a:r>
-          </a:p>
-        </p:txBody>
-      </p:sp>
-      <p:sp>
-        <p:nvSpPr>
-          <p:cNvPr id="15370" name="Rounded Rectangle 15369"/>
-          <p:cNvSpPr/>
-          <p:nvPr/>
-        </p:nvSpPr>
-        <p:spPr>
-          <a:xfrm>
-            <a:off x="8001000" y="1417320"/>
-            <a:ext cx="3703320" cy="1417320"/>
-          </a:xfrm>
-          <a:prstGeom prst="roundRect">
-            <a:avLst>
-              <a:gd name="adj" fmla="val 8000"/>
-            </a:avLst>
-          </a:prstGeom>
-          <a:solidFill>
-            <a:srgbClr val="F47B20"/>
-          </a:solidFill>
-          <a:ln w="9525">
-            <a:solidFill>
-              <a:srgbClr val="F47B20"/>
-            </a:solidFill>
-          </a:ln>
-        </p:spPr>
-        <p:style>
-          <a:lnRef idx="1">
-            <a:schemeClr val="accent1"/>
-          </a:lnRef>
-          <a:fillRef idx="3">
-            <a:schemeClr val="accent1"/>
-          </a:fillRef>
-          <a:effectRef idx="2">
-            <a:schemeClr val="accent1"/>
-          </a:effectRef>
-          <a:fontRef idx="minor">
-            <a:schemeClr val="lt1"/>
-          </a:fontRef>
-        </p:style>
-        <p:txBody>
-          <a:bodyPr rtlCol="0" anchor="ctr"/>
-          <a:lstStyle/>
-          <a:p>
-            <a:pPr algn="ctr"/>
-          </a:p>
-        </p:txBody>
-      </p:sp>
-      <p:sp>
-        <p:nvSpPr>
-          <p:cNvPr id="15371" name="TextBox 15370"/>
-          <p:cNvSpPr txBox="1"/>
-          <p:nvPr/>
-        </p:nvSpPr>
-        <p:spPr>
-          <a:xfrm>
-            <a:off x="8110728" y="1463040"/>
-            <a:ext cx="3474720" cy="292608"/>
-          </a:xfrm>
-          <a:prstGeom prst="rect">
-            <a:avLst/>
-          </a:prstGeom>
-          <a:noFill/>
-        </p:spPr>
-        <p:txBody>
-          <a:bodyPr wrap="square" anchor="t"/>
-          <a:lstStyle/>
-          <a:p>
-            <a:pPr algn="l">
-              <a:spcAft>
-                <a:spcPts val="200"/>
-              </a:spcAft>
-            </a:pPr>
-            <a:r>
-              <a:rPr sz="1300" b="1">
-                <a:solidFill>
-                  <a:srgbClr val="FFFFFF"/>
-                </a:solidFill>
-                <a:latin typeface="Calibri"/>
-              </a:rPr>
-              <a:t>3. INSPECT</a:t>
-            </a:r>
-          </a:p>
-        </p:txBody>
-      </p:sp>
-      <p:sp>
-        <p:nvSpPr>
-          <p:cNvPr id="15372" name="TextBox 15371"/>
-          <p:cNvSpPr txBox="1"/>
-          <p:nvPr/>
-        </p:nvSpPr>
-        <p:spPr>
-          <a:xfrm>
-            <a:off x="8110728" y="1755648"/>
-            <a:ext cx="3474720" cy="1005840"/>
-          </a:xfrm>
-          <a:prstGeom prst="rect">
-            <a:avLst/>
-          </a:prstGeom>
-          <a:noFill/>
-        </p:spPr>
-        <p:txBody>
-          <a:bodyPr wrap="square" anchor="t"/>
-          <a:lstStyle/>
-          <a:p>
-            <a:pPr algn="l">
-              <a:spcAft>
-                <a:spcPts val="200"/>
-              </a:spcAft>
-            </a:pPr>
-            <a:r>
-              <a:rPr sz="1200" b="0">
-                <a:solidFill>
-                  <a:srgbClr val="FFFFFF"/>
-                </a:solidFill>
-                <a:latin typeface="Calibri"/>
-              </a:rPr>
-              <a:t>Operator decides</a:t>
-            </a:r>
-          </a:p>
-          <a:p>
-            <a:pPr algn="l">
-              <a:spcAft>
-                <a:spcPts val="200"/>
-              </a:spcAft>
-            </a:pPr>
-            <a:r>
-              <a:rPr sz="1200" b="0">
-                <a:solidFill>
-                  <a:srgbClr val="FFFFFF"/>
-                </a:solidFill>
-                <a:latin typeface="Calibri"/>
-              </a:rPr>
-              <a:t>Rover: FWD REV LEFT RIGHT STOP</a:t>
-            </a:r>
-          </a:p>
-          <a:p>
-            <a:pPr algn="l">
-              <a:spcAft>
-                <a:spcPts val="200"/>
-              </a:spcAft>
-            </a:pPr>
-            <a:r>
-              <a:rPr sz="1200" b="0">
-                <a:solidFill>
-                  <a:srgbClr val="FFFFFF"/>
-                </a:solidFill>
-                <a:latin typeface="Calibri"/>
-              </a:rPr>
-              <a:t>Distance, IR, MQ-7 raw, rover IMU</a:t>
-            </a:r>
-          </a:p>
-        </p:txBody>
-      </p:sp>
-      <p:sp>
-        <p:nvSpPr>
-          <p:cNvPr id="15373" name="TextBox 15372"/>
-          <p:cNvSpPr txBox="1"/>
-          <p:nvPr/>
-        </p:nvSpPr>
-        <p:spPr>
-          <a:xfrm>
-            <a:off x="320040" y="2907792"/>
-            <a:ext cx="11521440" cy="256032"/>
-          </a:xfrm>
-          <a:prstGeom prst="rect">
-            <a:avLst/>
-          </a:prstGeom>
-          <a:noFill/>
-        </p:spPr>
-        <p:txBody>
-          <a:bodyPr wrap="square" anchor="t"/>
-          <a:lstStyle/>
-          <a:p>
-            <a:pPr algn="l">
-              <a:spcAft>
-                <a:spcPts val="200"/>
+                <a:spcPts val="0"/>
               </a:spcAft>
             </a:pPr>
             <a:r>
@@ -6722,22 +6317,22 @@
                 </a:solidFill>
                 <a:latin typeface="Calibri"/>
               </a:rPr>
-              <a:t>How this maps the PS (honest, tabletop)</a:t>
+              <a:t>How this addresses SIH26025  ·  innovation = honest mapping, not a bigger claim</a:t>
             </a:r>
           </a:p>
         </p:txBody>
       </p:sp>
       <p:graphicFrame>
         <p:nvGraphicFramePr>
-          <p:cNvPr id="15374" name="Table 15373"/>
+          <p:cNvPr id="15366" name="Table 15365"/>
           <p:cNvGraphicFramePr>
             <a:graphicFrameLocks noGrp="1"/>
           </p:cNvGraphicFramePr>
           <p:nvPr/>
         </p:nvGraphicFramePr>
         <p:xfrm>
-          <a:off x="320040" y="3163824"/>
-          <a:ext cx="11521440" cy="2331720"/>
+          <a:off x="320040" y="3621024"/>
+          <a:ext cx="11521438" cy="2560320"/>
         </p:xfrm>
         <a:graphic>
           <a:graphicData uri="http://schemas.openxmlformats.org/drawingml/2006/table">
@@ -6746,11 +6341,11 @@
                 <a:tableStyleId>{5C22544A-7EE6-4342-B048-85BDC9FD1C3A}</a:tableStyleId>
               </a:tblPr>
               <a:tblGrid>
-                <a:gridCol w="3840480"/>
-                <a:gridCol w="3840480"/>
-                <a:gridCol w="3840480"/>
+                <a:gridCol w="2172074"/>
+                <a:gridCol w="4816339"/>
+                <a:gridCol w="4533025"/>
               </a:tblGrid>
-              <a:tr h="388620">
+              <a:tr h="426720">
                 <a:tc>
                   <a:txBody>
                     <a:bodyPr/>
@@ -6758,7 +6353,7 @@
                     <a:p>
                       <a:pPr algn="l"/>
                       <a:r>
-                        <a:rPr sz="1000" b="1">
+                        <a:rPr sz="1100" b="1">
                           <a:solidFill>
                             <a:srgbClr val="FFFFFF"/>
                           </a:solidFill>
@@ -6781,7 +6376,7 @@
                     <a:p>
                       <a:pPr algn="l"/>
                       <a:r>
-                        <a:rPr sz="1000" b="1">
+                        <a:rPr sz="1100" b="1">
                           <a:solidFill>
                             <a:srgbClr val="FFFFFF"/>
                           </a:solidFill>
@@ -6804,7 +6399,7 @@
                     <a:p>
                       <a:pPr algn="l"/>
                       <a:r>
-                        <a:rPr sz="1000" b="1">
+                        <a:rPr sz="1100" b="1">
                           <a:solidFill>
                             <a:srgbClr val="FFFFFF"/>
                           </a:solidFill>
@@ -6821,7 +6416,7 @@
                   </a:tcPr>
                 </a:tc>
               </a:tr>
-              <a:tr h="388620">
+              <a:tr h="426720">
                 <a:tc>
                   <a:txBody>
                     <a:bodyPr/>
@@ -6829,7 +6424,7 @@
                     <a:p>
                       <a:pPr algn="l"/>
                       <a:r>
-                        <a:rPr sz="1000" b="1">
+                        <a:rPr sz="1100" b="1">
                           <a:solidFill>
                             <a:srgbClr val="1A1A1A"/>
                           </a:solidFill>
@@ -6852,13 +6447,13 @@
                     <a:p>
                       <a:pPr algn="l"/>
                       <a:r>
-                        <a:rPr sz="1000" b="0">
+                        <a:rPr sz="1100" b="0">
                           <a:solidFill>
                             <a:srgbClr val="1A1A1A"/>
                           </a:solidFill>
                           <a:latin typeface="Calibri"/>
                         </a:rPr>
-                        <a:t>Live Node A + Node B, source-tagged, timed</a:t>
+                        <a:t>Live Node A + Node B, source-tagged and timed</a:t>
                       </a:r>
                     </a:p>
                   </a:txBody>
@@ -6875,7 +6470,7 @@
                     <a:p>
                       <a:pPr algn="l"/>
                       <a:r>
-                        <a:rPr sz="1000" b="0">
+                        <a:rPr sz="1100" b="0">
                           <a:solidFill>
                             <a:srgbClr val="1A1A1A"/>
                           </a:solidFill>
@@ -6892,7 +6487,7 @@
                   </a:tcPr>
                 </a:tc>
               </a:tr>
-              <a:tr h="388620">
+              <a:tr h="426720">
                 <a:tc>
                   <a:txBody>
                     <a:bodyPr/>
@@ -6900,7 +6495,7 @@
                     <a:p>
                       <a:pPr algn="l"/>
                       <a:r>
-                        <a:rPr sz="1000" b="1">
+                        <a:rPr sz="1100" b="1">
                           <a:solidFill>
                             <a:srgbClr val="1A1A1A"/>
                           </a:solidFill>
@@ -6923,13 +6518,13 @@
                     <a:p>
                       <a:pPr algn="l"/>
                       <a:r>
-                        <a:rPr sz="1000" b="0">
+                        <a:rPr sz="1100" b="0">
                           <a:solidFill>
                             <a:srgbClr val="1A1A1A"/>
                           </a:solidFill>
                           <a:latin typeface="Calibri"/>
                         </a:rPr>
-                        <a:t>Rules: 3 samples → WATCH/ALERT; stale → UNKNOWN</a:t>
+                        <a:t>Rules: 3 samples → WATCH/ALERT; stale &gt;5 s → UNKNOWN</a:t>
                       </a:r>
                     </a:p>
                   </a:txBody>
@@ -6946,7 +6541,7 @@
                     <a:p>
                       <a:pPr algn="l"/>
                       <a:r>
-                        <a:rPr sz="1000" b="0">
+                        <a:rPr sz="1100" b="0">
                           <a:solidFill>
                             <a:srgbClr val="1A1A1A"/>
                           </a:solidFill>
@@ -6963,7 +6558,7 @@
                   </a:tcPr>
                 </a:tc>
               </a:tr>
-              <a:tr h="388620">
+              <a:tr h="426720">
                 <a:tc>
                   <a:txBody>
                     <a:bodyPr/>
@@ -6971,7 +6566,7 @@
                     <a:p>
                       <a:pPr algn="l"/>
                       <a:r>
-                        <a:rPr sz="1000" b="1">
+                        <a:rPr sz="1100" b="1">
                           <a:solidFill>
                             <a:srgbClr val="1A1A1A"/>
                           </a:solidFill>
@@ -6994,13 +6589,13 @@
                     <a:p>
                       <a:pPr algn="l"/>
                       <a:r>
-                        <a:rPr sz="1000" b="0">
+                        <a:rPr sz="1100" b="0">
                           <a:solidFill>
                             <a:srgbClr val="1A1A1A"/>
                           </a:solidFill>
                           <a:latin typeface="Calibri"/>
                         </a:rPr>
-                        <a:t>Isolation Forest on this rig’s NORMAL samples; score + top feature on screen</a:t>
+                        <a:t>Isolation Forest + LOF vs this rig’s NORMAL; score + top feature</a:t>
                       </a:r>
                     </a:p>
                   </a:txBody>
@@ -7017,13 +6612,13 @@
                     <a:p>
                       <a:pPr algn="l"/>
                       <a:r>
-                        <a:rPr sz="1000" b="0">
+                        <a:rPr sz="1100" b="0">
                           <a:solidFill>
                             <a:srgbClr val="1A1A1A"/>
                           </a:solidFill>
                           <a:latin typeface="Calibri"/>
                         </a:rPr>
-                        <a:t>No LLM, no collapse %, no camera vision</a:t>
+                        <a:t>No LLM, no camera vision, no collapse %</a:t>
                       </a:r>
                     </a:p>
                   </a:txBody>
@@ -7034,7 +6629,7 @@
                   </a:tcPr>
                 </a:tc>
               </a:tr>
-              <a:tr h="388620">
+              <a:tr h="426720">
                 <a:tc>
                   <a:txBody>
                     <a:bodyPr/>
@@ -7042,7 +6637,7 @@
                     <a:p>
                       <a:pPr algn="l"/>
                       <a:r>
-                        <a:rPr sz="1000" b="1">
+                        <a:rPr sz="1100" b="1">
                           <a:solidFill>
                             <a:srgbClr val="1A1A1A"/>
                           </a:solidFill>
@@ -7065,13 +6660,13 @@
                     <a:p>
                       <a:pPr algn="l"/>
                       <a:r>
-                        <a:rPr sz="1000" b="0">
+                        <a:rPr sz="1100" b="0">
                           <a:solidFill>
                             <a:srgbClr val="1A1A1A"/>
                           </a:solidFill>
                           <a:latin typeface="Calibri"/>
                         </a:rPr>
-                        <a:t>Ridge: next 30 s of tilt/vibration/crack + MAE</a:t>
+                        <a:t>Holdout-selected Ridge: next 30 s of the same signals + MAE</a:t>
                       </a:r>
                     </a:p>
                   </a:txBody>
@@ -7088,7 +6683,7 @@
                     <a:p>
                       <a:pPr algn="l"/>
                       <a:r>
-                        <a:rPr sz="1000" b="0">
+                        <a:rPr sz="1100" b="0">
                           <a:solidFill>
                             <a:srgbClr val="1A1A1A"/>
                           </a:solidFill>
@@ -7105,7 +6700,7 @@
                   </a:tcPr>
                 </a:tc>
               </a:tr>
-              <a:tr h="388620">
+              <a:tr h="426720">
                 <a:tc>
                   <a:txBody>
                     <a:bodyPr/>
@@ -7113,7 +6708,7 @@
                     <a:p>
                       <a:pPr algn="l"/>
                       <a:r>
-                        <a:rPr sz="1000" b="1">
+                        <a:rPr sz="1100" b="1">
                           <a:solidFill>
                             <a:srgbClr val="1A1A1A"/>
                           </a:solidFill>
@@ -7136,13 +6731,13 @@
                     <a:p>
                       <a:pPr algn="l"/>
                       <a:r>
-                        <a:rPr sz="1000" b="0">
+                        <a:rPr sz="1100" b="0">
                           <a:solidFill>
                             <a:srgbClr val="1A1A1A"/>
                           </a:solidFill>
                           <a:latin typeface="Calibri"/>
                         </a:rPr>
-                        <a:t>Rules cannot be cleared by ML. A vs B residual = local vs whole-table motion. Rover only after a warning.</a:t>
+                        <a:t>ML cannot clear a rule latch. A vs B residual. Rover only after a warning.</a:t>
                       </a:r>
                     </a:p>
                   </a:txBody>
@@ -7159,13 +6754,13 @@
                     <a:p>
                       <a:pPr algn="l"/>
                       <a:r>
-                        <a:rPr sz="1000" b="0">
+                        <a:rPr sz="1100" b="0">
                           <a:solidFill>
                             <a:srgbClr val="1A1A1A"/>
                           </a:solidFill>
                           <a:latin typeface="Calibri"/>
                         </a:rPr>
-                        <a:t>Not a gas-car maze robot; not LoRa; not autonomous drive</a:t>
+                        <a:t>Not a gas-car maze robot; not LoRa; not autonomous</a:t>
                       </a:r>
                     </a:p>
                   </a:txBody>
@@ -7279,17 +6874,27 @@
             <p:ph type="title"/>
           </p:nvPr>
         </p:nvSpPr>
-        <p:spPr/>
-        <p:txBody>
-          <a:bodyPr/>
+        <p:spPr>
+          <a:xfrm>
+            <a:off x="1719072" y="91440"/>
+            <a:ext cx="7818120" cy="804672"/>
+          </a:xfrm>
+        </p:spPr>
+        <p:txBody>
+          <a:bodyPr wrap="square"/>
           <a:lstStyle/>
           <a:p>
-            <a:pPr eaLnBrk="1" hangingPunct="1"/>
-            <a:r>
-              <a:rPr lang="en-US" sz="3600" b="1" dirty="0">
-                <a:latin typeface="Times New Roman" panose="02020603050405020304" pitchFamily="18" charset="0"/>
-                <a:ea typeface="ＭＳ Ｐゴシック" pitchFamily="1" charset="-128"/>
-                <a:cs typeface="Times New Roman" panose="02020603050405020304" pitchFamily="18" charset="0"/>
+            <a:pPr eaLnBrk="1" hangingPunct="1" algn="l">
+              <a:spcAft>
+                <a:spcPts val="0"/>
+              </a:spcAft>
+            </a:pPr>
+            <a:r>
+              <a:rPr sz="2600" b="1">
+                <a:solidFill>
+                  <a:srgbClr val="0B2C4A"/>
+                </a:solidFill>
+                <a:latin typeface="Calibri"/>
               </a:rPr>
               <a:t>TECHNICAL APPROACH</a:t>
             </a:r>
@@ -7427,6 +7032,12 @@
           <a:prstGeom prst="ellipse">
             <a:avLst/>
           </a:prstGeom>
+          <a:solidFill>
+            <a:srgbClr val="F47B20"/>
+          </a:solidFill>
+          <a:ln>
+            <a:noFill/>
+          </a:ln>
         </p:spPr>
         <p:style>
           <a:lnRef idx="2">
@@ -7448,7 +7059,7 @@
           <a:p>
             <a:pPr algn="ctr">
               <a:spcAft>
-                <a:spcPts val="400"/>
+                <a:spcPts val="0"/>
               </a:spcAft>
             </a:pPr>
             <a:r>
@@ -7502,7 +7113,7 @@
         </p:nvSpPr>
         <p:spPr>
           <a:xfrm>
-            <a:off x="320040" y="1024128"/>
+            <a:off x="320040" y="932688"/>
             <a:ext cx="11521440" cy="237744"/>
           </a:xfrm>
           <a:prstGeom prst="rect">
@@ -7511,12 +7122,14 @@
           <a:noFill/>
         </p:spPr>
         <p:txBody>
-          <a:bodyPr wrap="square" anchor="t"/>
+          <a:bodyPr wrap="square">
+            <a:spAutoFit/>
+          </a:bodyPr>
           <a:lstStyle/>
           <a:p>
             <a:pPr algn="l">
               <a:spcAft>
-                <a:spcPts val="200"/>
+                <a:spcPts val="0"/>
               </a:spcAft>
             </a:pPr>
             <a:r>
@@ -7526,403 +7139,21 @@
                 </a:solidFill>
                 <a:latin typeface="Calibri"/>
               </a:rPr>
-              <a:t>Technologies + method (what is built vs what is claimed)</a:t>
-            </a:r>
-          </a:p>
-        </p:txBody>
-      </p:sp>
-      <p:graphicFrame>
-        <p:nvGraphicFramePr>
-          <p:cNvPr id="17412" name="Table 17411"/>
-          <p:cNvGraphicFramePr>
-            <a:graphicFrameLocks noGrp="1"/>
-          </p:cNvGraphicFramePr>
-          <p:nvPr/>
-        </p:nvGraphicFramePr>
-        <p:xfrm>
-          <a:off x="320040" y="1261872"/>
-          <a:ext cx="11521440" cy="1417320"/>
-        </p:xfrm>
-        <a:graphic>
-          <a:graphicData uri="http://schemas.openxmlformats.org/drawingml/2006/table">
-            <a:tbl>
-              <a:tblPr firstRow="1" bandRow="1">
-                <a:tableStyleId>{5C22544A-7EE6-4342-B048-85BDC9FD1C3A}</a:tableStyleId>
-              </a:tblPr>
-              <a:tblGrid>
-                <a:gridCol w="3840480"/>
-                <a:gridCol w="3840480"/>
-                <a:gridCol w="3840480"/>
-              </a:tblGrid>
-              <a:tr h="283464">
-                <a:tc>
-                  <a:txBody>
-                    <a:bodyPr/>
-                    <a:lstStyle/>
-                    <a:p>
-                      <a:pPr algn="l"/>
-                      <a:r>
-                        <a:rPr sz="1000" b="1">
-                          <a:solidFill>
-                            <a:srgbClr val="FFFFFF"/>
-                          </a:solidFill>
-                          <a:latin typeface="Calibri"/>
-                        </a:rPr>
-                        <a:t>Layer</a:t>
-                      </a:r>
-                    </a:p>
-                  </a:txBody>
-                  <a:tcPr anchor="ctr">
-                    <a:solidFill>
-                      <a:srgbClr val="0B2C4A"/>
-                    </a:solidFill>
-                  </a:tcPr>
-                </a:tc>
-                <a:tc>
-                  <a:txBody>
-                    <a:bodyPr/>
-                    <a:lstStyle/>
-                    <a:p>
-                      <a:pPr algn="l"/>
-                      <a:r>
-                        <a:rPr sz="1000" b="1">
-                          <a:solidFill>
-                            <a:srgbClr val="FFFFFF"/>
-                          </a:solidFill>
-                          <a:latin typeface="Calibri"/>
-                        </a:rPr>
-                        <a:t>Stack</a:t>
-                      </a:r>
-                    </a:p>
-                  </a:txBody>
-                  <a:tcPr anchor="ctr">
-                    <a:solidFill>
-                      <a:srgbClr val="0B2C4A"/>
-                    </a:solidFill>
-                  </a:tcPr>
-                </a:tc>
-                <a:tc>
-                  <a:txBody>
-                    <a:bodyPr/>
-                    <a:lstStyle/>
-                    <a:p>
-                      <a:pPr algn="l"/>
-                      <a:r>
-                        <a:rPr sz="1000" b="1">
-                          <a:solidFill>
-                            <a:srgbClr val="FFFFFF"/>
-                          </a:solidFill>
-                          <a:latin typeface="Calibri"/>
-                        </a:rPr>
-                        <a:t>Role</a:t>
-                      </a:r>
-                    </a:p>
-                  </a:txBody>
-                  <a:tcPr anchor="ctr">
-                    <a:solidFill>
-                      <a:srgbClr val="0B2C4A"/>
-                    </a:solidFill>
-                  </a:tcPr>
-                </a:tc>
-              </a:tr>
-              <a:tr h="283464">
-                <a:tc>
-                  <a:txBody>
-                    <a:bodyPr/>
-                    <a:lstStyle/>
-                    <a:p>
-                      <a:pPr algn="l"/>
-                      <a:r>
-                        <a:rPr sz="1000" b="1">
-                          <a:solidFill>
-                            <a:srgbClr val="1A1A1A"/>
-                          </a:solidFill>
-                          <a:latin typeface="Calibri"/>
-                        </a:rPr>
-                        <a:t>Nodes A/B</a:t>
-                      </a:r>
-                    </a:p>
-                  </a:txBody>
-                  <a:tcPr anchor="ctr">
-                    <a:solidFill>
-                      <a:srgbClr val="FFFFFF"/>
-                    </a:solidFill>
-                  </a:tcPr>
-                </a:tc>
-                <a:tc>
-                  <a:txBody>
-                    <a:bodyPr/>
-                    <a:lstStyle/>
-                    <a:p>
-                      <a:pPr algn="l"/>
-                      <a:r>
-                        <a:rPr sz="1000" b="0">
-                          <a:solidFill>
-                            <a:srgbClr val="1A1A1A"/>
-                          </a:solidFill>
-                          <a:latin typeface="Calibri"/>
-                        </a:rPr>
-                        <a:t>Classic ESP32-WROOM-32, MPU6050 I²C 0x68, Node A 10 kΩ slider GPIO34</a:t>
-                      </a:r>
-                    </a:p>
-                  </a:txBody>
-                  <a:tcPr anchor="ctr">
-                    <a:solidFill>
-                      <a:srgbClr val="FFFFFF"/>
-                    </a:solidFill>
-                  </a:tcPr>
-                </a:tc>
-                <a:tc>
-                  <a:txBody>
-                    <a:bodyPr/>
-                    <a:lstStyle/>
-                    <a:p>
-                      <a:pPr algn="l"/>
-                      <a:r>
-                        <a:rPr sz="1000" b="0">
-                          <a:solidFill>
-                            <a:srgbClr val="1A1A1A"/>
-                          </a:solidFill>
-                          <a:latin typeface="Calibri"/>
-                        </a:rPr>
-                        <a:t>Measure tilt, vibration proxy, crack ADC</a:t>
-                      </a:r>
-                    </a:p>
-                  </a:txBody>
-                  <a:tcPr anchor="ctr">
-                    <a:solidFill>
-                      <a:srgbClr val="FFFFFF"/>
-                    </a:solidFill>
-                  </a:tcPr>
-                </a:tc>
-              </a:tr>
-              <a:tr h="283464">
-                <a:tc>
-                  <a:txBody>
-                    <a:bodyPr/>
-                    <a:lstStyle/>
-                    <a:p>
-                      <a:pPr algn="l"/>
-                      <a:r>
-                        <a:rPr sz="1000" b="1">
-                          <a:solidFill>
-                            <a:srgbClr val="1A1A1A"/>
-                          </a:solidFill>
-                          <a:latin typeface="Calibri"/>
-                        </a:rPr>
-                        <a:t>Receiver</a:t>
-                      </a:r>
-                    </a:p>
-                  </a:txBody>
-                  <a:tcPr anchor="ctr">
-                    <a:solidFill>
-                      <a:srgbClr val="F4F7FA"/>
-                    </a:solidFill>
-                  </a:tcPr>
-                </a:tc>
-                <a:tc>
-                  <a:txBody>
-                    <a:bodyPr/>
-                    <a:lstStyle/>
-                    <a:p>
-                      <a:pPr algn="l"/>
-                      <a:r>
-                        <a:rPr sz="1000" b="0">
-                          <a:solidFill>
-                            <a:srgbClr val="1A1A1A"/>
-                          </a:solidFill>
-                          <a:latin typeface="Calibri"/>
-                        </a:rPr>
-                        <a:t>Waveshare ESP32-S3-Zero, ESP-NOW ch1, USB-C JSON 115200</a:t>
-                      </a:r>
-                    </a:p>
-                  </a:txBody>
-                  <a:tcPr anchor="ctr">
-                    <a:solidFill>
-                      <a:srgbClr val="F4F7FA"/>
-                    </a:solidFill>
-                  </a:tcPr>
-                </a:tc>
-                <a:tc>
-                  <a:txBody>
-                    <a:bodyPr/>
-                    <a:lstStyle/>
-                    <a:p>
-                      <a:pPr algn="l"/>
-                      <a:r>
-                        <a:rPr sz="1000" b="0">
-                          <a:solidFill>
-                            <a:srgbClr val="1A1A1A"/>
-                          </a:solidFill>
-                          <a:latin typeface="Calibri"/>
-                        </a:rPr>
-                        <a:t>Bridge only — no sensors, no ML</a:t>
-                      </a:r>
-                    </a:p>
-                  </a:txBody>
-                  <a:tcPr anchor="ctr">
-                    <a:solidFill>
-                      <a:srgbClr val="F4F7FA"/>
-                    </a:solidFill>
-                  </a:tcPr>
-                </a:tc>
-              </a:tr>
-              <a:tr h="283464">
-                <a:tc>
-                  <a:txBody>
-                    <a:bodyPr/>
-                    <a:lstStyle/>
-                    <a:p>
-                      <a:pPr algn="l"/>
-                      <a:r>
-                        <a:rPr sz="1000" b="1">
-                          <a:solidFill>
-                            <a:srgbClr val="1A1A1A"/>
-                          </a:solidFill>
-                          <a:latin typeface="Calibri"/>
-                        </a:rPr>
-                        <a:t>Laptop ML</a:t>
-                      </a:r>
-                    </a:p>
-                  </a:txBody>
-                  <a:tcPr anchor="ctr">
-                    <a:solidFill>
-                      <a:srgbClr val="FFFFFF"/>
-                    </a:solidFill>
-                  </a:tcPr>
-                </a:tc>
-                <a:tc>
-                  <a:txBody>
-                    <a:bodyPr/>
-                    <a:lstStyle/>
-                    <a:p>
-                      <a:pPr algn="l"/>
-                      <a:r>
-                        <a:rPr sz="1000" b="0">
-                          <a:solidFill>
-                            <a:srgbClr val="1A1A1A"/>
-                          </a:solidFill>
-                          <a:latin typeface="Calibri"/>
-                        </a:rPr>
-                        <a:t>Python, Flask, SQLite, scikit-learn IsolationForest + Ridge, joblib</a:t>
-                      </a:r>
-                    </a:p>
-                  </a:txBody>
-                  <a:tcPr anchor="ctr">
-                    <a:solidFill>
-                      <a:srgbClr val="FFFFFF"/>
-                    </a:solidFill>
-                  </a:tcPr>
-                </a:tc>
-                <a:tc>
-                  <a:txBody>
-                    <a:bodyPr/>
-                    <a:lstStyle/>
-                    <a:p>
-                      <a:pPr algn="l"/>
-                      <a:r>
-                        <a:rPr sz="1000" b="0">
-                          <a:solidFill>
-                            <a:srgbClr val="1A1A1A"/>
-                          </a:solidFill>
-                          <a:latin typeface="Calibri"/>
-                        </a:rPr>
-                        <a:t>Validate, store, warn, explain</a:t>
-                      </a:r>
-                    </a:p>
-                  </a:txBody>
-                  <a:tcPr anchor="ctr">
-                    <a:solidFill>
-                      <a:srgbClr val="FFFFFF"/>
-                    </a:solidFill>
-                  </a:tcPr>
-                </a:tc>
-              </a:tr>
-              <a:tr h="283464">
-                <a:tc>
-                  <a:txBody>
-                    <a:bodyPr/>
-                    <a:lstStyle/>
-                    <a:p>
-                      <a:pPr algn="l"/>
-                      <a:r>
-                        <a:rPr sz="1000" b="1">
-                          <a:solidFill>
-                            <a:srgbClr val="1A1A1A"/>
-                          </a:solidFill>
-                          <a:latin typeface="Calibri"/>
-                        </a:rPr>
-                        <a:t>Rover</a:t>
-                      </a:r>
-                    </a:p>
-                  </a:txBody>
-                  <a:tcPr anchor="ctr">
-                    <a:solidFill>
-                      <a:srgbClr val="F4F7FA"/>
-                    </a:solidFill>
-                  </a:tcPr>
-                </a:tc>
-                <a:tc>
-                  <a:txBody>
-                    <a:bodyPr/>
-                    <a:lstStyle/>
-                    <a:p>
-                      <a:pPr algn="l"/>
-                      <a:r>
-                        <a:rPr sz="1000" b="0">
-                          <a:solidFill>
-                            <a:srgbClr val="1A1A1A"/>
-                          </a:solidFill>
-                          <a:latin typeface="Calibri"/>
-                        </a:rPr>
-                        <a:t>Classic ESP32, L298N, HC-SR04, IR, MQ-7 raw, Wi-Fi AP Mine-Rover-AP</a:t>
-                      </a:r>
-                    </a:p>
-                  </a:txBody>
-                  <a:tcPr anchor="ctr">
-                    <a:solidFill>
-                      <a:srgbClr val="F4F7FA"/>
-                    </a:solidFill>
-                  </a:tcPr>
-                </a:tc>
-                <a:tc>
-                  <a:txBody>
-                    <a:bodyPr/>
-                    <a:lstStyle/>
-                    <a:p>
-                      <a:pPr algn="l"/>
-                      <a:r>
-                        <a:rPr sz="1000" b="0">
-                          <a:solidFill>
-                            <a:srgbClr val="1A1A1A"/>
-                          </a:solidFill>
-                          <a:latin typeface="Calibri"/>
-                        </a:rPr>
-                        <a:t>Remote inspect; separate radio</a:t>
-                      </a:r>
-                    </a:p>
-                  </a:txBody>
-                  <a:tcPr anchor="ctr">
-                    <a:solidFill>
-                      <a:srgbClr val="F4F7FA"/>
-                    </a:solidFill>
-                  </a:tcPr>
-                </a:tc>
-              </a:tr>
-            </a:tbl>
-          </a:graphicData>
-        </a:graphic>
-      </p:graphicFrame>
-      <p:sp>
-        <p:nvSpPr>
-          <p:cNvPr id="17413" name="Rounded Rectangle 17412"/>
+              <a:t>Technologies + method  ·  two radios  ·  one local laptop  ·  rover is not step 6 of USB</a:t>
+            </a:r>
+          </a:p>
+        </p:txBody>
+      </p:sp>
+      <p:sp>
+        <p:nvSpPr>
+          <p:cNvPr id="17412" name="Rounded Rectangle 17411"/>
           <p:cNvSpPr/>
           <p:nvPr/>
         </p:nvSpPr>
         <p:spPr>
           <a:xfrm>
-            <a:off x="320040" y="2816352"/>
-            <a:ext cx="1554480" cy="658368"/>
+            <a:off x="320040" y="1188720"/>
+            <a:ext cx="2788920" cy="1078992"/>
           </a:xfrm>
           <a:prstGeom prst="roundRect">
             <a:avLst>
@@ -7930,12 +7161,10 @@
             </a:avLst>
           </a:prstGeom>
           <a:solidFill>
-            <a:srgbClr val="0B2C4A"/>
+            <a:srgbClr val="F4F7FA"/>
           </a:solidFill>
-          <a:ln w="9525">
-            <a:solidFill>
-              <a:srgbClr val="0B2C4A"/>
-            </a:solidFill>
+          <a:ln>
+            <a:noFill/>
           </a:ln>
         </p:spPr>
         <p:style>
@@ -7962,117 +7191,23 @@
       </p:sp>
       <p:sp>
         <p:nvSpPr>
-          <p:cNvPr id="17414" name="TextBox 17413"/>
-          <p:cNvSpPr txBox="1"/>
+          <p:cNvPr id="17413" name="Rectangle 17412"/>
+          <p:cNvSpPr/>
           <p:nvPr/>
         </p:nvSpPr>
         <p:spPr>
           <a:xfrm>
-            <a:off x="320040" y="2889504"/>
-            <a:ext cx="1554480" cy="548640"/>
+            <a:off x="320040" y="1188720"/>
+            <a:ext cx="91440" cy="1078992"/>
           </a:xfrm>
           <a:prstGeom prst="rect">
             <a:avLst/>
           </a:prstGeom>
-          <a:noFill/>
-        </p:spPr>
-        <p:txBody>
-          <a:bodyPr wrap="square" anchor="t"/>
-          <a:lstStyle/>
-          <a:p>
-            <a:pPr algn="ctr">
-              <a:spcAft>
-                <a:spcPts val="200"/>
-              </a:spcAft>
-            </a:pPr>
-            <a:r>
-              <a:rPr sz="1100" b="1">
-                <a:solidFill>
-                  <a:srgbClr val="FFFFFF"/>
-                </a:solidFill>
-                <a:latin typeface="Calibri"/>
-              </a:rPr>
-              <a:t>Node A</a:t>
-            </a:r>
-          </a:p>
-          <a:p>
-            <a:pPr algn="ctr">
-              <a:spcAft>
-                <a:spcPts val="200"/>
-              </a:spcAft>
-            </a:pPr>
-            <a:r>
-              <a:rPr sz="1100" b="1">
-                <a:solidFill>
-                  <a:srgbClr val="FFFFFF"/>
-                </a:solidFill>
-                <a:latin typeface="Calibri"/>
-              </a:rPr>
-              <a:t>Node B</a:t>
-            </a:r>
-          </a:p>
-        </p:txBody>
-      </p:sp>
-      <p:sp>
-        <p:nvSpPr>
-          <p:cNvPr id="17415" name="TextBox 17414"/>
-          <p:cNvSpPr txBox="1"/>
-          <p:nvPr/>
-        </p:nvSpPr>
-        <p:spPr>
-          <a:xfrm>
-            <a:off x="1801368" y="2980944"/>
-            <a:ext cx="256032" cy="320040"/>
-          </a:xfrm>
-          <a:prstGeom prst="rect">
-            <a:avLst/>
-          </a:prstGeom>
-          <a:noFill/>
-        </p:spPr>
-        <p:txBody>
-          <a:bodyPr wrap="square" anchor="t"/>
-          <a:lstStyle/>
-          <a:p>
-            <a:pPr algn="ctr">
-              <a:spcAft>
-                <a:spcPts val="200"/>
-              </a:spcAft>
-            </a:pPr>
-            <a:r>
-              <a:rPr sz="1600" b="1">
-                <a:solidFill>
-                  <a:srgbClr val="0B2C4A"/>
-                </a:solidFill>
-                <a:latin typeface="Calibri"/>
-              </a:rPr>
-              <a:t>→</a:t>
-            </a:r>
-          </a:p>
-        </p:txBody>
-      </p:sp>
-      <p:sp>
-        <p:nvSpPr>
-          <p:cNvPr id="17416" name="Rounded Rectangle 17415"/>
-          <p:cNvSpPr/>
-          <p:nvPr/>
-        </p:nvSpPr>
-        <p:spPr>
-          <a:xfrm>
-            <a:off x="2194559" y="2816352"/>
-            <a:ext cx="1554480" cy="658368"/>
-          </a:xfrm>
-          <a:prstGeom prst="roundRect">
-            <a:avLst>
-              <a:gd name="adj" fmla="val 8000"/>
-            </a:avLst>
-          </a:prstGeom>
           <a:solidFill>
-            <a:srgbClr val="0E7C7B"/>
+            <a:srgbClr val="0B2C4A"/>
           </a:solidFill>
-          <a:ln w="9525">
-            <a:solidFill>
-              <a:srgbClr val="0E7C7B"/>
-            </a:solidFill>
+          <a:ln>
+            <a:noFill/>
           </a:ln>
         </p:spPr>
         <p:style>
@@ -8097,16 +7232,40 @@
           </a:p>
         </p:txBody>
       </p:sp>
-      <p:sp>
-        <p:nvSpPr>
-          <p:cNvPr id="17417" name="TextBox 17416"/>
+      <p:pic>
+        <p:nvPicPr>
+          <p:cNvPr id="17414" name="Picture 17413" descr="icon_nodes.png"/>
+          <p:cNvPicPr>
+            <a:picLocks noChangeAspect="1"/>
+          </p:cNvPicPr>
+          <p:nvPr/>
+        </p:nvPicPr>
+        <p:blipFill>
+          <a:blip r:embed="rId4"/>
+          <a:stretch>
+            <a:fillRect/>
+          </a:stretch>
+        </p:blipFill>
+        <p:spPr>
+          <a:xfrm>
+            <a:off x="484632" y="1280160"/>
+            <a:ext cx="347472" cy="347472"/>
+          </a:xfrm>
+          <a:prstGeom prst="rect">
+            <a:avLst/>
+          </a:prstGeom>
+        </p:spPr>
+      </p:pic>
+      <p:sp>
+        <p:nvSpPr>
+          <p:cNvPr id="17415" name="TextBox 17414"/>
           <p:cNvSpPr txBox="1"/>
           <p:nvPr/>
         </p:nvSpPr>
         <p:spPr>
           <a:xfrm>
-            <a:off x="2194559" y="2889504"/>
-            <a:ext cx="1554480" cy="548640"/>
+            <a:off x="886968" y="1261872"/>
+            <a:ext cx="2103120" cy="292608"/>
           </a:xfrm>
           <a:prstGeom prst="rect">
             <a:avLst/>
@@ -8114,89 +7273,93 @@
           <a:noFill/>
         </p:spPr>
         <p:txBody>
-          <a:bodyPr wrap="square" anchor="t"/>
+          <a:bodyPr wrap="square">
+            <a:spAutoFit/>
+          </a:bodyPr>
           <a:lstStyle/>
           <a:p>
-            <a:pPr algn="ctr">
+            <a:pPr algn="l">
               <a:spcAft>
-                <a:spcPts val="200"/>
+                <a:spcPts val="0"/>
               </a:spcAft>
             </a:pPr>
             <a:r>
-              <a:rPr sz="1100" b="1">
-                <a:solidFill>
-                  <a:srgbClr val="FFFFFF"/>
-                </a:solidFill>
-                <a:latin typeface="Calibri"/>
-              </a:rPr>
-              <a:t>S3-Zero</a:t>
-            </a:r>
-          </a:p>
-          <a:p>
-            <a:pPr algn="ctr">
-              <a:spcAft>
-                <a:spcPts val="200"/>
-              </a:spcAft>
-            </a:pPr>
-            <a:r>
-              <a:rPr sz="1100" b="1">
-                <a:solidFill>
-                  <a:srgbClr val="FFFFFF"/>
-                </a:solidFill>
-                <a:latin typeface="Calibri"/>
-              </a:rPr>
-              <a:t>USB JSON</a:t>
-            </a:r>
-          </a:p>
-        </p:txBody>
-      </p:sp>
-      <p:sp>
-        <p:nvSpPr>
-          <p:cNvPr id="17418" name="TextBox 17417"/>
-          <p:cNvSpPr txBox="1"/>
-          <p:nvPr/>
-        </p:nvSpPr>
-        <p:spPr>
-          <a:xfrm>
-            <a:off x="3675887" y="2980944"/>
-            <a:ext cx="256032" cy="320040"/>
-          </a:xfrm>
-          <a:prstGeom prst="rect">
-            <a:avLst/>
-          </a:prstGeom>
-          <a:noFill/>
-        </p:spPr>
-        <p:txBody>
-          <a:bodyPr wrap="square" anchor="t"/>
-          <a:lstStyle/>
-          <a:p>
-            <a:pPr algn="ctr">
-              <a:spcAft>
-                <a:spcPts val="200"/>
-              </a:spcAft>
-            </a:pPr>
-            <a:r>
-              <a:rPr sz="1600" b="1">
+              <a:rPr sz="1300" b="1">
                 <a:solidFill>
                   <a:srgbClr val="0B2C4A"/>
                 </a:solidFill>
                 <a:latin typeface="Calibri"/>
               </a:rPr>
-              <a:t>→</a:t>
-            </a:r>
-          </a:p>
-        </p:txBody>
-      </p:sp>
-      <p:sp>
-        <p:nvSpPr>
-          <p:cNvPr id="17419" name="Rounded Rectangle 17418"/>
+              <a:t>NODES A + B</a:t>
+            </a:r>
+          </a:p>
+        </p:txBody>
+      </p:sp>
+      <p:sp>
+        <p:nvSpPr>
+          <p:cNvPr id="17416" name="TextBox 17415"/>
+          <p:cNvSpPr txBox="1"/>
+          <p:nvPr/>
+        </p:nvSpPr>
+        <p:spPr>
+          <a:xfrm>
+            <a:off x="484632" y="1645920"/>
+            <a:ext cx="2505456" cy="548640"/>
+          </a:xfrm>
+          <a:prstGeom prst="rect">
+            <a:avLst/>
+          </a:prstGeom>
+          <a:noFill/>
+        </p:spPr>
+        <p:txBody>
+          <a:bodyPr wrap="square">
+            <a:spAutoFit/>
+          </a:bodyPr>
+          <a:lstStyle/>
+          <a:p>
+            <a:pPr algn="l">
+              <a:spcAft>
+                <a:spcPts val="100"/>
+              </a:spcAft>
+            </a:pPr>
+            <a:r>
+              <a:rPr sz="1100" b="0">
+                <a:solidFill>
+                  <a:srgbClr val="1A1A1A"/>
+                </a:solidFill>
+                <a:latin typeface="Calibri"/>
+              </a:rPr>
+              <a:t>ESP32-WROOM-32 · MPU 0x68</a:t>
+            </a:r>
+          </a:p>
+          <a:p>
+            <a:pPr algn="l">
+              <a:spcAft>
+                <a:spcPts val="100"/>
+              </a:spcAft>
+            </a:pPr>
+            <a:r>
+              <a:rPr sz="1100" b="0">
+                <a:solidFill>
+                  <a:srgbClr val="4A5563"/>
+                </a:solidFill>
+                <a:latin typeface="Calibri"/>
+              </a:rPr>
+              <a:t>A: slider GPIO34   B: no slider</a:t>
+            </a:r>
+          </a:p>
+        </p:txBody>
+      </p:sp>
+      <p:sp>
+        <p:nvSpPr>
+          <p:cNvPr id="17417" name="Rounded Rectangle 17416"/>
           <p:cNvSpPr/>
           <p:nvPr/>
         </p:nvSpPr>
         <p:spPr>
           <a:xfrm>
-            <a:off x="4069078" y="2816352"/>
-            <a:ext cx="1554480" cy="658368"/>
+            <a:off x="3246120" y="1188720"/>
+            <a:ext cx="2788920" cy="1078992"/>
           </a:xfrm>
           <a:prstGeom prst="roundRect">
             <a:avLst>
@@ -8204,12 +7367,10 @@
             </a:avLst>
           </a:prstGeom>
           <a:solidFill>
-            <a:srgbClr val="0B2C4A"/>
+            <a:srgbClr val="F4F7FA"/>
           </a:solidFill>
-          <a:ln w="9525">
-            <a:solidFill>
-              <a:srgbClr val="0B2C4A"/>
-            </a:solidFill>
+          <a:ln>
+            <a:noFill/>
           </a:ln>
         </p:spPr>
         <p:style>
@@ -8236,117 +7397,23 @@
       </p:sp>
       <p:sp>
         <p:nvSpPr>
-          <p:cNvPr id="17420" name="TextBox 17419"/>
-          <p:cNvSpPr txBox="1"/>
+          <p:cNvPr id="17418" name="Rectangle 17417"/>
+          <p:cNvSpPr/>
           <p:nvPr/>
         </p:nvSpPr>
         <p:spPr>
           <a:xfrm>
-            <a:off x="4069078" y="2889504"/>
-            <a:ext cx="1554480" cy="548640"/>
+            <a:off x="3246120" y="1188720"/>
+            <a:ext cx="91440" cy="1078992"/>
           </a:xfrm>
           <a:prstGeom prst="rect">
             <a:avLst/>
           </a:prstGeom>
-          <a:noFill/>
-        </p:spPr>
-        <p:txBody>
-          <a:bodyPr wrap="square" anchor="t"/>
-          <a:lstStyle/>
-          <a:p>
-            <a:pPr algn="ctr">
-              <a:spcAft>
-                <a:spcPts val="200"/>
-              </a:spcAft>
-            </a:pPr>
-            <a:r>
-              <a:rPr sz="1100" b="1">
-                <a:solidFill>
-                  <a:srgbClr val="FFFFFF"/>
-                </a:solidFill>
-                <a:latin typeface="Calibri"/>
-              </a:rPr>
-              <a:t>Validate</a:t>
-            </a:r>
-          </a:p>
-          <a:p>
-            <a:pPr algn="ctr">
-              <a:spcAft>
-                <a:spcPts val="200"/>
-              </a:spcAft>
-            </a:pPr>
-            <a:r>
-              <a:rPr sz="1100" b="1">
-                <a:solidFill>
-                  <a:srgbClr val="FFFFFF"/>
-                </a:solidFill>
-                <a:latin typeface="Calibri"/>
-              </a:rPr>
-              <a:t>+ features</a:t>
-            </a:r>
-          </a:p>
-        </p:txBody>
-      </p:sp>
-      <p:sp>
-        <p:nvSpPr>
-          <p:cNvPr id="17421" name="TextBox 17420"/>
-          <p:cNvSpPr txBox="1"/>
-          <p:nvPr/>
-        </p:nvSpPr>
-        <p:spPr>
-          <a:xfrm>
-            <a:off x="5550406" y="2980944"/>
-            <a:ext cx="256032" cy="320040"/>
-          </a:xfrm>
-          <a:prstGeom prst="rect">
-            <a:avLst/>
-          </a:prstGeom>
-          <a:noFill/>
-        </p:spPr>
-        <p:txBody>
-          <a:bodyPr wrap="square" anchor="t"/>
-          <a:lstStyle/>
-          <a:p>
-            <a:pPr algn="ctr">
-              <a:spcAft>
-                <a:spcPts val="200"/>
-              </a:spcAft>
-            </a:pPr>
-            <a:r>
-              <a:rPr sz="1600" b="1">
-                <a:solidFill>
-                  <a:srgbClr val="0B2C4A"/>
-                </a:solidFill>
-                <a:latin typeface="Calibri"/>
-              </a:rPr>
-              <a:t>→</a:t>
-            </a:r>
-          </a:p>
-        </p:txBody>
-      </p:sp>
-      <p:sp>
-        <p:nvSpPr>
-          <p:cNvPr id="17422" name="Rounded Rectangle 17421"/>
-          <p:cNvSpPr/>
-          <p:nvPr/>
-        </p:nvSpPr>
-        <p:spPr>
-          <a:xfrm>
-            <a:off x="5943597" y="2816352"/>
-            <a:ext cx="1554480" cy="658368"/>
-          </a:xfrm>
-          <a:prstGeom prst="roundRect">
-            <a:avLst>
-              <a:gd name="adj" fmla="val 8000"/>
-            </a:avLst>
-          </a:prstGeom>
           <a:solidFill>
-            <a:srgbClr val="0E7C7B"/>
+            <a:srgbClr val="0B2C4A"/>
           </a:solidFill>
-          <a:ln w="9525">
-            <a:solidFill>
-              <a:srgbClr val="0E7C7B"/>
-            </a:solidFill>
+          <a:ln>
+            <a:noFill/>
           </a:ln>
         </p:spPr>
         <p:style>
@@ -8371,16 +7438,40 @@
           </a:p>
         </p:txBody>
       </p:sp>
-      <p:sp>
-        <p:nvSpPr>
-          <p:cNvPr id="17423" name="TextBox 17422"/>
+      <p:pic>
+        <p:nvPicPr>
+          <p:cNvPr id="17419" name="Picture 17418" descr="icon_usb.png"/>
+          <p:cNvPicPr>
+            <a:picLocks noChangeAspect="1"/>
+          </p:cNvPicPr>
+          <p:nvPr/>
+        </p:nvPicPr>
+        <p:blipFill>
+          <a:blip r:embed="rId5"/>
+          <a:stretch>
+            <a:fillRect/>
+          </a:stretch>
+        </p:blipFill>
+        <p:spPr>
+          <a:xfrm>
+            <a:off x="3410712" y="1280160"/>
+            <a:ext cx="347472" cy="347472"/>
+          </a:xfrm>
+          <a:prstGeom prst="rect">
+            <a:avLst/>
+          </a:prstGeom>
+        </p:spPr>
+      </p:pic>
+      <p:sp>
+        <p:nvSpPr>
+          <p:cNvPr id="17420" name="TextBox 17419"/>
           <p:cNvSpPr txBox="1"/>
           <p:nvPr/>
         </p:nvSpPr>
         <p:spPr>
           <a:xfrm>
-            <a:off x="5943597" y="2889504"/>
-            <a:ext cx="1554480" cy="548640"/>
+            <a:off x="3813048" y="1261872"/>
+            <a:ext cx="2103120" cy="292608"/>
           </a:xfrm>
           <a:prstGeom prst="rect">
             <a:avLst/>
@@ -8388,89 +7479,93 @@
           <a:noFill/>
         </p:spPr>
         <p:txBody>
-          <a:bodyPr wrap="square" anchor="t"/>
+          <a:bodyPr wrap="square">
+            <a:spAutoFit/>
+          </a:bodyPr>
           <a:lstStyle/>
           <a:p>
-            <a:pPr algn="ctr">
+            <a:pPr algn="l">
               <a:spcAft>
-                <a:spcPts val="200"/>
+                <a:spcPts val="0"/>
               </a:spcAft>
             </a:pPr>
             <a:r>
-              <a:rPr sz="1100" b="1">
-                <a:solidFill>
-                  <a:srgbClr val="FFFFFF"/>
-                </a:solidFill>
-                <a:latin typeface="Calibri"/>
-              </a:rPr>
-              <a:t>Rules +</a:t>
-            </a:r>
-          </a:p>
-          <a:p>
-            <a:pPr algn="ctr">
-              <a:spcAft>
-                <a:spcPts val="200"/>
-              </a:spcAft>
-            </a:pPr>
-            <a:r>
-              <a:rPr sz="1100" b="1">
-                <a:solidFill>
-                  <a:srgbClr val="FFFFFF"/>
-                </a:solidFill>
-                <a:latin typeface="Calibri"/>
-              </a:rPr>
-              <a:t>IF + Ridge</a:t>
-            </a:r>
-          </a:p>
-        </p:txBody>
-      </p:sp>
-      <p:sp>
-        <p:nvSpPr>
-          <p:cNvPr id="17424" name="TextBox 17423"/>
-          <p:cNvSpPr txBox="1"/>
-          <p:nvPr/>
-        </p:nvSpPr>
-        <p:spPr>
-          <a:xfrm>
-            <a:off x="7424925" y="2980944"/>
-            <a:ext cx="256032" cy="320040"/>
-          </a:xfrm>
-          <a:prstGeom prst="rect">
-            <a:avLst/>
-          </a:prstGeom>
-          <a:noFill/>
-        </p:spPr>
-        <p:txBody>
-          <a:bodyPr wrap="square" anchor="t"/>
-          <a:lstStyle/>
-          <a:p>
-            <a:pPr algn="ctr">
-              <a:spcAft>
-                <a:spcPts val="200"/>
-              </a:spcAft>
-            </a:pPr>
-            <a:r>
-              <a:rPr sz="1600" b="1">
+              <a:rPr sz="1300" b="1">
                 <a:solidFill>
                   <a:srgbClr val="0B2C4A"/>
                 </a:solidFill>
                 <a:latin typeface="Calibri"/>
               </a:rPr>
-              <a:t>→</a:t>
-            </a:r>
-          </a:p>
-        </p:txBody>
-      </p:sp>
-      <p:sp>
-        <p:nvSpPr>
-          <p:cNvPr id="17425" name="Rounded Rectangle 17424"/>
+              <a:t>RECEIVER</a:t>
+            </a:r>
+          </a:p>
+        </p:txBody>
+      </p:sp>
+      <p:sp>
+        <p:nvSpPr>
+          <p:cNvPr id="17421" name="TextBox 17420"/>
+          <p:cNvSpPr txBox="1"/>
+          <p:nvPr/>
+        </p:nvSpPr>
+        <p:spPr>
+          <a:xfrm>
+            <a:off x="3410712" y="1645920"/>
+            <a:ext cx="2505456" cy="548640"/>
+          </a:xfrm>
+          <a:prstGeom prst="rect">
+            <a:avLst/>
+          </a:prstGeom>
+          <a:noFill/>
+        </p:spPr>
+        <p:txBody>
+          <a:bodyPr wrap="square">
+            <a:spAutoFit/>
+          </a:bodyPr>
+          <a:lstStyle/>
+          <a:p>
+            <a:pPr algn="l">
+              <a:spcAft>
+                <a:spcPts val="100"/>
+              </a:spcAft>
+            </a:pPr>
+            <a:r>
+              <a:rPr sz="1100" b="0">
+                <a:solidFill>
+                  <a:srgbClr val="1A1A1A"/>
+                </a:solidFill>
+                <a:latin typeface="Calibri"/>
+              </a:rPr>
+              <a:t>Waveshare ESP32-S3-Zero</a:t>
+            </a:r>
+          </a:p>
+          <a:p>
+            <a:pPr algn="l">
+              <a:spcAft>
+                <a:spcPts val="100"/>
+              </a:spcAft>
+            </a:pPr>
+            <a:r>
+              <a:rPr sz="1100" b="0">
+                <a:solidFill>
+                  <a:srgbClr val="4A5563"/>
+                </a:solidFill>
+                <a:latin typeface="Calibri"/>
+              </a:rPr>
+              <a:t>ESP-NOW ch1 → USB JSON · no ML</a:t>
+            </a:r>
+          </a:p>
+        </p:txBody>
+      </p:sp>
+      <p:sp>
+        <p:nvSpPr>
+          <p:cNvPr id="17422" name="Rounded Rectangle 17421"/>
           <p:cNvSpPr/>
           <p:nvPr/>
         </p:nvSpPr>
         <p:spPr>
           <a:xfrm>
-            <a:off x="7818116" y="2816352"/>
-            <a:ext cx="1554480" cy="658368"/>
+            <a:off x="6172200" y="1188720"/>
+            <a:ext cx="2788920" cy="1078992"/>
           </a:xfrm>
           <a:prstGeom prst="roundRect">
             <a:avLst>
@@ -8478,12 +7573,10 @@
             </a:avLst>
           </a:prstGeom>
           <a:solidFill>
-            <a:srgbClr val="F47B20"/>
+            <a:srgbClr val="F4F7FA"/>
           </a:solidFill>
-          <a:ln w="9525">
-            <a:solidFill>
-              <a:srgbClr val="F47B20"/>
-            </a:solidFill>
+          <a:ln>
+            <a:noFill/>
           </a:ln>
         </p:spPr>
         <p:style>
@@ -8510,117 +7603,23 @@
       </p:sp>
       <p:sp>
         <p:nvSpPr>
-          <p:cNvPr id="17426" name="TextBox 17425"/>
-          <p:cNvSpPr txBox="1"/>
+          <p:cNvPr id="17423" name="Rectangle 17422"/>
+          <p:cNvSpPr/>
           <p:nvPr/>
         </p:nvSpPr>
         <p:spPr>
           <a:xfrm>
-            <a:off x="7818116" y="2889504"/>
-            <a:ext cx="1554480" cy="548640"/>
+            <a:off x="6172200" y="1188720"/>
+            <a:ext cx="91440" cy="1078992"/>
           </a:xfrm>
           <a:prstGeom prst="rect">
             <a:avLst/>
           </a:prstGeom>
-          <a:noFill/>
-        </p:spPr>
-        <p:txBody>
-          <a:bodyPr wrap="square" anchor="t"/>
-          <a:lstStyle/>
-          <a:p>
-            <a:pPr algn="ctr">
-              <a:spcAft>
-                <a:spcPts val="200"/>
-              </a:spcAft>
-            </a:pPr>
-            <a:r>
-              <a:rPr sz="1100" b="1">
-                <a:solidFill>
-                  <a:srgbClr val="FFFFFF"/>
-                </a:solidFill>
-                <a:latin typeface="Calibri"/>
-              </a:rPr>
-              <a:t>Dashboard</a:t>
-            </a:r>
-          </a:p>
-          <a:p>
-            <a:pPr algn="ctr">
-              <a:spcAft>
-                <a:spcPts val="200"/>
-              </a:spcAft>
-            </a:pPr>
-            <a:r>
-              <a:rPr sz="1100" b="1">
-                <a:solidFill>
-                  <a:srgbClr val="FFFFFF"/>
-                </a:solidFill>
-                <a:latin typeface="Calibri"/>
-              </a:rPr>
-              <a:t>127.0.0.1</a:t>
-            </a:r>
-          </a:p>
-        </p:txBody>
-      </p:sp>
-      <p:sp>
-        <p:nvSpPr>
-          <p:cNvPr id="17427" name="TextBox 17426"/>
-          <p:cNvSpPr txBox="1"/>
-          <p:nvPr/>
-        </p:nvSpPr>
-        <p:spPr>
-          <a:xfrm>
-            <a:off x="9299444" y="2980944"/>
-            <a:ext cx="256032" cy="320040"/>
-          </a:xfrm>
-          <a:prstGeom prst="rect">
-            <a:avLst/>
-          </a:prstGeom>
-          <a:noFill/>
-        </p:spPr>
-        <p:txBody>
-          <a:bodyPr wrap="square" anchor="t"/>
-          <a:lstStyle/>
-          <a:p>
-            <a:pPr algn="ctr">
-              <a:spcAft>
-                <a:spcPts val="200"/>
-              </a:spcAft>
-            </a:pPr>
-            <a:r>
-              <a:rPr sz="1600" b="1">
-                <a:solidFill>
-                  <a:srgbClr val="0B2C4A"/>
-                </a:solidFill>
-                <a:latin typeface="Calibri"/>
-              </a:rPr>
-              <a:t>→</a:t>
-            </a:r>
-          </a:p>
-        </p:txBody>
-      </p:sp>
-      <p:sp>
-        <p:nvSpPr>
-          <p:cNvPr id="17428" name="Rounded Rectangle 17427"/>
-          <p:cNvSpPr/>
-          <p:nvPr/>
-        </p:nvSpPr>
-        <p:spPr>
-          <a:xfrm>
-            <a:off x="9692635" y="2816352"/>
-            <a:ext cx="1554480" cy="658368"/>
-          </a:xfrm>
-          <a:prstGeom prst="roundRect">
-            <a:avLst>
-              <a:gd name="adj" fmla="val 8000"/>
-            </a:avLst>
-          </a:prstGeom>
           <a:solidFill>
-            <a:srgbClr val="C48A12"/>
+            <a:srgbClr val="F47B20"/>
           </a:solidFill>
-          <a:ln w="9525">
-            <a:solidFill>
-              <a:srgbClr val="C48A12"/>
-            </a:solidFill>
+          <a:ln>
+            <a:noFill/>
           </a:ln>
         </p:spPr>
         <p:style>
@@ -8645,16 +7644,40 @@
           </a:p>
         </p:txBody>
       </p:sp>
-      <p:sp>
-        <p:nvSpPr>
-          <p:cNvPr id="17429" name="TextBox 17428"/>
+      <p:pic>
+        <p:nvPicPr>
+          <p:cNvPr id="17424" name="Picture 17423" descr="icon_ml.png"/>
+          <p:cNvPicPr>
+            <a:picLocks noChangeAspect="1"/>
+          </p:cNvPicPr>
+          <p:nvPr/>
+        </p:nvPicPr>
+        <p:blipFill>
+          <a:blip r:embed="rId6"/>
+          <a:stretch>
+            <a:fillRect/>
+          </a:stretch>
+        </p:blipFill>
+        <p:spPr>
+          <a:xfrm>
+            <a:off x="6336792" y="1280160"/>
+            <a:ext cx="347472" cy="347472"/>
+          </a:xfrm>
+          <a:prstGeom prst="rect">
+            <a:avLst/>
+          </a:prstGeom>
+        </p:spPr>
+      </p:pic>
+      <p:sp>
+        <p:nvSpPr>
+          <p:cNvPr id="17425" name="TextBox 17424"/>
           <p:cNvSpPr txBox="1"/>
           <p:nvPr/>
         </p:nvSpPr>
         <p:spPr>
           <a:xfrm>
-            <a:off x="9692635" y="2889504"/>
-            <a:ext cx="1554480" cy="548640"/>
+            <a:off x="6739128" y="1261872"/>
+            <a:ext cx="2103120" cy="292608"/>
           </a:xfrm>
           <a:prstGeom prst="rect">
             <a:avLst/>
@@ -8662,353 +7685,826 @@
           <a:noFill/>
         </p:spPr>
         <p:txBody>
-          <a:bodyPr wrap="square" anchor="t"/>
+          <a:bodyPr wrap="square">
+            <a:spAutoFit/>
+          </a:bodyPr>
           <a:lstStyle/>
           <a:p>
-            <a:pPr algn="ctr">
+            <a:pPr algn="l">
               <a:spcAft>
-                <a:spcPts val="200"/>
+                <a:spcPts val="0"/>
               </a:spcAft>
             </a:pPr>
             <a:r>
-              <a:rPr sz="1100" b="1">
+              <a:rPr sz="1300" b="1">
+                <a:solidFill>
+                  <a:srgbClr val="F47B20"/>
+                </a:solidFill>
+                <a:latin typeface="Calibri"/>
+              </a:rPr>
+              <a:t>LAPTOP ML</a:t>
+            </a:r>
+          </a:p>
+        </p:txBody>
+      </p:sp>
+      <p:sp>
+        <p:nvSpPr>
+          <p:cNvPr id="17426" name="TextBox 17425"/>
+          <p:cNvSpPr txBox="1"/>
+          <p:nvPr/>
+        </p:nvSpPr>
+        <p:spPr>
+          <a:xfrm>
+            <a:off x="6336792" y="1645920"/>
+            <a:ext cx="2505456" cy="548640"/>
+          </a:xfrm>
+          <a:prstGeom prst="rect">
+            <a:avLst/>
+          </a:prstGeom>
+          <a:noFill/>
+        </p:spPr>
+        <p:txBody>
+          <a:bodyPr wrap="square">
+            <a:spAutoFit/>
+          </a:bodyPr>
+          <a:lstStyle/>
+          <a:p>
+            <a:pPr algn="l">
+              <a:spcAft>
+                <a:spcPts val="100"/>
+              </a:spcAft>
+            </a:pPr>
+            <a:r>
+              <a:rPr sz="1100" b="0">
+                <a:solidFill>
+                  <a:srgbClr val="1A1A1A"/>
+                </a:solidFill>
+                <a:latin typeface="Calibri"/>
+              </a:rPr>
+              <a:t>Flask · SQLite · scikit-learn</a:t>
+            </a:r>
+          </a:p>
+          <a:p>
+            <a:pPr algn="l">
+              <a:spcAft>
+                <a:spcPts val="100"/>
+              </a:spcAft>
+            </a:pPr>
+            <a:r>
+              <a:rPr sz="1100" b="0">
+                <a:solidFill>
+                  <a:srgbClr val="4A5563"/>
+                </a:solidFill>
+                <a:latin typeface="Calibri"/>
+              </a:rPr>
+              <a:t>Isolation Forest + Ridge 30 s</a:t>
+            </a:r>
+          </a:p>
+        </p:txBody>
+      </p:sp>
+      <p:sp>
+        <p:nvSpPr>
+          <p:cNvPr id="17427" name="Rounded Rectangle 17426"/>
+          <p:cNvSpPr/>
+          <p:nvPr/>
+        </p:nvSpPr>
+        <p:spPr>
+          <a:xfrm>
+            <a:off x="9098280" y="1188720"/>
+            <a:ext cx="2788920" cy="1078992"/>
+          </a:xfrm>
+          <a:prstGeom prst="roundRect">
+            <a:avLst>
+              <a:gd name="adj" fmla="val 8000"/>
+            </a:avLst>
+          </a:prstGeom>
+          <a:solidFill>
+            <a:srgbClr val="F4F7FA"/>
+          </a:solidFill>
+          <a:ln>
+            <a:noFill/>
+          </a:ln>
+        </p:spPr>
+        <p:style>
+          <a:lnRef idx="1">
+            <a:schemeClr val="accent1"/>
+          </a:lnRef>
+          <a:fillRef idx="3">
+            <a:schemeClr val="accent1"/>
+          </a:fillRef>
+          <a:effectRef idx="2">
+            <a:schemeClr val="accent1"/>
+          </a:effectRef>
+          <a:fontRef idx="minor">
+            <a:schemeClr val="lt1"/>
+          </a:fontRef>
+        </p:style>
+        <p:txBody>
+          <a:bodyPr rtlCol="0" anchor="ctr"/>
+          <a:lstStyle/>
+          <a:p>
+            <a:pPr algn="ctr"/>
+          </a:p>
+        </p:txBody>
+      </p:sp>
+      <p:sp>
+        <p:nvSpPr>
+          <p:cNvPr id="17428" name="Rectangle 17427"/>
+          <p:cNvSpPr/>
+          <p:nvPr/>
+        </p:nvSpPr>
+        <p:spPr>
+          <a:xfrm>
+            <a:off x="9098280" y="1188720"/>
+            <a:ext cx="91440" cy="1078992"/>
+          </a:xfrm>
+          <a:prstGeom prst="rect">
+            <a:avLst/>
+          </a:prstGeom>
+          <a:solidFill>
+            <a:srgbClr val="0E7C7B"/>
+          </a:solidFill>
+          <a:ln>
+            <a:noFill/>
+          </a:ln>
+        </p:spPr>
+        <p:style>
+          <a:lnRef idx="1">
+            <a:schemeClr val="accent1"/>
+          </a:lnRef>
+          <a:fillRef idx="3">
+            <a:schemeClr val="accent1"/>
+          </a:fillRef>
+          <a:effectRef idx="2">
+            <a:schemeClr val="accent1"/>
+          </a:effectRef>
+          <a:fontRef idx="minor">
+            <a:schemeClr val="lt1"/>
+          </a:fontRef>
+        </p:style>
+        <p:txBody>
+          <a:bodyPr rtlCol="0" anchor="ctr"/>
+          <a:lstStyle/>
+          <a:p>
+            <a:pPr algn="ctr"/>
+          </a:p>
+        </p:txBody>
+      </p:sp>
+      <p:pic>
+        <p:nvPicPr>
+          <p:cNvPr id="17429" name="Picture 17428" descr="icon_inspect.png"/>
+          <p:cNvPicPr>
+            <a:picLocks noChangeAspect="1"/>
+          </p:cNvPicPr>
+          <p:nvPr/>
+        </p:nvPicPr>
+        <p:blipFill>
+          <a:blip r:embed="rId7"/>
+          <a:stretch>
+            <a:fillRect/>
+          </a:stretch>
+        </p:blipFill>
+        <p:spPr>
+          <a:xfrm>
+            <a:off x="9262872" y="1280160"/>
+            <a:ext cx="347472" cy="347472"/>
+          </a:xfrm>
+          <a:prstGeom prst="rect">
+            <a:avLst/>
+          </a:prstGeom>
+        </p:spPr>
+      </p:pic>
+      <p:sp>
+        <p:nvSpPr>
+          <p:cNvPr id="17430" name="TextBox 17429"/>
+          <p:cNvSpPr txBox="1"/>
+          <p:nvPr/>
+        </p:nvSpPr>
+        <p:spPr>
+          <a:xfrm>
+            <a:off x="9665208" y="1261872"/>
+            <a:ext cx="2103120" cy="292608"/>
+          </a:xfrm>
+          <a:prstGeom prst="rect">
+            <a:avLst/>
+          </a:prstGeom>
+          <a:noFill/>
+        </p:spPr>
+        <p:txBody>
+          <a:bodyPr wrap="square">
+            <a:spAutoFit/>
+          </a:bodyPr>
+          <a:lstStyle/>
+          <a:p>
+            <a:pPr algn="l">
+              <a:spcAft>
+                <a:spcPts val="0"/>
+              </a:spcAft>
+            </a:pPr>
+            <a:r>
+              <a:rPr sz="1300" b="1">
+                <a:solidFill>
+                  <a:srgbClr val="0E7C7B"/>
+                </a:solidFill>
+                <a:latin typeface="Calibri"/>
+              </a:rPr>
+              <a:t>ROVER</a:t>
+            </a:r>
+          </a:p>
+        </p:txBody>
+      </p:sp>
+      <p:sp>
+        <p:nvSpPr>
+          <p:cNvPr id="17431" name="TextBox 17430"/>
+          <p:cNvSpPr txBox="1"/>
+          <p:nvPr/>
+        </p:nvSpPr>
+        <p:spPr>
+          <a:xfrm>
+            <a:off x="9262872" y="1645920"/>
+            <a:ext cx="2505456" cy="548640"/>
+          </a:xfrm>
+          <a:prstGeom prst="rect">
+            <a:avLst/>
+          </a:prstGeom>
+          <a:noFill/>
+        </p:spPr>
+        <p:txBody>
+          <a:bodyPr wrap="square">
+            <a:spAutoFit/>
+          </a:bodyPr>
+          <a:lstStyle/>
+          <a:p>
+            <a:pPr algn="l">
+              <a:spcAft>
+                <a:spcPts val="100"/>
+              </a:spcAft>
+            </a:pPr>
+            <a:r>
+              <a:rPr sz="1100" b="0">
+                <a:solidFill>
+                  <a:srgbClr val="1A1A1A"/>
+                </a:solidFill>
+                <a:latin typeface="Calibri"/>
+              </a:rPr>
+              <a:t>L298N · HC-SR04 · IR GPIO19</a:t>
+            </a:r>
+          </a:p>
+          <a:p>
+            <a:pPr algn="l">
+              <a:spcAft>
+                <a:spcPts val="100"/>
+              </a:spcAft>
+            </a:pPr>
+            <a:r>
+              <a:rPr sz="1100" b="0">
+                <a:solidFill>
+                  <a:srgbClr val="4A5563"/>
+                </a:solidFill>
+                <a:latin typeface="Calibri"/>
+              </a:rPr>
+              <a:t>MQ-7 raw · AP Mine-Rover-AP</a:t>
+            </a:r>
+          </a:p>
+        </p:txBody>
+      </p:sp>
+      <p:pic>
+        <p:nvPicPr>
+          <p:cNvPr id="17432" name="Picture 17431" descr="architecture_lanes.png"/>
+          <p:cNvPicPr>
+            <a:picLocks noChangeAspect="1"/>
+          </p:cNvPicPr>
+          <p:nvPr/>
+        </p:nvPicPr>
+        <p:blipFill>
+          <a:blip r:embed="rId8"/>
+          <a:stretch>
+            <a:fillRect/>
+          </a:stretch>
+        </p:blipFill>
+        <p:spPr>
+          <a:xfrm>
+            <a:off x="320040" y="2340864"/>
+            <a:ext cx="11521440" cy="2267712"/>
+          </a:xfrm>
+          <a:prstGeom prst="rect">
+            <a:avLst/>
+          </a:prstGeom>
+        </p:spPr>
+      </p:pic>
+      <p:sp>
+        <p:nvSpPr>
+          <p:cNvPr id="17433" name="Rounded Rectangle 17432"/>
+          <p:cNvSpPr/>
+          <p:nvPr/>
+        </p:nvSpPr>
+        <p:spPr>
+          <a:xfrm>
+            <a:off x="320040" y="4681728"/>
+            <a:ext cx="3730752" cy="1481328"/>
+          </a:xfrm>
+          <a:prstGeom prst="roundRect">
+            <a:avLst>
+              <a:gd name="adj" fmla="val 8000"/>
+            </a:avLst>
+          </a:prstGeom>
+          <a:solidFill>
+            <a:srgbClr val="0B2C4A"/>
+          </a:solidFill>
+          <a:ln>
+            <a:noFill/>
+          </a:ln>
+        </p:spPr>
+        <p:style>
+          <a:lnRef idx="1">
+            <a:schemeClr val="accent1"/>
+          </a:lnRef>
+          <a:fillRef idx="3">
+            <a:schemeClr val="accent1"/>
+          </a:fillRef>
+          <a:effectRef idx="2">
+            <a:schemeClr val="accent1"/>
+          </a:effectRef>
+          <a:fontRef idx="minor">
+            <a:schemeClr val="lt1"/>
+          </a:fontRef>
+        </p:style>
+        <p:txBody>
+          <a:bodyPr rtlCol="0" anchor="ctr"/>
+          <a:lstStyle/>
+          <a:p>
+            <a:pPr algn="ctr"/>
+          </a:p>
+        </p:txBody>
+      </p:sp>
+      <p:sp>
+        <p:nvSpPr>
+          <p:cNvPr id="17434" name="TextBox 17433"/>
+          <p:cNvSpPr txBox="1"/>
+          <p:nvPr/>
+        </p:nvSpPr>
+        <p:spPr>
+          <a:xfrm>
+            <a:off x="429768" y="4718304"/>
+            <a:ext cx="3511296" cy="274320"/>
+          </a:xfrm>
+          <a:prstGeom prst="rect">
+            <a:avLst/>
+          </a:prstGeom>
+          <a:noFill/>
+        </p:spPr>
+        <p:txBody>
+          <a:bodyPr wrap="square">
+            <a:spAutoFit/>
+          </a:bodyPr>
+          <a:lstStyle/>
+          <a:p>
+            <a:pPr algn="l">
+              <a:spcAft>
+                <a:spcPts val="0"/>
+              </a:spcAft>
+            </a:pPr>
+            <a:r>
+              <a:rPr sz="1300" b="1">
                 <a:solidFill>
                   <a:srgbClr val="FFFFFF"/>
                 </a:solidFill>
                 <a:latin typeface="Calibri"/>
               </a:rPr>
-              <a:t>Rover AP</a:t>
-            </a:r>
-          </a:p>
-          <a:p>
-            <a:pPr algn="ctr">
+              <a:t>RULES  (latch)</a:t>
+            </a:r>
+          </a:p>
+        </p:txBody>
+      </p:sp>
+      <p:sp>
+        <p:nvSpPr>
+          <p:cNvPr id="17435" name="TextBox 17434"/>
+          <p:cNvSpPr txBox="1"/>
+          <p:nvPr/>
+        </p:nvSpPr>
+        <p:spPr>
+          <a:xfrm>
+            <a:off x="429768" y="4992624"/>
+            <a:ext cx="3511296" cy="1115568"/>
+          </a:xfrm>
+          <a:prstGeom prst="rect">
+            <a:avLst/>
+          </a:prstGeom>
+          <a:noFill/>
+        </p:spPr>
+        <p:txBody>
+          <a:bodyPr wrap="square">
+            <a:spAutoFit/>
+          </a:bodyPr>
+          <a:lstStyle/>
+          <a:p>
+            <a:pPr algn="l">
               <a:spcAft>
                 <a:spcPts val="200"/>
               </a:spcAft>
             </a:pPr>
             <a:r>
-              <a:rPr sz="1100" b="1">
+              <a:rPr sz="1200" b="0">
                 <a:solidFill>
                   <a:srgbClr val="FFFFFF"/>
                 </a:solidFill>
                 <a:latin typeface="Calibri"/>
               </a:rPr>
-              <a:t>inspect</a:t>
-            </a:r>
-          </a:p>
-        </p:txBody>
-      </p:sp>
-      <p:graphicFrame>
-        <p:nvGraphicFramePr>
-          <p:cNvPr id="17430" name="Table 17429"/>
-          <p:cNvGraphicFramePr>
-            <a:graphicFrameLocks noGrp="1"/>
-          </p:cNvGraphicFramePr>
+              <a:t>•  3 consecutive samples</a:t>
+            </a:r>
+          </a:p>
+          <a:p>
+            <a:pPr algn="l">
+              <a:spcAft>
+                <a:spcPts val="200"/>
+              </a:spcAft>
+            </a:pPr>
+            <a:r>
+              <a:rPr sz="1200" b="0">
+                <a:solidFill>
+                  <a:srgbClr val="FFFFFF"/>
+                </a:solidFill>
+                <a:latin typeface="Calibri"/>
+              </a:rPr>
+              <a:t>•  WATCH  3° or 2 mm</a:t>
+            </a:r>
+          </a:p>
+          <a:p>
+            <a:pPr algn="l">
+              <a:spcAft>
+                <a:spcPts val="200"/>
+              </a:spcAft>
+            </a:pPr>
+            <a:r>
+              <a:rPr sz="1200" b="0">
+                <a:solidFill>
+                  <a:srgbClr val="FFFFFF"/>
+                </a:solidFill>
+                <a:latin typeface="Calibri"/>
+              </a:rPr>
+              <a:t>•  ALERT  6° or 4 mm</a:t>
+            </a:r>
+          </a:p>
+          <a:p>
+            <a:pPr algn="l">
+              <a:spcAft>
+                <a:spcPts val="200"/>
+              </a:spcAft>
+            </a:pPr>
+            <a:r>
+              <a:rPr sz="1200" b="0">
+                <a:solidFill>
+                  <a:srgbClr val="FFFFFF"/>
+                </a:solidFill>
+                <a:latin typeface="Calibri"/>
+              </a:rPr>
+              <a:t>•  Stale &gt;5 s → UNKNOWN</a:t>
+            </a:r>
+          </a:p>
+        </p:txBody>
+      </p:sp>
+      <p:sp>
+        <p:nvSpPr>
+          <p:cNvPr id="17436" name="Rounded Rectangle 17435"/>
+          <p:cNvSpPr/>
           <p:nvPr/>
-        </p:nvGraphicFramePr>
-        <p:xfrm>
-          <a:off x="320040" y="3584448"/>
-          <a:ext cx="11521440" cy="1920240"/>
-        </p:xfrm>
-        <a:graphic>
-          <a:graphicData uri="http://schemas.openxmlformats.org/drawingml/2006/table">
-            <a:tbl>
-              <a:tblPr firstRow="1" bandRow="1">
-                <a:tableStyleId>{5C22544A-7EE6-4342-B048-85BDC9FD1C3A}</a:tableStyleId>
-              </a:tblPr>
-              <a:tblGrid>
-                <a:gridCol w="3840480"/>
-                <a:gridCol w="3840480"/>
-                <a:gridCol w="3840480"/>
-              </a:tblGrid>
-              <a:tr h="480060">
-                <a:tc>
-                  <a:txBody>
-                    <a:bodyPr/>
-                    <a:lstStyle/>
-                    <a:p>
-                      <a:pPr algn="l"/>
-                      <a:r>
-                        <a:rPr sz="1000" b="1">
-                          <a:solidFill>
-                            <a:srgbClr val="FFFFFF"/>
-                          </a:solidFill>
-                          <a:latin typeface="Calibri"/>
-                        </a:rPr>
-                        <a:t>Engine</a:t>
-                      </a:r>
-                    </a:p>
-                  </a:txBody>
-                  <a:tcPr anchor="ctr">
-                    <a:solidFill>
-                      <a:srgbClr val="0B2C4A"/>
-                    </a:solidFill>
-                  </a:tcPr>
-                </a:tc>
-                <a:tc>
-                  <a:txBody>
-                    <a:bodyPr/>
-                    <a:lstStyle/>
-                    <a:p>
-                      <a:pPr algn="l"/>
-                      <a:r>
-                        <a:rPr sz="1000" b="1">
-                          <a:solidFill>
-                            <a:srgbClr val="FFFFFF"/>
-                          </a:solidFill>
-                          <a:latin typeface="Calibri"/>
-                        </a:rPr>
-                        <a:t>Input (after validation)</a:t>
-                      </a:r>
-                    </a:p>
-                  </a:txBody>
-                  <a:tcPr anchor="ctr">
-                    <a:solidFill>
-                      <a:srgbClr val="0B2C4A"/>
-                    </a:solidFill>
-                  </a:tcPr>
-                </a:tc>
-                <a:tc>
-                  <a:txBody>
-                    <a:bodyPr/>
-                    <a:lstStyle/>
-                    <a:p>
-                      <a:pPr algn="l"/>
-                      <a:r>
-                        <a:rPr sz="1000" b="1">
-                          <a:solidFill>
-                            <a:srgbClr val="FFFFFF"/>
-                          </a:solidFill>
-                          <a:latin typeface="Calibri"/>
-                        </a:rPr>
-                        <a:t>Output shown to officer</a:t>
-                      </a:r>
-                    </a:p>
-                  </a:txBody>
-                  <a:tcPr anchor="ctr">
-                    <a:solidFill>
-                      <a:srgbClr val="0B2C4A"/>
-                    </a:solidFill>
-                  </a:tcPr>
-                </a:tc>
-              </a:tr>
-              <a:tr h="480060">
-                <a:tc>
-                  <a:txBody>
-                    <a:bodyPr/>
-                    <a:lstStyle/>
-                    <a:p>
-                      <a:pPr algn="l"/>
-                      <a:r>
-                        <a:rPr sz="1000" b="1">
-                          <a:solidFill>
-                            <a:srgbClr val="1A1A1A"/>
-                          </a:solidFill>
-                          <a:latin typeface="Calibri"/>
-                        </a:rPr>
-                        <a:t>Rules (latch)</a:t>
-                      </a:r>
-                    </a:p>
-                  </a:txBody>
-                  <a:tcPr anchor="ctr">
-                    <a:solidFill>
-                      <a:srgbClr val="FFFFFF"/>
-                    </a:solidFill>
-                  </a:tcPr>
-                </a:tc>
-                <a:tc>
-                  <a:txBody>
-                    <a:bodyPr/>
-                    <a:lstStyle/>
-                    <a:p>
-                      <a:pPr algn="l"/>
-                      <a:r>
-                        <a:rPr sz="1000" b="0">
-                          <a:solidFill>
-                            <a:srgbClr val="1A1A1A"/>
-                          </a:solidFill>
-                          <a:latin typeface="Calibri"/>
-                        </a:rPr>
-                        <a:t>tilt_change, crack mm, freshness, 3 consecutive samples</a:t>
-                      </a:r>
-                    </a:p>
-                  </a:txBody>
-                  <a:tcPr anchor="ctr">
-                    <a:solidFill>
-                      <a:srgbClr val="FFFFFF"/>
-                    </a:solidFill>
-                  </a:tcPr>
-                </a:tc>
-                <a:tc>
-                  <a:txBody>
-                    <a:bodyPr/>
-                    <a:lstStyle/>
-                    <a:p>
-                      <a:pPr algn="l"/>
-                      <a:r>
-                        <a:rPr sz="1000" b="0">
-                          <a:solidFill>
-                            <a:srgbClr val="1A1A1A"/>
-                          </a:solidFill>
-                          <a:latin typeface="Calibri"/>
-                        </a:rPr>
-                        <a:t>NORMAL / WATCH (3° or 2 mm) / ALERT (6° or 4 mm) / UNKNOWN (&gt;5 s)</a:t>
-                      </a:r>
-                    </a:p>
-                  </a:txBody>
-                  <a:tcPr anchor="ctr">
-                    <a:solidFill>
-                      <a:srgbClr val="FFFFFF"/>
-                    </a:solidFill>
-                  </a:tcPr>
-                </a:tc>
-              </a:tr>
-              <a:tr h="480060">
-                <a:tc>
-                  <a:txBody>
-                    <a:bodyPr/>
-                    <a:lstStyle/>
-                    <a:p>
-                      <a:pPr algn="l"/>
-                      <a:r>
-                        <a:rPr sz="1000" b="1">
-                          <a:solidFill>
-                            <a:srgbClr val="1A1A1A"/>
-                          </a:solidFill>
-                          <a:latin typeface="Calibri"/>
-                        </a:rPr>
-                        <a:t>Isolation Forest</a:t>
-                      </a:r>
-                    </a:p>
-                  </a:txBody>
-                  <a:tcPr anchor="ctr">
-                    <a:solidFill>
-                      <a:srgbClr val="F4F7FA"/>
-                    </a:solidFill>
-                  </a:tcPr>
-                </a:tc>
-                <a:tc>
-                  <a:txBody>
-                    <a:bodyPr/>
-                    <a:lstStyle/>
-                    <a:p>
-                      <a:pPr algn="l"/>
-                      <a:r>
-                        <a:rPr sz="1000" b="0">
-                          <a:solidFill>
-                            <a:srgbClr val="1A1A1A"/>
-                          </a:solidFill>
-                          <a:latin typeface="Calibri"/>
-                        </a:rPr>
-                        <a:t>≥120 live NORMAL samples/node; tilt, vib, d_tilt, optional mm, A–B residual</a:t>
-                      </a:r>
-                    </a:p>
-                  </a:txBody>
-                  <a:tcPr anchor="ctr">
-                    <a:solidFill>
-                      <a:srgbClr val="F4F7FA"/>
-                    </a:solidFill>
-                  </a:tcPr>
-                </a:tc>
-                <a:tc>
-                  <a:txBody>
-                    <a:bodyPr/>
-                    <a:lstStyle/>
-                    <a:p>
-                      <a:pPr algn="l"/>
-                      <a:r>
-                        <a:rPr sz="1000" b="0">
-                          <a:solidFill>
-                            <a:srgbClr val="1A1A1A"/>
-                          </a:solidFill>
-                          <a:latin typeface="Calibri"/>
-                        </a:rPr>
-                        <a:t>INACTIVE | READY | UNUSUAL + score + top feature</a:t>
-                      </a:r>
-                    </a:p>
-                  </a:txBody>
-                  <a:tcPr anchor="ctr">
-                    <a:solidFill>
-                      <a:srgbClr val="F4F7FA"/>
-                    </a:solidFill>
-                  </a:tcPr>
-                </a:tc>
-              </a:tr>
-              <a:tr h="480060">
-                <a:tc>
-                  <a:txBody>
-                    <a:bodyPr/>
-                    <a:lstStyle/>
-                    <a:p>
-                      <a:pPr algn="l"/>
-                      <a:r>
-                        <a:rPr sz="1000" b="1">
-                          <a:solidFill>
-                            <a:srgbClr val="1A1A1A"/>
-                          </a:solidFill>
-                          <a:latin typeface="Calibri"/>
-                        </a:rPr>
-                        <a:t>Ridge 30 s</a:t>
-                      </a:r>
-                    </a:p>
-                  </a:txBody>
-                  <a:tcPr anchor="ctr">
-                    <a:solidFill>
-                      <a:srgbClr val="FFFFFF"/>
-                    </a:solidFill>
-                  </a:tcPr>
-                </a:tc>
-                <a:tc>
-                  <a:txBody>
-                    <a:bodyPr/>
-                    <a:lstStyle/>
-                    <a:p>
-                      <a:pPr algn="l"/>
-                      <a:r>
-                        <a:rPr sz="1000" b="0">
-                          <a:solidFill>
-                            <a:srgbClr val="1A1A1A"/>
-                          </a:solidFill>
-                          <a:latin typeface="Calibri"/>
-                        </a:rPr>
-                        <a:t>Last ~30 accepted points of the same series</a:t>
-                      </a:r>
-                    </a:p>
-                  </a:txBody>
-                  <a:tcPr anchor="ctr">
-                    <a:solidFill>
-                      <a:srgbClr val="FFFFFF"/>
-                    </a:solidFill>
-                  </a:tcPr>
-                </a:tc>
-                <a:tc>
-                  <a:txBody>
-                    <a:bodyPr/>
-                    <a:lstStyle/>
-                    <a:p>
-                      <a:pPr algn="l"/>
-                      <a:r>
-                        <a:rPr sz="1000" b="0">
-                          <a:solidFill>
-                            <a:srgbClr val="1A1A1A"/>
-                          </a:solidFill>
-                          <a:latin typeface="Calibri"/>
-                        </a:rPr>
-                        <a:t>Dashed forecast + MAE. Label: Sensor forecast (30 s). Not a collapse prediction.</a:t>
-                      </a:r>
-                    </a:p>
-                  </a:txBody>
-                  <a:tcPr anchor="ctr">
-                    <a:solidFill>
-                      <a:srgbClr val="FFFFFF"/>
-                    </a:solidFill>
-                  </a:tcPr>
-                </a:tc>
-              </a:tr>
-            </a:tbl>
-          </a:graphicData>
-        </a:graphic>
-      </p:graphicFrame>
+        </p:nvSpPr>
+        <p:spPr>
+          <a:xfrm>
+            <a:off x="4215384" y="4681728"/>
+            <a:ext cx="3730752" cy="1481328"/>
+          </a:xfrm>
+          <a:prstGeom prst="roundRect">
+            <a:avLst>
+              <a:gd name="adj" fmla="val 8000"/>
+            </a:avLst>
+          </a:prstGeom>
+          <a:solidFill>
+            <a:srgbClr val="F47B20"/>
+          </a:solidFill>
+          <a:ln>
+            <a:noFill/>
+          </a:ln>
+        </p:spPr>
+        <p:style>
+          <a:lnRef idx="1">
+            <a:schemeClr val="accent1"/>
+          </a:lnRef>
+          <a:fillRef idx="3">
+            <a:schemeClr val="accent1"/>
+          </a:fillRef>
+          <a:effectRef idx="2">
+            <a:schemeClr val="accent1"/>
+          </a:effectRef>
+          <a:fontRef idx="minor">
+            <a:schemeClr val="lt1"/>
+          </a:fontRef>
+        </p:style>
+        <p:txBody>
+          <a:bodyPr rtlCol="0" anchor="ctr"/>
+          <a:lstStyle/>
+          <a:p>
+            <a:pPr algn="ctr"/>
+          </a:p>
+        </p:txBody>
+      </p:sp>
+      <p:sp>
+        <p:nvSpPr>
+          <p:cNvPr id="17437" name="TextBox 17436"/>
+          <p:cNvSpPr txBox="1"/>
+          <p:nvPr/>
+        </p:nvSpPr>
+        <p:spPr>
+          <a:xfrm>
+            <a:off x="4325112" y="4718304"/>
+            <a:ext cx="3511296" cy="274320"/>
+          </a:xfrm>
+          <a:prstGeom prst="rect">
+            <a:avLst/>
+          </a:prstGeom>
+          <a:noFill/>
+        </p:spPr>
+        <p:txBody>
+          <a:bodyPr wrap="square">
+            <a:spAutoFit/>
+          </a:bodyPr>
+          <a:lstStyle/>
+          <a:p>
+            <a:pPr algn="l">
+              <a:spcAft>
+                <a:spcPts val="0"/>
+              </a:spcAft>
+            </a:pPr>
+            <a:r>
+              <a:rPr sz="1300" b="1">
+                <a:solidFill>
+                  <a:srgbClr val="FFFFFF"/>
+                </a:solidFill>
+                <a:latin typeface="Calibri"/>
+              </a:rPr>
+              <a:t>ISOLATION FOREST + LOF</a:t>
+            </a:r>
+          </a:p>
+        </p:txBody>
+      </p:sp>
+      <p:sp>
+        <p:nvSpPr>
+          <p:cNvPr id="17438" name="TextBox 17437"/>
+          <p:cNvSpPr txBox="1"/>
+          <p:nvPr/>
+        </p:nvSpPr>
+        <p:spPr>
+          <a:xfrm>
+            <a:off x="4325112" y="4992624"/>
+            <a:ext cx="3511296" cy="1115568"/>
+          </a:xfrm>
+          <a:prstGeom prst="rect">
+            <a:avLst/>
+          </a:prstGeom>
+          <a:noFill/>
+        </p:spPr>
+        <p:txBody>
+          <a:bodyPr wrap="square">
+            <a:spAutoFit/>
+          </a:bodyPr>
+          <a:lstStyle/>
+          <a:p>
+            <a:pPr algn="l">
+              <a:spcAft>
+                <a:spcPts val="200"/>
+              </a:spcAft>
+            </a:pPr>
+            <a:r>
+              <a:rPr sz="1200" b="0">
+                <a:solidFill>
+                  <a:srgbClr val="FFFFFF"/>
+                </a:solidFill>
+                <a:latin typeface="Calibri"/>
+              </a:rPr>
+              <a:t>•  Unusual vs this rig’s NORMAL</a:t>
+            </a:r>
+          </a:p>
+          <a:p>
+            <a:pPr algn="l">
+              <a:spcAft>
+                <a:spcPts val="200"/>
+              </a:spcAft>
+            </a:pPr>
+            <a:r>
+              <a:rPr sz="1200" b="0">
+                <a:solidFill>
+                  <a:srgbClr val="FFFFFF"/>
+                </a:solidFill>
+                <a:latin typeface="Calibri"/>
+              </a:rPr>
+              <a:t>•  Prior READY, or 120 live samples</a:t>
+            </a:r>
+          </a:p>
+          <a:p>
+            <a:pPr algn="l">
+              <a:spcAft>
+                <a:spcPts val="200"/>
+              </a:spcAft>
+            </a:pPr>
+            <a:r>
+              <a:rPr sz="1200" b="0">
+                <a:solidFill>
+                  <a:srgbClr val="FFFFFF"/>
+                </a:solidFill>
+                <a:latin typeface="Calibri"/>
+              </a:rPr>
+              <a:t>•  Score + top feature on screen</a:t>
+            </a:r>
+          </a:p>
+          <a:p>
+            <a:pPr algn="l">
+              <a:spcAft>
+                <a:spcPts val="200"/>
+              </a:spcAft>
+            </a:pPr>
+            <a:r>
+              <a:rPr sz="1200" b="0">
+                <a:solidFill>
+                  <a:srgbClr val="FFFFFF"/>
+                </a:solidFill>
+                <a:latin typeface="Calibri"/>
+              </a:rPr>
+              <a:t>•  Cannot clear a rule latch</a:t>
+            </a:r>
+          </a:p>
+        </p:txBody>
+      </p:sp>
+      <p:sp>
+        <p:nvSpPr>
+          <p:cNvPr id="17439" name="Rounded Rectangle 17438"/>
+          <p:cNvSpPr/>
+          <p:nvPr/>
+        </p:nvSpPr>
+        <p:spPr>
+          <a:xfrm>
+            <a:off x="8110728" y="4681728"/>
+            <a:ext cx="3730752" cy="1481328"/>
+          </a:xfrm>
+          <a:prstGeom prst="roundRect">
+            <a:avLst>
+              <a:gd name="adj" fmla="val 8000"/>
+            </a:avLst>
+          </a:prstGeom>
+          <a:solidFill>
+            <a:srgbClr val="0E7C7B"/>
+          </a:solidFill>
+          <a:ln>
+            <a:noFill/>
+          </a:ln>
+        </p:spPr>
+        <p:style>
+          <a:lnRef idx="1">
+            <a:schemeClr val="accent1"/>
+          </a:lnRef>
+          <a:fillRef idx="3">
+            <a:schemeClr val="accent1"/>
+          </a:fillRef>
+          <a:effectRef idx="2">
+            <a:schemeClr val="accent1"/>
+          </a:effectRef>
+          <a:fontRef idx="minor">
+            <a:schemeClr val="lt1"/>
+          </a:fontRef>
+        </p:style>
+        <p:txBody>
+          <a:bodyPr rtlCol="0" anchor="ctr"/>
+          <a:lstStyle/>
+          <a:p>
+            <a:pPr algn="ctr"/>
+          </a:p>
+        </p:txBody>
+      </p:sp>
+      <p:sp>
+        <p:nvSpPr>
+          <p:cNvPr id="17440" name="TextBox 17439"/>
+          <p:cNvSpPr txBox="1"/>
+          <p:nvPr/>
+        </p:nvSpPr>
+        <p:spPr>
+          <a:xfrm>
+            <a:off x="8220456" y="4718304"/>
+            <a:ext cx="3511296" cy="274320"/>
+          </a:xfrm>
+          <a:prstGeom prst="rect">
+            <a:avLst/>
+          </a:prstGeom>
+          <a:noFill/>
+        </p:spPr>
+        <p:txBody>
+          <a:bodyPr wrap="square">
+            <a:spAutoFit/>
+          </a:bodyPr>
+          <a:lstStyle/>
+          <a:p>
+            <a:pPr algn="l">
+              <a:spcAft>
+                <a:spcPts val="0"/>
+              </a:spcAft>
+            </a:pPr>
+            <a:r>
+              <a:rPr sz="1300" b="1">
+                <a:solidFill>
+                  <a:srgbClr val="FFFFFF"/>
+                </a:solidFill>
+                <a:latin typeface="Calibri"/>
+              </a:rPr>
+              <a:t>30 s FORECAST</a:t>
+            </a:r>
+          </a:p>
+        </p:txBody>
+      </p:sp>
+      <p:sp>
+        <p:nvSpPr>
+          <p:cNvPr id="17441" name="TextBox 17440"/>
+          <p:cNvSpPr txBox="1"/>
+          <p:nvPr/>
+        </p:nvSpPr>
+        <p:spPr>
+          <a:xfrm>
+            <a:off x="8220456" y="4992624"/>
+            <a:ext cx="3511296" cy="1115568"/>
+          </a:xfrm>
+          <a:prstGeom prst="rect">
+            <a:avLst/>
+          </a:prstGeom>
+          <a:noFill/>
+        </p:spPr>
+        <p:txBody>
+          <a:bodyPr wrap="square">
+            <a:spAutoFit/>
+          </a:bodyPr>
+          <a:lstStyle/>
+          <a:p>
+            <a:pPr algn="l">
+              <a:spcAft>
+                <a:spcPts val="200"/>
+              </a:spcAft>
+            </a:pPr>
+            <a:r>
+              <a:rPr sz="1200" b="0">
+                <a:solidFill>
+                  <a:srgbClr val="FFFFFF"/>
+                </a:solidFill>
+                <a:latin typeface="Calibri"/>
+              </a:rPr>
+              <a:t>•  Holdout-selected Ridge</a:t>
+            </a:r>
+          </a:p>
+          <a:p>
+            <a:pPr algn="l">
+              <a:spcAft>
+                <a:spcPts val="200"/>
+              </a:spcAft>
+            </a:pPr>
+            <a:r>
+              <a:rPr sz="1200" b="0">
+                <a:solidFill>
+                  <a:srgbClr val="FFFFFF"/>
+                </a:solidFill>
+                <a:latin typeface="Calibri"/>
+              </a:rPr>
+              <a:t>•  Next 30 s of same signals</a:t>
+            </a:r>
+          </a:p>
+          <a:p>
+            <a:pPr algn="l">
+              <a:spcAft>
+                <a:spcPts val="200"/>
+              </a:spcAft>
+            </a:pPr>
+            <a:r>
+              <a:rPr sz="1200" b="0">
+                <a:solidFill>
+                  <a:srgbClr val="FFFFFF"/>
+                </a:solidFill>
+                <a:latin typeface="Calibri"/>
+              </a:rPr>
+              <a:t>•  MAE shown on the chart</a:t>
+            </a:r>
+          </a:p>
+          <a:p>
+            <a:pPr algn="l">
+              <a:spcAft>
+                <a:spcPts val="200"/>
+              </a:spcAft>
+            </a:pPr>
+            <a:r>
+              <a:rPr sz="1200" b="0">
+                <a:solidFill>
+                  <a:srgbClr val="FFFFFF"/>
+                </a:solidFill>
+                <a:latin typeface="Calibri"/>
+              </a:rPr>
+              <a:t>•  Not a collapse prediction</a:t>
+            </a:r>
+          </a:p>
+        </p:txBody>
+      </p:sp>
     </p:spTree>
   </p:cSld>
   <p:clrMapOvr>
@@ -9123,17 +8619,27 @@
             <p:ph type="title"/>
           </p:nvPr>
         </p:nvSpPr>
-        <p:spPr/>
-        <p:txBody>
-          <a:bodyPr/>
+        <p:spPr>
+          <a:xfrm>
+            <a:off x="1719072" y="91440"/>
+            <a:ext cx="7818120" cy="804672"/>
+          </a:xfrm>
+        </p:spPr>
+        <p:txBody>
+          <a:bodyPr wrap="square"/>
           <a:lstStyle/>
           <a:p>
-            <a:pPr eaLnBrk="1" hangingPunct="1"/>
-            <a:r>
-              <a:rPr lang="en-US" sz="3600" b="1" dirty="0">
-                <a:latin typeface="Times New Roman" panose="02020603050405020304" pitchFamily="18" charset="0"/>
-                <a:ea typeface="ＭＳ Ｐゴシック" pitchFamily="1" charset="-128"/>
-                <a:cs typeface="Times New Roman" panose="02020603050405020304" pitchFamily="18" charset="0"/>
+            <a:pPr eaLnBrk="1" hangingPunct="1" algn="l">
+              <a:spcAft>
+                <a:spcPts val="0"/>
+              </a:spcAft>
+            </a:pPr>
+            <a:r>
+              <a:rPr sz="2600" b="1">
+                <a:solidFill>
+                  <a:srgbClr val="0B2C4A"/>
+                </a:solidFill>
+                <a:latin typeface="Calibri"/>
               </a:rPr>
               <a:t>FEASIBILITY AND VIABILITY</a:t>
             </a:r>
@@ -9381,6 +8887,12 @@
           <a:prstGeom prst="ellipse">
             <a:avLst/>
           </a:prstGeom>
+          <a:solidFill>
+            <a:srgbClr val="F47B20"/>
+          </a:solidFill>
+          <a:ln>
+            <a:noFill/>
+          </a:ln>
         </p:spPr>
         <p:style>
           <a:lnRef idx="2">
@@ -9402,7 +8914,7 @@
           <a:p>
             <a:pPr algn="ctr">
               <a:spcAft>
-                <a:spcPts val="400"/>
+                <a:spcPts val="0"/>
               </a:spcAft>
             </a:pPr>
             <a:r>
@@ -9456,8 +8968,8 @@
         </p:nvSpPr>
         <p:spPr>
           <a:xfrm>
-            <a:off x="320040" y="1024128"/>
-            <a:ext cx="11521440" cy="365760"/>
+            <a:off x="320040" y="932688"/>
+            <a:ext cx="11521440" cy="237744"/>
           </a:xfrm>
           <a:prstGeom prst="rect">
             <a:avLst/>
@@ -9465,12 +8977,758 @@
           <a:noFill/>
         </p:spPr>
         <p:txBody>
-          <a:bodyPr wrap="square" anchor="t"/>
+          <a:bodyPr wrap="square">
+            <a:spAutoFit/>
+          </a:bodyPr>
           <a:lstStyle/>
           <a:p>
             <a:pPr algn="l">
               <a:spcAft>
-                <a:spcPts val="200"/>
+                <a:spcPts val="0"/>
+              </a:spcAft>
+            </a:pPr>
+            <a:r>
+              <a:rPr sz="1400" b="1">
+                <a:solidFill>
+                  <a:srgbClr val="0B2C4A"/>
+                </a:solidFill>
+                <a:latin typeface="Calibri"/>
+              </a:rPr>
+              <a:t>We can run this on a table this week. It is not a real mine system.</a:t>
+            </a:r>
+          </a:p>
+        </p:txBody>
+      </p:sp>
+      <p:sp>
+        <p:nvSpPr>
+          <p:cNvPr id="17412" name="Rounded Rectangle 17411"/>
+          <p:cNvSpPr/>
+          <p:nvPr/>
+        </p:nvSpPr>
+        <p:spPr>
+          <a:xfrm>
+            <a:off x="320040" y="1188720"/>
+            <a:ext cx="2788920" cy="987552"/>
+          </a:xfrm>
+          <a:prstGeom prst="roundRect">
+            <a:avLst>
+              <a:gd name="adj" fmla="val 8000"/>
+            </a:avLst>
+          </a:prstGeom>
+          <a:solidFill>
+            <a:srgbClr val="F4F7FA"/>
+          </a:solidFill>
+          <a:ln>
+            <a:noFill/>
+          </a:ln>
+        </p:spPr>
+        <p:style>
+          <a:lnRef idx="1">
+            <a:schemeClr val="accent1"/>
+          </a:lnRef>
+          <a:fillRef idx="3">
+            <a:schemeClr val="accent1"/>
+          </a:fillRef>
+          <a:effectRef idx="2">
+            <a:schemeClr val="accent1"/>
+          </a:effectRef>
+          <a:fontRef idx="minor">
+            <a:schemeClr val="lt1"/>
+          </a:fontRef>
+        </p:style>
+        <p:txBody>
+          <a:bodyPr rtlCol="0" anchor="ctr"/>
+          <a:lstStyle/>
+          <a:p>
+            <a:pPr algn="ctr"/>
+          </a:p>
+        </p:txBody>
+      </p:sp>
+      <p:pic>
+        <p:nvPicPr>
+          <p:cNvPr id="17413" name="Picture 17412" descr="icon_ok.png"/>
+          <p:cNvPicPr>
+            <a:picLocks noChangeAspect="1"/>
+          </p:cNvPicPr>
+          <p:nvPr/>
+        </p:nvPicPr>
+        <p:blipFill>
+          <a:blip r:embed="rId4"/>
+          <a:stretch>
+            <a:fillRect/>
+          </a:stretch>
+        </p:blipFill>
+        <p:spPr>
+          <a:xfrm>
+            <a:off x="411480" y="1280160"/>
+            <a:ext cx="384048" cy="384048"/>
+          </a:xfrm>
+          <a:prstGeom prst="rect">
+            <a:avLst/>
+          </a:prstGeom>
+        </p:spPr>
+      </p:pic>
+      <p:sp>
+        <p:nvSpPr>
+          <p:cNvPr id="17414" name="TextBox 17413"/>
+          <p:cNvSpPr txBox="1"/>
+          <p:nvPr/>
+        </p:nvSpPr>
+        <p:spPr>
+          <a:xfrm>
+            <a:off x="850392" y="1243584"/>
+            <a:ext cx="2157984" cy="292608"/>
+          </a:xfrm>
+          <a:prstGeom prst="rect">
+            <a:avLst/>
+          </a:prstGeom>
+          <a:noFill/>
+        </p:spPr>
+        <p:txBody>
+          <a:bodyPr wrap="square">
+            <a:spAutoFit/>
+          </a:bodyPr>
+          <a:lstStyle/>
+          <a:p>
+            <a:pPr algn="l">
+              <a:spcAft>
+                <a:spcPts val="0"/>
+              </a:spcAft>
+            </a:pPr>
+            <a:r>
+              <a:rPr sz="1400" b="1">
+                <a:solidFill>
+                  <a:srgbClr val="0E7C7B"/>
+                </a:solidFill>
+                <a:latin typeface="Calibri"/>
+              </a:rPr>
+              <a:t>Parts are with us</a:t>
+            </a:r>
+          </a:p>
+        </p:txBody>
+      </p:sp>
+      <p:sp>
+        <p:nvSpPr>
+          <p:cNvPr id="17415" name="TextBox 17414"/>
+          <p:cNvSpPr txBox="1"/>
+          <p:nvPr/>
+        </p:nvSpPr>
+        <p:spPr>
+          <a:xfrm>
+            <a:off x="429768" y="1664208"/>
+            <a:ext cx="2560320" cy="438912"/>
+          </a:xfrm>
+          <a:prstGeom prst="rect">
+            <a:avLst/>
+          </a:prstGeom>
+          <a:noFill/>
+        </p:spPr>
+        <p:txBody>
+          <a:bodyPr wrap="square">
+            <a:spAutoFit/>
+          </a:bodyPr>
+          <a:lstStyle/>
+          <a:p>
+            <a:pPr algn="l">
+              <a:spcAft>
+                <a:spcPts val="0"/>
+              </a:spcAft>
+            </a:pPr>
+            <a:r>
+              <a:rPr sz="1200" b="0">
+                <a:solidFill>
+                  <a:srgbClr val="1A1A1A"/>
+                </a:solidFill>
+                <a:latin typeface="Calibri"/>
+              </a:rPr>
+              <a:t>Node A, Node B, rover, USB board.</a:t>
+            </a:r>
+          </a:p>
+        </p:txBody>
+      </p:sp>
+      <p:sp>
+        <p:nvSpPr>
+          <p:cNvPr id="17416" name="Rounded Rectangle 17415"/>
+          <p:cNvSpPr/>
+          <p:nvPr/>
+        </p:nvSpPr>
+        <p:spPr>
+          <a:xfrm>
+            <a:off x="3246120" y="1188720"/>
+            <a:ext cx="2788920" cy="987552"/>
+          </a:xfrm>
+          <a:prstGeom prst="roundRect">
+            <a:avLst>
+              <a:gd name="adj" fmla="val 8000"/>
+            </a:avLst>
+          </a:prstGeom>
+          <a:solidFill>
+            <a:srgbClr val="F4F7FA"/>
+          </a:solidFill>
+          <a:ln>
+            <a:noFill/>
+          </a:ln>
+        </p:spPr>
+        <p:style>
+          <a:lnRef idx="1">
+            <a:schemeClr val="accent1"/>
+          </a:lnRef>
+          <a:fillRef idx="3">
+            <a:schemeClr val="accent1"/>
+          </a:fillRef>
+          <a:effectRef idx="2">
+            <a:schemeClr val="accent1"/>
+          </a:effectRef>
+          <a:fontRef idx="minor">
+            <a:schemeClr val="lt1"/>
+          </a:fontRef>
+        </p:style>
+        <p:txBody>
+          <a:bodyPr rtlCol="0" anchor="ctr"/>
+          <a:lstStyle/>
+          <a:p>
+            <a:pPr algn="ctr"/>
+          </a:p>
+        </p:txBody>
+      </p:sp>
+      <p:pic>
+        <p:nvPicPr>
+          <p:cNvPr id="17417" name="Picture 17416" descr="icon_dash.png"/>
+          <p:cNvPicPr>
+            <a:picLocks noChangeAspect="1"/>
+          </p:cNvPicPr>
+          <p:nvPr/>
+        </p:nvPicPr>
+        <p:blipFill>
+          <a:blip r:embed="rId5"/>
+          <a:stretch>
+            <a:fillRect/>
+          </a:stretch>
+        </p:blipFill>
+        <p:spPr>
+          <a:xfrm>
+            <a:off x="3337560" y="1280160"/>
+            <a:ext cx="384048" cy="384048"/>
+          </a:xfrm>
+          <a:prstGeom prst="rect">
+            <a:avLst/>
+          </a:prstGeom>
+        </p:spPr>
+      </p:pic>
+      <p:sp>
+        <p:nvSpPr>
+          <p:cNvPr id="17418" name="TextBox 17417"/>
+          <p:cNvSpPr txBox="1"/>
+          <p:nvPr/>
+        </p:nvSpPr>
+        <p:spPr>
+          <a:xfrm>
+            <a:off x="3776472" y="1243584"/>
+            <a:ext cx="2157984" cy="292608"/>
+          </a:xfrm>
+          <a:prstGeom prst="rect">
+            <a:avLst/>
+          </a:prstGeom>
+          <a:noFill/>
+        </p:spPr>
+        <p:txBody>
+          <a:bodyPr wrap="square">
+            <a:spAutoFit/>
+          </a:bodyPr>
+          <a:lstStyle/>
+          <a:p>
+            <a:pPr algn="l">
+              <a:spcAft>
+                <a:spcPts val="0"/>
+              </a:spcAft>
+            </a:pPr>
+            <a:r>
+              <a:rPr sz="1400" b="1">
+                <a:solidFill>
+                  <a:srgbClr val="0B2C4A"/>
+                </a:solidFill>
+                <a:latin typeface="Calibri"/>
+              </a:rPr>
+              <a:t>One laptop</a:t>
+            </a:r>
+          </a:p>
+        </p:txBody>
+      </p:sp>
+      <p:sp>
+        <p:nvSpPr>
+          <p:cNvPr id="17419" name="TextBox 17418"/>
+          <p:cNvSpPr txBox="1"/>
+          <p:nvPr/>
+        </p:nvSpPr>
+        <p:spPr>
+          <a:xfrm>
+            <a:off x="3355848" y="1664208"/>
+            <a:ext cx="2560320" cy="438912"/>
+          </a:xfrm>
+          <a:prstGeom prst="rect">
+            <a:avLst/>
+          </a:prstGeom>
+          <a:noFill/>
+        </p:spPr>
+        <p:txBody>
+          <a:bodyPr wrap="square">
+            <a:spAutoFit/>
+          </a:bodyPr>
+          <a:lstStyle/>
+          <a:p>
+            <a:pPr algn="l">
+              <a:spcAft>
+                <a:spcPts val="0"/>
+              </a:spcAft>
+            </a:pPr>
+            <a:r>
+              <a:rPr sz="1200" b="0">
+                <a:solidFill>
+                  <a:srgbClr val="1A1A1A"/>
+                </a:solidFill>
+                <a:latin typeface="Calibri"/>
+              </a:rPr>
+              <a:t>Local website. No login. No cloud.</a:t>
+            </a:r>
+          </a:p>
+        </p:txBody>
+      </p:sp>
+      <p:sp>
+        <p:nvSpPr>
+          <p:cNvPr id="17420" name="Rounded Rectangle 17419"/>
+          <p:cNvSpPr/>
+          <p:nvPr/>
+        </p:nvSpPr>
+        <p:spPr>
+          <a:xfrm>
+            <a:off x="6172200" y="1188720"/>
+            <a:ext cx="2788920" cy="987552"/>
+          </a:xfrm>
+          <a:prstGeom prst="roundRect">
+            <a:avLst>
+              <a:gd name="adj" fmla="val 8000"/>
+            </a:avLst>
+          </a:prstGeom>
+          <a:solidFill>
+            <a:srgbClr val="F4F7FA"/>
+          </a:solidFill>
+          <a:ln>
+            <a:noFill/>
+          </a:ln>
+        </p:spPr>
+        <p:style>
+          <a:lnRef idx="1">
+            <a:schemeClr val="accent1"/>
+          </a:lnRef>
+          <a:fillRef idx="3">
+            <a:schemeClr val="accent1"/>
+          </a:fillRef>
+          <a:effectRef idx="2">
+            <a:schemeClr val="accent1"/>
+          </a:effectRef>
+          <a:fontRef idx="minor">
+            <a:schemeClr val="lt1"/>
+          </a:fontRef>
+        </p:style>
+        <p:txBody>
+          <a:bodyPr rtlCol="0" anchor="ctr"/>
+          <a:lstStyle/>
+          <a:p>
+            <a:pPr algn="ctr"/>
+          </a:p>
+        </p:txBody>
+      </p:sp>
+      <p:pic>
+        <p:nvPicPr>
+          <p:cNvPr id="17421" name="Picture 17420" descr="icon_ml.png"/>
+          <p:cNvPicPr>
+            <a:picLocks noChangeAspect="1"/>
+          </p:cNvPicPr>
+          <p:nvPr/>
+        </p:nvPicPr>
+        <p:blipFill>
+          <a:blip r:embed="rId6"/>
+          <a:stretch>
+            <a:fillRect/>
+          </a:stretch>
+        </p:blipFill>
+        <p:spPr>
+          <a:xfrm>
+            <a:off x="6263640" y="1280160"/>
+            <a:ext cx="384048" cy="384048"/>
+          </a:xfrm>
+          <a:prstGeom prst="rect">
+            <a:avLst/>
+          </a:prstGeom>
+        </p:spPr>
+      </p:pic>
+      <p:sp>
+        <p:nvSpPr>
+          <p:cNvPr id="17422" name="TextBox 17421"/>
+          <p:cNvSpPr txBox="1"/>
+          <p:nvPr/>
+        </p:nvSpPr>
+        <p:spPr>
+          <a:xfrm>
+            <a:off x="6702552" y="1243584"/>
+            <a:ext cx="2157984" cy="292608"/>
+          </a:xfrm>
+          <a:prstGeom prst="rect">
+            <a:avLst/>
+          </a:prstGeom>
+          <a:noFill/>
+        </p:spPr>
+        <p:txBody>
+          <a:bodyPr wrap="square">
+            <a:spAutoFit/>
+          </a:bodyPr>
+          <a:lstStyle/>
+          <a:p>
+            <a:pPr algn="l">
+              <a:spcAft>
+                <a:spcPts val="0"/>
+              </a:spcAft>
+            </a:pPr>
+            <a:r>
+              <a:rPr sz="1400" b="1">
+                <a:solidFill>
+                  <a:srgbClr val="F47B20"/>
+                </a:solidFill>
+                <a:latin typeface="Calibri"/>
+              </a:rPr>
+              <a:t>AI is ready</a:t>
+            </a:r>
+          </a:p>
+        </p:txBody>
+      </p:sp>
+      <p:sp>
+        <p:nvSpPr>
+          <p:cNvPr id="17423" name="TextBox 17422"/>
+          <p:cNvSpPr txBox="1"/>
+          <p:nvPr/>
+        </p:nvSpPr>
+        <p:spPr>
+          <a:xfrm>
+            <a:off x="6281928" y="1664208"/>
+            <a:ext cx="2560320" cy="438912"/>
+          </a:xfrm>
+          <a:prstGeom prst="rect">
+            <a:avLst/>
+          </a:prstGeom>
+          <a:noFill/>
+        </p:spPr>
+        <p:txBody>
+          <a:bodyPr wrap="square">
+            <a:spAutoFit/>
+          </a:bodyPr>
+          <a:lstStyle/>
+          <a:p>
+            <a:pPr algn="l">
+              <a:spcAft>
+                <a:spcPts val="0"/>
+              </a:spcAft>
+            </a:pPr>
+            <a:r>
+              <a:rPr sz="1200" b="0">
+                <a:solidFill>
+                  <a:srgbClr val="1A1A1A"/>
+                </a:solidFill>
+                <a:latin typeface="Calibri"/>
+              </a:rPr>
+              <a:t>Loaded already. No long wait.</a:t>
+            </a:r>
+          </a:p>
+        </p:txBody>
+      </p:sp>
+      <p:sp>
+        <p:nvSpPr>
+          <p:cNvPr id="17424" name="Rounded Rectangle 17423"/>
+          <p:cNvSpPr/>
+          <p:nvPr/>
+        </p:nvSpPr>
+        <p:spPr>
+          <a:xfrm>
+            <a:off x="9098280" y="1188720"/>
+            <a:ext cx="2788920" cy="987552"/>
+          </a:xfrm>
+          <a:prstGeom prst="roundRect">
+            <a:avLst>
+              <a:gd name="adj" fmla="val 8000"/>
+            </a:avLst>
+          </a:prstGeom>
+          <a:solidFill>
+            <a:srgbClr val="F4F7FA"/>
+          </a:solidFill>
+          <a:ln>
+            <a:noFill/>
+          </a:ln>
+        </p:spPr>
+        <p:style>
+          <a:lnRef idx="1">
+            <a:schemeClr val="accent1"/>
+          </a:lnRef>
+          <a:fillRef idx="3">
+            <a:schemeClr val="accent1"/>
+          </a:fillRef>
+          <a:effectRef idx="2">
+            <a:schemeClr val="accent1"/>
+          </a:effectRef>
+          <a:fontRef idx="minor">
+            <a:schemeClr val="lt1"/>
+          </a:fontRef>
+        </p:style>
+        <p:txBody>
+          <a:bodyPr rtlCol="0" anchor="ctr"/>
+          <a:lstStyle/>
+          <a:p>
+            <a:pPr algn="ctr"/>
+          </a:p>
+        </p:txBody>
+      </p:sp>
+      <p:pic>
+        <p:nvPicPr>
+          <p:cNvPr id="17425" name="Picture 17424" descr="icon_wifi.png"/>
+          <p:cNvPicPr>
+            <a:picLocks noChangeAspect="1"/>
+          </p:cNvPicPr>
+          <p:nvPr/>
+        </p:nvPicPr>
+        <p:blipFill>
+          <a:blip r:embed="rId7"/>
+          <a:stretch>
+            <a:fillRect/>
+          </a:stretch>
+        </p:blipFill>
+        <p:spPr>
+          <a:xfrm>
+            <a:off x="9189720" y="1280160"/>
+            <a:ext cx="384048" cy="384048"/>
+          </a:xfrm>
+          <a:prstGeom prst="rect">
+            <a:avLst/>
+          </a:prstGeom>
+        </p:spPr>
+      </p:pic>
+      <p:sp>
+        <p:nvSpPr>
+          <p:cNvPr id="17426" name="TextBox 17425"/>
+          <p:cNvSpPr txBox="1"/>
+          <p:nvPr/>
+        </p:nvSpPr>
+        <p:spPr>
+          <a:xfrm>
+            <a:off x="9628632" y="1243584"/>
+            <a:ext cx="2157984" cy="292608"/>
+          </a:xfrm>
+          <a:prstGeom prst="rect">
+            <a:avLst/>
+          </a:prstGeom>
+          <a:noFill/>
+        </p:spPr>
+        <p:txBody>
+          <a:bodyPr wrap="square">
+            <a:spAutoFit/>
+          </a:bodyPr>
+          <a:lstStyle/>
+          <a:p>
+            <a:pPr algn="l">
+              <a:spcAft>
+                <a:spcPts val="0"/>
+              </a:spcAft>
+            </a:pPr>
+            <a:r>
+              <a:rPr sz="1400" b="1">
+                <a:solidFill>
+                  <a:srgbClr val="0B2C4A"/>
+                </a:solidFill>
+                <a:latin typeface="Calibri"/>
+              </a:rPr>
+              <a:t>Short-range radio</a:t>
+            </a:r>
+          </a:p>
+        </p:txBody>
+      </p:sp>
+      <p:sp>
+        <p:nvSpPr>
+          <p:cNvPr id="17427" name="TextBox 17426"/>
+          <p:cNvSpPr txBox="1"/>
+          <p:nvPr/>
+        </p:nvSpPr>
+        <p:spPr>
+          <a:xfrm>
+            <a:off x="9208008" y="1664208"/>
+            <a:ext cx="2560320" cy="438912"/>
+          </a:xfrm>
+          <a:prstGeom prst="rect">
+            <a:avLst/>
+          </a:prstGeom>
+          <a:noFill/>
+        </p:spPr>
+        <p:txBody>
+          <a:bodyPr wrap="square">
+            <a:spAutoFit/>
+          </a:bodyPr>
+          <a:lstStyle/>
+          <a:p>
+            <a:pPr algn="l">
+              <a:spcAft>
+                <a:spcPts val="0"/>
+              </a:spcAft>
+            </a:pPr>
+            <a:r>
+              <a:rPr sz="1200" b="0">
+                <a:solidFill>
+                  <a:srgbClr val="1A1A1A"/>
+                </a:solidFill>
+                <a:latin typeface="Calibri"/>
+              </a:rPr>
+              <a:t>Works across the table. Not through rock.</a:t>
+            </a:r>
+          </a:p>
+        </p:txBody>
+      </p:sp>
+      <p:pic>
+        <p:nvPicPr>
+          <p:cNvPr id="17428" name="Picture 17427" descr="demo_loop.png"/>
+          <p:cNvPicPr>
+            <a:picLocks noChangeAspect="1"/>
+          </p:cNvPicPr>
+          <p:nvPr/>
+        </p:nvPicPr>
+        <p:blipFill>
+          <a:blip r:embed="rId8"/>
+          <a:stretch>
+            <a:fillRect/>
+          </a:stretch>
+        </p:blipFill>
+        <p:spPr>
+          <a:xfrm>
+            <a:off x="320040" y="2249424"/>
+            <a:ext cx="11521440" cy="1389888"/>
+          </a:xfrm>
+          <a:prstGeom prst="rect">
+            <a:avLst/>
+          </a:prstGeom>
+        </p:spPr>
+      </p:pic>
+      <p:pic>
+        <p:nvPicPr>
+          <p:cNvPr id="17429" name="Picture 17428" descr="threshold_graph.png"/>
+          <p:cNvPicPr>
+            <a:picLocks noChangeAspect="1"/>
+          </p:cNvPicPr>
+          <p:nvPr/>
+        </p:nvPicPr>
+        <p:blipFill>
+          <a:blip r:embed="rId9"/>
+          <a:stretch>
+            <a:fillRect/>
+          </a:stretch>
+        </p:blipFill>
+        <p:spPr>
+          <a:xfrm>
+            <a:off x="320040" y="3712463"/>
+            <a:ext cx="5623560" cy="2395728"/>
+          </a:xfrm>
+          <a:prstGeom prst="rect">
+            <a:avLst/>
+          </a:prstGeom>
+        </p:spPr>
+      </p:pic>
+      <p:sp>
+        <p:nvSpPr>
+          <p:cNvPr id="17430" name="Rounded Rectangle 17429"/>
+          <p:cNvSpPr/>
+          <p:nvPr/>
+        </p:nvSpPr>
+        <p:spPr>
+          <a:xfrm>
+            <a:off x="6080760" y="3712463"/>
+            <a:ext cx="2834640" cy="1152144"/>
+          </a:xfrm>
+          <a:prstGeom prst="roundRect">
+            <a:avLst>
+              <a:gd name="adj" fmla="val 8000"/>
+            </a:avLst>
+          </a:prstGeom>
+          <a:solidFill>
+            <a:srgbClr val="F4F7FA"/>
+          </a:solidFill>
+          <a:ln>
+            <a:noFill/>
+          </a:ln>
+        </p:spPr>
+        <p:style>
+          <a:lnRef idx="1">
+            <a:schemeClr val="accent1"/>
+          </a:lnRef>
+          <a:fillRef idx="3">
+            <a:schemeClr val="accent1"/>
+          </a:fillRef>
+          <a:effectRef idx="2">
+            <a:schemeClr val="accent1"/>
+          </a:effectRef>
+          <a:fontRef idx="minor">
+            <a:schemeClr val="lt1"/>
+          </a:fontRef>
+        </p:style>
+        <p:txBody>
+          <a:bodyPr rtlCol="0" anchor="ctr"/>
+          <a:lstStyle/>
+          <a:p>
+            <a:pPr algn="ctr"/>
+          </a:p>
+        </p:txBody>
+      </p:sp>
+      <p:pic>
+        <p:nvPicPr>
+          <p:cNvPr id="17431" name="Picture 17430" descr="icon_stop.png"/>
+          <p:cNvPicPr>
+            <a:picLocks noChangeAspect="1"/>
+          </p:cNvPicPr>
+          <p:nvPr/>
+        </p:nvPicPr>
+        <p:blipFill>
+          <a:blip r:embed="rId10"/>
+          <a:stretch>
+            <a:fillRect/>
+          </a:stretch>
+        </p:blipFill>
+        <p:spPr>
+          <a:xfrm>
+            <a:off x="6190488" y="3840479"/>
+            <a:ext cx="384048" cy="384048"/>
+          </a:xfrm>
+          <a:prstGeom prst="rect">
+            <a:avLst/>
+          </a:prstGeom>
+        </p:spPr>
+      </p:pic>
+      <p:sp>
+        <p:nvSpPr>
+          <p:cNvPr id="17432" name="TextBox 17431"/>
+          <p:cNvSpPr txBox="1"/>
+          <p:nvPr/>
+        </p:nvSpPr>
+        <p:spPr>
+          <a:xfrm>
+            <a:off x="6647688" y="3822191"/>
+            <a:ext cx="2157984" cy="292608"/>
+          </a:xfrm>
+          <a:prstGeom prst="rect">
+            <a:avLst/>
+          </a:prstGeom>
+          <a:noFill/>
+        </p:spPr>
+        <p:txBody>
+          <a:bodyPr wrap="square">
+            <a:spAutoFit/>
+          </a:bodyPr>
+          <a:lstStyle/>
+          <a:p>
+            <a:pPr algn="l">
+              <a:spcAft>
+                <a:spcPts val="0"/>
               </a:spcAft>
             </a:pPr>
             <a:r>
@@ -9480,649 +9738,21 @@
                 </a:solidFill>
                 <a:latin typeface="Calibri"/>
               </a:rPr>
-              <a:t>Feasible as a tabletop SIH hardware demo: parts in hand, firmware + local website in repo. Field mine certification is out of scope.</a:t>
-            </a:r>
-          </a:p>
-        </p:txBody>
-      </p:sp>
-      <p:graphicFrame>
-        <p:nvGraphicFramePr>
-          <p:cNvPr id="17412" name="Table 17411"/>
-          <p:cNvGraphicFramePr>
-            <a:graphicFrameLocks noGrp="1"/>
-          </p:cNvGraphicFramePr>
-          <p:nvPr/>
-        </p:nvGraphicFramePr>
-        <p:xfrm>
-          <a:off x="320040" y="1417320"/>
-          <a:ext cx="5623560" cy="2148840"/>
-        </p:xfrm>
-        <a:graphic>
-          <a:graphicData uri="http://schemas.openxmlformats.org/drawingml/2006/table">
-            <a:tbl>
-              <a:tblPr firstRow="1" bandRow="1">
-                <a:tableStyleId>{5C22544A-7EE6-4342-B048-85BDC9FD1C3A}</a:tableStyleId>
-              </a:tblPr>
-              <a:tblGrid>
-                <a:gridCol w="2811780"/>
-                <a:gridCol w="2811780"/>
-              </a:tblGrid>
-              <a:tr h="358140">
-                <a:tc>
-                  <a:txBody>
-                    <a:bodyPr/>
-                    <a:lstStyle/>
-                    <a:p>
-                      <a:pPr algn="l"/>
-                      <a:r>
-                        <a:rPr sz="1000" b="1">
-                          <a:solidFill>
-                            <a:srgbClr val="FFFFFF"/>
-                          </a:solidFill>
-                          <a:latin typeface="Calibri"/>
-                        </a:rPr>
-                        <a:t>Feasibility check</a:t>
-                      </a:r>
-                    </a:p>
-                  </a:txBody>
-                  <a:tcPr anchor="ctr">
-                    <a:solidFill>
-                      <a:srgbClr val="0B2C4A"/>
-                    </a:solidFill>
-                  </a:tcPr>
-                </a:tc>
-                <a:tc>
-                  <a:txBody>
-                    <a:bodyPr/>
-                    <a:lstStyle/>
-                    <a:p>
-                      <a:pPr algn="l"/>
-                      <a:r>
-                        <a:rPr sz="1000" b="1">
-                          <a:solidFill>
-                            <a:srgbClr val="FFFFFF"/>
-                          </a:solidFill>
-                          <a:latin typeface="Calibri"/>
-                        </a:rPr>
-                        <a:t>Status</a:t>
-                      </a:r>
-                    </a:p>
-                  </a:txBody>
-                  <a:tcPr anchor="ctr">
-                    <a:solidFill>
-                      <a:srgbClr val="0B2C4A"/>
-                    </a:solidFill>
-                  </a:tcPr>
-                </a:tc>
-              </a:tr>
-              <a:tr h="358140">
-                <a:tc>
-                  <a:txBody>
-                    <a:bodyPr/>
-                    <a:lstStyle/>
-                    <a:p>
-                      <a:pPr algn="l"/>
-                      <a:r>
-                        <a:rPr sz="1000" b="1">
-                          <a:solidFill>
-                            <a:srgbClr val="1A1A1A"/>
-                          </a:solidFill>
-                          <a:latin typeface="Calibri"/>
-                        </a:rPr>
-                        <a:t>Boards + sensors for A, B, rover, S3-Zero</a:t>
-                      </a:r>
-                    </a:p>
-                  </a:txBody>
-                  <a:tcPr anchor="ctr">
-                    <a:solidFill>
-                      <a:srgbClr val="FFFFFF"/>
-                    </a:solidFill>
-                  </a:tcPr>
-                </a:tc>
-                <a:tc>
-                  <a:txBody>
-                    <a:bodyPr/>
-                    <a:lstStyle/>
-                    <a:p>
-                      <a:pPr algn="l"/>
-                      <a:r>
-                        <a:rPr sz="1000" b="0">
-                          <a:solidFill>
-                            <a:srgbClr val="1A1A1A"/>
-                          </a:solidFill>
-                          <a:latin typeface="Calibri"/>
-                        </a:rPr>
-                        <a:t>Available</a:t>
-                      </a:r>
-                    </a:p>
-                  </a:txBody>
-                  <a:tcPr anchor="ctr">
-                    <a:solidFill>
-                      <a:srgbClr val="FFFFFF"/>
-                    </a:solidFill>
-                  </a:tcPr>
-                </a:tc>
-              </a:tr>
-              <a:tr h="358140">
-                <a:tc>
-                  <a:txBody>
-                    <a:bodyPr/>
-                    <a:lstStyle/>
-                    <a:p>
-                      <a:pPr algn="l"/>
-                      <a:r>
-                        <a:rPr sz="1000" b="1">
-                          <a:solidFill>
-                            <a:srgbClr val="1A1A1A"/>
-                          </a:solidFill>
-                          <a:latin typeface="Calibri"/>
-                        </a:rPr>
-                        <a:t>Node radio</a:t>
-                      </a:r>
-                    </a:p>
-                  </a:txBody>
-                  <a:tcPr anchor="ctr">
-                    <a:solidFill>
-                      <a:srgbClr val="F4F7FA"/>
-                    </a:solidFill>
-                  </a:tcPr>
-                </a:tc>
-                <a:tc>
-                  <a:txBody>
-                    <a:bodyPr/>
-                    <a:lstStyle/>
-                    <a:p>
-                      <a:pPr algn="l"/>
-                      <a:r>
-                        <a:rPr sz="1000" b="0">
-                          <a:solidFill>
-                            <a:srgbClr val="1A1A1A"/>
-                          </a:solidFill>
-                          <a:latin typeface="Calibri"/>
-                        </a:rPr>
-                        <a:t>ESP-NOW ch1, tabletop range only</a:t>
-                      </a:r>
-                    </a:p>
-                  </a:txBody>
-                  <a:tcPr anchor="ctr">
-                    <a:solidFill>
-                      <a:srgbClr val="F4F7FA"/>
-                    </a:solidFill>
-                  </a:tcPr>
-                </a:tc>
-              </a:tr>
-              <a:tr h="358140">
-                <a:tc>
-                  <a:txBody>
-                    <a:bodyPr/>
-                    <a:lstStyle/>
-                    <a:p>
-                      <a:pPr algn="l"/>
-                      <a:r>
-                        <a:rPr sz="1000" b="1">
-                          <a:solidFill>
-                            <a:srgbClr val="1A1A1A"/>
-                          </a:solidFill>
-                          <a:latin typeface="Calibri"/>
-                        </a:rPr>
-                        <a:t>ML on venue laptop</a:t>
-                      </a:r>
-                    </a:p>
-                  </a:txBody>
-                  <a:tcPr anchor="ctr">
-                    <a:solidFill>
-                      <a:srgbClr val="FFFFFF"/>
-                    </a:solidFill>
-                  </a:tcPr>
-                </a:tc>
-                <a:tc>
-                  <a:txBody>
-                    <a:bodyPr/>
-                    <a:lstStyle/>
-                    <a:p>
-                      <a:pPr algn="l"/>
-                      <a:r>
-                        <a:rPr sz="1000" b="0">
-                          <a:solidFill>
-                            <a:srgbClr val="1A1A1A"/>
-                          </a:solidFill>
-                          <a:latin typeface="Calibri"/>
-                        </a:rPr>
-                        <a:t>Train 2 min quiet NORMAL before judges</a:t>
-                      </a:r>
-                    </a:p>
-                  </a:txBody>
-                  <a:tcPr anchor="ctr">
-                    <a:solidFill>
-                      <a:srgbClr val="FFFFFF"/>
-                    </a:solidFill>
-                  </a:tcPr>
-                </a:tc>
-              </a:tr>
-              <a:tr h="358140">
-                <a:tc>
-                  <a:txBody>
-                    <a:bodyPr/>
-                    <a:lstStyle/>
-                    <a:p>
-                      <a:pPr algn="l"/>
-                      <a:r>
-                        <a:rPr sz="1000" b="1">
-                          <a:solidFill>
-                            <a:srgbClr val="1A1A1A"/>
-                          </a:solidFill>
-                          <a:latin typeface="Calibri"/>
-                        </a:rPr>
-                        <a:t>Operator UI</a:t>
-                      </a:r>
-                    </a:p>
-                  </a:txBody>
-                  <a:tcPr anchor="ctr">
-                    <a:solidFill>
-                      <a:srgbClr val="F4F7FA"/>
-                    </a:solidFill>
-                  </a:tcPr>
-                </a:tc>
-                <a:tc>
-                  <a:txBody>
-                    <a:bodyPr/>
-                    <a:lstStyle/>
-                    <a:p>
-                      <a:pPr algn="l"/>
-                      <a:r>
-                        <a:rPr sz="1000" b="0">
-                          <a:solidFill>
-                            <a:srgbClr val="1A1A1A"/>
-                          </a:solidFill>
-                          <a:latin typeface="Calibri"/>
-                        </a:rPr>
-                        <a:t>Local Flask, no cloud, no login</a:t>
-                      </a:r>
-                    </a:p>
-                  </a:txBody>
-                  <a:tcPr anchor="ctr">
-                    <a:solidFill>
-                      <a:srgbClr val="F4F7FA"/>
-                    </a:solidFill>
-                  </a:tcPr>
-                </a:tc>
-              </a:tr>
-              <a:tr h="358140">
-                <a:tc>
-                  <a:txBody>
-                    <a:bodyPr/>
-                    <a:lstStyle/>
-                    <a:p>
-                      <a:pPr algn="l"/>
-                      <a:r>
-                        <a:rPr sz="1000" b="1">
-                          <a:solidFill>
-                            <a:srgbClr val="1A1A1A"/>
-                          </a:solidFill>
-                          <a:latin typeface="Calibri"/>
-                        </a:rPr>
-                        <a:t>Demo loop</a:t>
-                      </a:r>
-                    </a:p>
-                  </a:txBody>
-                  <a:tcPr anchor="ctr">
-                    <a:solidFill>
-                      <a:srgbClr val="FFFFFF"/>
-                    </a:solidFill>
-                  </a:tcPr>
-                </a:tc>
-                <a:tc>
-                  <a:txBody>
-                    <a:bodyPr/>
-                    <a:lstStyle/>
-                    <a:p>
-                      <a:pPr algn="l"/>
-                      <a:r>
-                        <a:rPr sz="1000" b="0">
-                          <a:solidFill>
-                            <a:srgbClr val="1A1A1A"/>
-                          </a:solidFill>
-                          <a:latin typeface="Calibri"/>
-                        </a:rPr>
-                        <a:t>Quiet → disturb → WATCH/ALERT → rover → ack</a:t>
-                      </a:r>
-                    </a:p>
-                  </a:txBody>
-                  <a:tcPr anchor="ctr">
-                    <a:solidFill>
-                      <a:srgbClr val="FFFFFF"/>
-                    </a:solidFill>
-                  </a:tcPr>
-                </a:tc>
-              </a:tr>
-            </a:tbl>
-          </a:graphicData>
-        </a:graphic>
-      </p:graphicFrame>
-      <p:graphicFrame>
-        <p:nvGraphicFramePr>
-          <p:cNvPr id="17413" name="Table 17412"/>
-          <p:cNvGraphicFramePr>
-            <a:graphicFrameLocks noGrp="1"/>
-          </p:cNvGraphicFramePr>
-          <p:nvPr/>
-        </p:nvGraphicFramePr>
-        <p:xfrm>
-          <a:off x="6126480" y="1417320"/>
-          <a:ext cx="5715000" cy="2148840"/>
-        </p:xfrm>
-        <a:graphic>
-          <a:graphicData uri="http://schemas.openxmlformats.org/drawingml/2006/table">
-            <a:tbl>
-              <a:tblPr firstRow="1" bandRow="1">
-                <a:tableStyleId>{5C22544A-7EE6-4342-B048-85BDC9FD1C3A}</a:tableStyleId>
-              </a:tblPr>
-              <a:tblGrid>
-                <a:gridCol w="2857500"/>
-                <a:gridCol w="2857500"/>
-              </a:tblGrid>
-              <a:tr h="358140">
-                <a:tc>
-                  <a:txBody>
-                    <a:bodyPr/>
-                    <a:lstStyle/>
-                    <a:p>
-                      <a:pPr algn="l"/>
-                      <a:r>
-                        <a:rPr sz="1000" b="1">
-                          <a:solidFill>
-                            <a:srgbClr val="FFFFFF"/>
-                          </a:solidFill>
-                          <a:latin typeface="Calibri"/>
-                        </a:rPr>
-                        <a:t>If this happens</a:t>
-                      </a:r>
-                    </a:p>
-                  </a:txBody>
-                  <a:tcPr anchor="ctr">
-                    <a:solidFill>
-                      <a:srgbClr val="0B2C4A"/>
-                    </a:solidFill>
-                  </a:tcPr>
-                </a:tc>
-                <a:tc>
-                  <a:txBody>
-                    <a:bodyPr/>
-                    <a:lstStyle/>
-                    <a:p>
-                      <a:pPr algn="l"/>
-                      <a:r>
-                        <a:rPr sz="1000" b="1">
-                          <a:solidFill>
-                            <a:srgbClr val="FFFFFF"/>
-                          </a:solidFill>
-                          <a:latin typeface="Calibri"/>
-                        </a:rPr>
-                        <a:t>Fallback</a:t>
-                      </a:r>
-                    </a:p>
-                  </a:txBody>
-                  <a:tcPr anchor="ctr">
-                    <a:solidFill>
-                      <a:srgbClr val="0B2C4A"/>
-                    </a:solidFill>
-                  </a:tcPr>
-                </a:tc>
-              </a:tr>
-              <a:tr h="358140">
-                <a:tc>
-                  <a:txBody>
-                    <a:bodyPr/>
-                    <a:lstStyle/>
-                    <a:p>
-                      <a:pPr algn="l"/>
-                      <a:r>
-                        <a:rPr sz="1000" b="1">
-                          <a:solidFill>
-                            <a:srgbClr val="1A1A1A"/>
-                          </a:solidFill>
-                          <a:latin typeface="Calibri"/>
-                        </a:rPr>
-                        <a:t>ESP-NOW / USB drop</a:t>
-                      </a:r>
-                    </a:p>
-                  </a:txBody>
-                  <a:tcPr anchor="ctr">
-                    <a:solidFill>
-                      <a:srgbClr val="FFFFFF"/>
-                    </a:solidFill>
-                  </a:tcPr>
-                </a:tc>
-                <a:tc>
-                  <a:txBody>
-                    <a:bodyPr/>
-                    <a:lstStyle/>
-                    <a:p>
-                      <a:pPr algn="l"/>
-                      <a:r>
-                        <a:rPr sz="1000" b="0">
-                          <a:solidFill>
-                            <a:srgbClr val="1A1A1A"/>
-                          </a:solidFill>
-                          <a:latin typeface="Calibri"/>
-                        </a:rPr>
-                        <a:t>UNKNOWN, never fake-green</a:t>
-                      </a:r>
-                    </a:p>
-                  </a:txBody>
-                  <a:tcPr anchor="ctr">
-                    <a:solidFill>
-                      <a:srgbClr val="FFFFFF"/>
-                    </a:solidFill>
-                  </a:tcPr>
-                </a:tc>
-              </a:tr>
-              <a:tr h="358140">
-                <a:tc>
-                  <a:txBody>
-                    <a:bodyPr/>
-                    <a:lstStyle/>
-                    <a:p>
-                      <a:pPr algn="l"/>
-                      <a:r>
-                        <a:rPr sz="1000" b="1">
-                          <a:solidFill>
-                            <a:srgbClr val="1A1A1A"/>
-                          </a:solidFill>
-                          <a:latin typeface="Calibri"/>
-                        </a:rPr>
-                        <a:t>Not enough NORMAL samples</a:t>
-                      </a:r>
-                    </a:p>
-                  </a:txBody>
-                  <a:tcPr anchor="ctr">
-                    <a:solidFill>
-                      <a:srgbClr val="F4F7FA"/>
-                    </a:solidFill>
-                  </a:tcPr>
-                </a:tc>
-                <a:tc>
-                  <a:txBody>
-                    <a:bodyPr/>
-                    <a:lstStyle/>
-                    <a:p>
-                      <a:pPr algn="l"/>
-                      <a:r>
-                        <a:rPr sz="1000" b="0">
-                          <a:solidFill>
-                            <a:srgbClr val="1A1A1A"/>
-                          </a:solidFill>
-                          <a:latin typeface="Calibri"/>
-                        </a:rPr>
-                        <a:t>AI stays INACTIVE; rules still run</a:t>
-                      </a:r>
-                    </a:p>
-                  </a:txBody>
-                  <a:tcPr anchor="ctr">
-                    <a:solidFill>
-                      <a:srgbClr val="F4F7FA"/>
-                    </a:solidFill>
-                  </a:tcPr>
-                </a:tc>
-              </a:tr>
-              <a:tr h="358140">
-                <a:tc>
-                  <a:txBody>
-                    <a:bodyPr/>
-                    <a:lstStyle/>
-                    <a:p>
-                      <a:pPr algn="l"/>
-                      <a:r>
-                        <a:rPr sz="1000" b="1">
-                          <a:solidFill>
-                            <a:srgbClr val="1A1A1A"/>
-                          </a:solidFill>
-                          <a:latin typeface="Calibri"/>
-                        </a:rPr>
-                        <a:t>Need UI without hardware</a:t>
-                      </a:r>
-                    </a:p>
-                  </a:txBody>
-                  <a:tcPr anchor="ctr">
-                    <a:solidFill>
-                      <a:srgbClr val="FFFFFF"/>
-                    </a:solidFill>
-                  </a:tcPr>
-                </a:tc>
-                <a:tc>
-                  <a:txBody>
-                    <a:bodyPr/>
-                    <a:lstStyle/>
-                    <a:p>
-                      <a:pPr algn="l"/>
-                      <a:r>
-                        <a:rPr sz="1000" b="0">
-                          <a:solidFill>
-                            <a:srgbClr val="1A1A1A"/>
-                          </a:solidFill>
-                          <a:latin typeface="Calibri"/>
-                        </a:rPr>
-                        <a:t>--mode simulate, banner on</a:t>
-                      </a:r>
-                    </a:p>
-                  </a:txBody>
-                  <a:tcPr anchor="ctr">
-                    <a:solidFill>
-                      <a:srgbClr val="FFFFFF"/>
-                    </a:solidFill>
-                  </a:tcPr>
-                </a:tc>
-              </a:tr>
-              <a:tr h="358140">
-                <a:tc>
-                  <a:txBody>
-                    <a:bodyPr/>
-                    <a:lstStyle/>
-                    <a:p>
-                      <a:pPr algn="l"/>
-                      <a:r>
-                        <a:rPr sz="1000" b="1">
-                          <a:solidFill>
-                            <a:srgbClr val="1A1A1A"/>
-                          </a:solidFill>
-                          <a:latin typeface="Calibri"/>
-                        </a:rPr>
-                        <a:t>Rover page dies</a:t>
-                      </a:r>
-                    </a:p>
-                  </a:txBody>
-                  <a:tcPr anchor="ctr">
-                    <a:solidFill>
-                      <a:srgbClr val="F4F7FA"/>
-                    </a:solidFill>
-                  </a:tcPr>
-                </a:tc>
-                <a:tc>
-                  <a:txBody>
-                    <a:bodyPr/>
-                    <a:lstStyle/>
-                    <a:p>
-                      <a:pPr algn="l"/>
-                      <a:r>
-                        <a:rPr sz="1000" b="0">
-                          <a:solidFill>
-                            <a:srgbClr val="1A1A1A"/>
-                          </a:solidFill>
-                          <a:latin typeface="Calibri"/>
-                        </a:rPr>
-                        <a:t>Firmware STOP if no cmd ~400 ms</a:t>
-                      </a:r>
-                    </a:p>
-                  </a:txBody>
-                  <a:tcPr anchor="ctr">
-                    <a:solidFill>
-                      <a:srgbClr val="F4F7FA"/>
-                    </a:solidFill>
-                  </a:tcPr>
-                </a:tc>
-              </a:tr>
-              <a:tr h="358140">
-                <a:tc>
-                  <a:txBody>
-                    <a:bodyPr/>
-                    <a:lstStyle/>
-                    <a:p>
-                      <a:pPr algn="l"/>
-                      <a:r>
-                        <a:rPr sz="1000" b="1">
-                          <a:solidFill>
-                            <a:srgbClr val="1A1A1A"/>
-                          </a:solidFill>
-                          <a:latin typeface="Calibri"/>
-                        </a:rPr>
-                        <a:t>Slider uncalibrated</a:t>
-                      </a:r>
-                    </a:p>
-                  </a:txBody>
-                  <a:tcPr anchor="ctr">
-                    <a:solidFill>
-                      <a:srgbClr val="FFFFFF"/>
-                    </a:solidFill>
-                  </a:tcPr>
-                </a:tc>
-                <a:tc>
-                  <a:txBody>
-                    <a:bodyPr/>
-                    <a:lstStyle/>
-                    <a:p>
-                      <a:pPr algn="l"/>
-                      <a:r>
-                        <a:rPr sz="1000" b="0">
-                          <a:solidFill>
-                            <a:srgbClr val="1A1A1A"/>
-                          </a:solidFill>
-                          <a:latin typeface="Calibri"/>
-                        </a:rPr>
-                        <a:t>Node A mm omitted; no fake gap</a:t>
-                      </a:r>
-                    </a:p>
-                  </a:txBody>
-                  <a:tcPr anchor="ctr">
-                    <a:solidFill>
-                      <a:srgbClr val="FFFFFF"/>
-                    </a:solidFill>
-                  </a:tcPr>
-                </a:tc>
-              </a:tr>
-            </a:tbl>
-          </a:graphicData>
-        </a:graphic>
-      </p:graphicFrame>
-      <p:sp>
-        <p:nvSpPr>
-          <p:cNvPr id="17414" name="TextBox 17413"/>
+              <a:t>Cable dies</a:t>
+            </a:r>
+          </a:p>
+        </p:txBody>
+      </p:sp>
+      <p:sp>
+        <p:nvSpPr>
+          <p:cNvPr id="17433" name="TextBox 17432"/>
           <p:cNvSpPr txBox="1"/>
           <p:nvPr/>
         </p:nvSpPr>
         <p:spPr>
           <a:xfrm>
-            <a:off x="320040" y="3657600"/>
-            <a:ext cx="11521440" cy="237744"/>
+            <a:off x="6190488" y="4297679"/>
+            <a:ext cx="2615184" cy="493776"/>
           </a:xfrm>
           <a:prstGeom prst="rect">
             <a:avLst/>
@@ -10130,408 +9760,469 @@
           <a:noFill/>
         </p:spPr>
         <p:txBody>
-          <a:bodyPr wrap="square" anchor="t"/>
+          <a:bodyPr wrap="square">
+            <a:spAutoFit/>
+          </a:bodyPr>
           <a:lstStyle/>
           <a:p>
             <a:pPr algn="l">
               <a:spcAft>
-                <a:spcPts val="200"/>
+                <a:spcPts val="0"/>
               </a:spcAft>
             </a:pPr>
             <a:r>
-              <a:rPr sz="1200" b="1">
+              <a:rPr sz="1200" b="0">
+                <a:solidFill>
+                  <a:srgbClr val="1A1A1A"/>
+                </a:solidFill>
+                <a:latin typeface="Calibri"/>
+              </a:rPr>
+              <a:t>Show UNKNOWN. Never fake a green light.</a:t>
+            </a:r>
+          </a:p>
+        </p:txBody>
+      </p:sp>
+      <p:sp>
+        <p:nvSpPr>
+          <p:cNvPr id="17434" name="Rounded Rectangle 17433"/>
+          <p:cNvSpPr/>
+          <p:nvPr/>
+        </p:nvSpPr>
+        <p:spPr>
+          <a:xfrm>
+            <a:off x="9006840" y="3712463"/>
+            <a:ext cx="2834640" cy="1152144"/>
+          </a:xfrm>
+          <a:prstGeom prst="roundRect">
+            <a:avLst>
+              <a:gd name="adj" fmla="val 8000"/>
+            </a:avLst>
+          </a:prstGeom>
+          <a:solidFill>
+            <a:srgbClr val="F4F7FA"/>
+          </a:solidFill>
+          <a:ln>
+            <a:noFill/>
+          </a:ln>
+        </p:spPr>
+        <p:style>
+          <a:lnRef idx="1">
+            <a:schemeClr val="accent1"/>
+          </a:lnRef>
+          <a:fillRef idx="3">
+            <a:schemeClr val="accent1"/>
+          </a:fillRef>
+          <a:effectRef idx="2">
+            <a:schemeClr val="accent1"/>
+          </a:effectRef>
+          <a:fontRef idx="minor">
+            <a:schemeClr val="lt1"/>
+          </a:fontRef>
+        </p:style>
+        <p:txBody>
+          <a:bodyPr rtlCol="0" anchor="ctr"/>
+          <a:lstStyle/>
+          <a:p>
+            <a:pPr algn="ctr"/>
+          </a:p>
+        </p:txBody>
+      </p:sp>
+      <p:pic>
+        <p:nvPicPr>
+          <p:cNvPr id="17435" name="Picture 17434" descr="icon_wifi.png"/>
+          <p:cNvPicPr>
+            <a:picLocks noChangeAspect="1"/>
+          </p:cNvPicPr>
+          <p:nvPr/>
+        </p:nvPicPr>
+        <p:blipFill>
+          <a:blip r:embed="rId7"/>
+          <a:stretch>
+            <a:fillRect/>
+          </a:stretch>
+        </p:blipFill>
+        <p:spPr>
+          <a:xfrm>
+            <a:off x="9116568" y="3840479"/>
+            <a:ext cx="384048" cy="384048"/>
+          </a:xfrm>
+          <a:prstGeom prst="rect">
+            <a:avLst/>
+          </a:prstGeom>
+        </p:spPr>
+      </p:pic>
+      <p:sp>
+        <p:nvSpPr>
+          <p:cNvPr id="17436" name="TextBox 17435"/>
+          <p:cNvSpPr txBox="1"/>
+          <p:nvPr/>
+        </p:nvSpPr>
+        <p:spPr>
+          <a:xfrm>
+            <a:off x="9573768" y="3822191"/>
+            <a:ext cx="2157984" cy="292608"/>
+          </a:xfrm>
+          <a:prstGeom prst="rect">
+            <a:avLst/>
+          </a:prstGeom>
+          <a:noFill/>
+        </p:spPr>
+        <p:txBody>
+          <a:bodyPr wrap="square">
+            <a:spAutoFit/>
+          </a:bodyPr>
+          <a:lstStyle/>
+          <a:p>
+            <a:pPr algn="l">
+              <a:spcAft>
+                <a:spcPts val="0"/>
+              </a:spcAft>
+            </a:pPr>
+            <a:r>
+              <a:rPr sz="1300" b="1">
                 <a:solidFill>
                   <a:srgbClr val="0B2C4A"/>
                 </a:solidFill>
                 <a:latin typeface="Calibri"/>
               </a:rPr>
-              <a:t>Risks and how we contain them (no budget theatre)</a:t>
-            </a:r>
-          </a:p>
-        </p:txBody>
-      </p:sp>
-      <p:graphicFrame>
-        <p:nvGraphicFramePr>
-          <p:cNvPr id="17415" name="Table 17414"/>
-          <p:cNvGraphicFramePr>
-            <a:graphicFrameLocks noGrp="1"/>
-          </p:cNvGraphicFramePr>
+              <a:t>Rover Wi-Fi dies</a:t>
+            </a:r>
+          </a:p>
+        </p:txBody>
+      </p:sp>
+      <p:sp>
+        <p:nvSpPr>
+          <p:cNvPr id="17437" name="TextBox 17436"/>
+          <p:cNvSpPr txBox="1"/>
           <p:nvPr/>
-        </p:nvGraphicFramePr>
-        <p:xfrm>
-          <a:off x="320040" y="3913632"/>
-          <a:ext cx="11521440" cy="1600200"/>
-        </p:xfrm>
-        <a:graphic>
-          <a:graphicData uri="http://schemas.openxmlformats.org/drawingml/2006/table">
-            <a:tbl>
-              <a:tblPr firstRow="1" bandRow="1">
-                <a:tableStyleId>{5C22544A-7EE6-4342-B048-85BDC9FD1C3A}</a:tableStyleId>
-              </a:tblPr>
-              <a:tblGrid>
-                <a:gridCol w="3840480"/>
-                <a:gridCol w="3840480"/>
-                <a:gridCol w="3840480"/>
-              </a:tblGrid>
-              <a:tr h="320040">
-                <a:tc>
-                  <a:txBody>
-                    <a:bodyPr/>
-                    <a:lstStyle/>
-                    <a:p>
-                      <a:pPr algn="l"/>
-                      <a:r>
-                        <a:rPr sz="1000" b="1">
-                          <a:solidFill>
-                            <a:srgbClr val="FFFFFF"/>
-                          </a:solidFill>
-                          <a:latin typeface="Calibri"/>
-                        </a:rPr>
-                        <a:t>Risk</a:t>
-                      </a:r>
-                    </a:p>
-                  </a:txBody>
-                  <a:tcPr anchor="ctr">
-                    <a:solidFill>
-                      <a:srgbClr val="0B2C4A"/>
-                    </a:solidFill>
-                  </a:tcPr>
-                </a:tc>
-                <a:tc>
-                  <a:txBody>
-                    <a:bodyPr/>
-                    <a:lstStyle/>
-                    <a:p>
-                      <a:pPr algn="l"/>
-                      <a:r>
-                        <a:rPr sz="1000" b="1">
-                          <a:solidFill>
-                            <a:srgbClr val="FFFFFF"/>
-                          </a:solidFill>
-                          <a:latin typeface="Calibri"/>
-                        </a:rPr>
-                        <a:t>Why it is real</a:t>
-                      </a:r>
-                    </a:p>
-                  </a:txBody>
-                  <a:tcPr anchor="ctr">
-                    <a:solidFill>
-                      <a:srgbClr val="0B2C4A"/>
-                    </a:solidFill>
-                  </a:tcPr>
-                </a:tc>
-                <a:tc>
-                  <a:txBody>
-                    <a:bodyPr/>
-                    <a:lstStyle/>
-                    <a:p>
-                      <a:pPr algn="l"/>
-                      <a:r>
-                        <a:rPr sz="1000" b="1">
-                          <a:solidFill>
-                            <a:srgbClr val="FFFFFF"/>
-                          </a:solidFill>
-                          <a:latin typeface="Calibri"/>
-                        </a:rPr>
-                        <a:t>Strategy</a:t>
-                      </a:r>
-                    </a:p>
-                  </a:txBody>
-                  <a:tcPr anchor="ctr">
-                    <a:solidFill>
-                      <a:srgbClr val="0B2C4A"/>
-                    </a:solidFill>
-                  </a:tcPr>
-                </a:tc>
-              </a:tr>
-              <a:tr h="320040">
-                <a:tc>
-                  <a:txBody>
-                    <a:bodyPr/>
-                    <a:lstStyle/>
-                    <a:p>
-                      <a:pPr algn="l"/>
-                      <a:r>
-                        <a:rPr sz="1000" b="1">
-                          <a:solidFill>
-                            <a:srgbClr val="1A1A1A"/>
-                          </a:solidFill>
-                          <a:latin typeface="Calibri"/>
-                        </a:rPr>
-                        <a:t>Over-claiming the PS</a:t>
-                      </a:r>
-                    </a:p>
-                  </a:txBody>
-                  <a:tcPr anchor="ctr">
-                    <a:solidFill>
-                      <a:srgbClr val="FFFFFF"/>
-                    </a:solidFill>
-                  </a:tcPr>
-                </a:tc>
-                <a:tc>
-                  <a:txBody>
-                    <a:bodyPr/>
-                    <a:lstStyle/>
-                    <a:p>
-                      <a:pPr algn="l"/>
-                      <a:r>
-                        <a:rPr sz="1000" b="0">
-                          <a:solidFill>
-                            <a:srgbClr val="1A1A1A"/>
-                          </a:solidFill>
-                          <a:latin typeface="Calibri"/>
-                        </a:rPr>
-                        <a:t>Tilt ≠ settlement in cm; IF ≠ collapse probability</a:t>
-                      </a:r>
-                    </a:p>
-                  </a:txBody>
-                  <a:tcPr anchor="ctr">
-                    <a:solidFill>
-                      <a:srgbClr val="FFFFFF"/>
-                    </a:solidFill>
-                  </a:tcPr>
-                </a:tc>
-                <a:tc>
-                  <a:txBody>
-                    <a:bodyPr/>
-                    <a:lstStyle/>
-                    <a:p>
-                      <a:pPr algn="l"/>
-                      <a:r>
-                        <a:rPr sz="1000" b="0">
-                          <a:solidFill>
-                            <a:srgbClr val="1A1A1A"/>
-                          </a:solidFill>
-                          <a:latin typeface="Calibri"/>
-                        </a:rPr>
-                        <a:t>Fixed honesty table on dashboard + this PPT</a:t>
-                      </a:r>
-                    </a:p>
-                  </a:txBody>
-                  <a:tcPr anchor="ctr">
-                    <a:solidFill>
-                      <a:srgbClr val="FFFFFF"/>
-                    </a:solidFill>
-                  </a:tcPr>
-                </a:tc>
-              </a:tr>
-              <a:tr h="320040">
-                <a:tc>
-                  <a:txBody>
-                    <a:bodyPr/>
-                    <a:lstStyle/>
-                    <a:p>
-                      <a:pPr algn="l"/>
-                      <a:r>
-                        <a:rPr sz="1000" b="1">
-                          <a:solidFill>
-                            <a:srgbClr val="1A1A1A"/>
-                          </a:solidFill>
-                          <a:latin typeface="Calibri"/>
-                        </a:rPr>
-                        <a:t>Mixing rover with nodes</a:t>
-                      </a:r>
-                    </a:p>
-                  </a:txBody>
-                  <a:tcPr anchor="ctr">
-                    <a:solidFill>
-                      <a:srgbClr val="F4F7FA"/>
-                    </a:solidFill>
-                  </a:tcPr>
-                </a:tc>
-                <a:tc>
-                  <a:txBody>
-                    <a:bodyPr/>
-                    <a:lstStyle/>
-                    <a:p>
-                      <a:pPr algn="l"/>
-                      <a:r>
-                        <a:rPr sz="1000" b="0">
-                          <a:solidFill>
-                            <a:srgbClr val="1A1A1A"/>
-                          </a:solidFill>
-                          <a:latin typeface="Calibri"/>
-                        </a:rPr>
-                        <a:t>Moving IMU would poison Node B / IF</a:t>
-                      </a:r>
-                    </a:p>
-                  </a:txBody>
-                  <a:tcPr anchor="ctr">
-                    <a:solidFill>
-                      <a:srgbClr val="F4F7FA"/>
-                    </a:solidFill>
-                  </a:tcPr>
-                </a:tc>
-                <a:tc>
-                  <a:txBody>
-                    <a:bodyPr/>
-                    <a:lstStyle/>
-                    <a:p>
-                      <a:pPr algn="l"/>
-                      <a:r>
-                        <a:rPr sz="1000" b="0">
-                          <a:solidFill>
-                            <a:srgbClr val="1A1A1A"/>
-                          </a:solidFill>
-                          <a:latin typeface="Calibri"/>
-                        </a:rPr>
-                        <a:t>device_id rover; never in node models</a:t>
-                      </a:r>
-                    </a:p>
-                  </a:txBody>
-                  <a:tcPr anchor="ctr">
-                    <a:solidFill>
-                      <a:srgbClr val="F4F7FA"/>
-                    </a:solidFill>
-                  </a:tcPr>
-                </a:tc>
-              </a:tr>
-              <a:tr h="320040">
-                <a:tc>
-                  <a:txBody>
-                    <a:bodyPr/>
-                    <a:lstStyle/>
-                    <a:p>
-                      <a:pPr algn="l"/>
-                      <a:r>
-                        <a:rPr sz="1000" b="1">
-                          <a:solidFill>
-                            <a:srgbClr val="1A1A1A"/>
-                          </a:solidFill>
-                          <a:latin typeface="Calibri"/>
-                        </a:rPr>
-                        <a:t>False comfort</a:t>
-                      </a:r>
-                    </a:p>
-                  </a:txBody>
-                  <a:tcPr anchor="ctr">
-                    <a:solidFill>
-                      <a:srgbClr val="FFFFFF"/>
-                    </a:solidFill>
-                  </a:tcPr>
-                </a:tc>
-                <a:tc>
-                  <a:txBody>
-                    <a:bodyPr/>
-                    <a:lstStyle/>
-                    <a:p>
-                      <a:pPr algn="l"/>
-                      <a:r>
-                        <a:rPr sz="1000" b="0">
-                          <a:solidFill>
-                            <a:srgbClr val="1A1A1A"/>
-                          </a:solidFill>
-                          <a:latin typeface="Calibri"/>
-                        </a:rPr>
-                        <a:t>Disconnected sensor looking healthy</a:t>
-                      </a:r>
-                    </a:p>
-                  </a:txBody>
-                  <a:tcPr anchor="ctr">
-                    <a:solidFill>
-                      <a:srgbClr val="FFFFFF"/>
-                    </a:solidFill>
-                  </a:tcPr>
-                </a:tc>
-                <a:tc>
-                  <a:txBody>
-                    <a:bodyPr/>
-                    <a:lstStyle/>
-                    <a:p>
-                      <a:pPr algn="l"/>
-                      <a:r>
-                        <a:rPr sz="1000" b="0">
-                          <a:solidFill>
-                            <a:srgbClr val="1A1A1A"/>
-                          </a:solidFill>
-                          <a:latin typeface="Calibri"/>
-                        </a:rPr>
-                        <a:t>Stale &gt;5 s → UNKNOWN; ML cannot clear a latch</a:t>
-                      </a:r>
-                    </a:p>
-                  </a:txBody>
-                  <a:tcPr anchor="ctr">
-                    <a:solidFill>
-                      <a:srgbClr val="FFFFFF"/>
-                    </a:solidFill>
-                  </a:tcPr>
-                </a:tc>
-              </a:tr>
-              <a:tr h="320040">
-                <a:tc>
-                  <a:txBody>
-                    <a:bodyPr/>
-                    <a:lstStyle/>
-                    <a:p>
-                      <a:pPr algn="l"/>
-                      <a:r>
-                        <a:rPr sz="1000" b="1">
-                          <a:solidFill>
-                            <a:srgbClr val="1A1A1A"/>
-                          </a:solidFill>
-                          <a:latin typeface="Calibri"/>
-                        </a:rPr>
-                        <a:t>Radio is unencrypted broadcast</a:t>
-                      </a:r>
-                    </a:p>
-                  </a:txBody>
-                  <a:tcPr anchor="ctr">
-                    <a:solidFill>
-                      <a:srgbClr val="F4F7FA"/>
-                    </a:solidFill>
-                  </a:tcPr>
-                </a:tc>
-                <a:tc>
-                  <a:txBody>
-                    <a:bodyPr/>
-                    <a:lstStyle/>
-                    <a:p>
-                      <a:pPr algn="l"/>
-                      <a:r>
-                        <a:rPr sz="1000" b="0">
-                          <a:solidFill>
-                            <a:srgbClr val="1A1A1A"/>
-                          </a:solidFill>
-                          <a:latin typeface="Calibri"/>
-                        </a:rPr>
-                        <a:t>Fine for a model; not a mine network</a:t>
-                      </a:r>
-                    </a:p>
-                  </a:txBody>
-                  <a:tcPr anchor="ctr">
-                    <a:solidFill>
-                      <a:srgbClr val="F4F7FA"/>
-                    </a:solidFill>
-                  </a:tcPr>
-                </a:tc>
-                <a:tc>
-                  <a:txBody>
-                    <a:bodyPr/>
-                    <a:lstStyle/>
-                    <a:p>
-                      <a:pPr algn="l"/>
-                      <a:r>
-                        <a:rPr sz="1000" b="0">
-                          <a:solidFill>
-                            <a:srgbClr val="1A1A1A"/>
-                          </a:solidFill>
-                          <a:latin typeface="Calibri"/>
-                        </a:rPr>
-                        <a:t>Say tabletop only; no LoRa / mesh claim</a:t>
-                      </a:r>
-                    </a:p>
-                  </a:txBody>
-                  <a:tcPr anchor="ctr">
-                    <a:solidFill>
-                      <a:srgbClr val="F4F7FA"/>
-                    </a:solidFill>
-                  </a:tcPr>
-                </a:tc>
-              </a:tr>
-            </a:tbl>
-          </a:graphicData>
-        </a:graphic>
-      </p:graphicFrame>
+        </p:nvSpPr>
+        <p:spPr>
+          <a:xfrm>
+            <a:off x="9116568" y="4297679"/>
+            <a:ext cx="2615184" cy="493776"/>
+          </a:xfrm>
+          <a:prstGeom prst="rect">
+            <a:avLst/>
+          </a:prstGeom>
+          <a:noFill/>
+        </p:spPr>
+        <p:txBody>
+          <a:bodyPr wrap="square">
+            <a:spAutoFit/>
+          </a:bodyPr>
+          <a:lstStyle/>
+          <a:p>
+            <a:pPr algn="l">
+              <a:spcAft>
+                <a:spcPts val="0"/>
+              </a:spcAft>
+            </a:pPr>
+            <a:r>
+              <a:rPr sz="1200" b="0">
+                <a:solidFill>
+                  <a:srgbClr val="1A1A1A"/>
+                </a:solidFill>
+                <a:latin typeface="Calibri"/>
+              </a:rPr>
+              <a:t>Motors stop on their own in ~0.4 s.</a:t>
+            </a:r>
+          </a:p>
+        </p:txBody>
+      </p:sp>
+      <p:sp>
+        <p:nvSpPr>
+          <p:cNvPr id="17438" name="Rounded Rectangle 17437"/>
+          <p:cNvSpPr/>
+          <p:nvPr/>
+        </p:nvSpPr>
+        <p:spPr>
+          <a:xfrm>
+            <a:off x="6080760" y="4956048"/>
+            <a:ext cx="2834640" cy="1152144"/>
+          </a:xfrm>
+          <a:prstGeom prst="roundRect">
+            <a:avLst>
+              <a:gd name="adj" fmla="val 8000"/>
+            </a:avLst>
+          </a:prstGeom>
+          <a:solidFill>
+            <a:srgbClr val="F4F7FA"/>
+          </a:solidFill>
+          <a:ln>
+            <a:noFill/>
+          </a:ln>
+        </p:spPr>
+        <p:style>
+          <a:lnRef idx="1">
+            <a:schemeClr val="accent1"/>
+          </a:lnRef>
+          <a:fillRef idx="3">
+            <a:schemeClr val="accent1"/>
+          </a:fillRef>
+          <a:effectRef idx="2">
+            <a:schemeClr val="accent1"/>
+          </a:effectRef>
+          <a:fontRef idx="minor">
+            <a:schemeClr val="lt1"/>
+          </a:fontRef>
+        </p:style>
+        <p:txBody>
+          <a:bodyPr rtlCol="0" anchor="ctr"/>
+          <a:lstStyle/>
+          <a:p>
+            <a:pPr algn="ctr"/>
+          </a:p>
+        </p:txBody>
+      </p:sp>
+      <p:pic>
+        <p:nvPicPr>
+          <p:cNvPr id="17439" name="Picture 17438" descr="icon_warn.png"/>
+          <p:cNvPicPr>
+            <a:picLocks noChangeAspect="1"/>
+          </p:cNvPicPr>
+          <p:nvPr/>
+        </p:nvPicPr>
+        <p:blipFill>
+          <a:blip r:embed="rId11"/>
+          <a:stretch>
+            <a:fillRect/>
+          </a:stretch>
+        </p:blipFill>
+        <p:spPr>
+          <a:xfrm>
+            <a:off x="6190488" y="5084064"/>
+            <a:ext cx="384048" cy="384048"/>
+          </a:xfrm>
+          <a:prstGeom prst="rect">
+            <a:avLst/>
+          </a:prstGeom>
+        </p:spPr>
+      </p:pic>
+      <p:sp>
+        <p:nvSpPr>
+          <p:cNvPr id="17440" name="TextBox 17439"/>
+          <p:cNvSpPr txBox="1"/>
+          <p:nvPr/>
+        </p:nvSpPr>
+        <p:spPr>
+          <a:xfrm>
+            <a:off x="6647688" y="5065776"/>
+            <a:ext cx="2157984" cy="292608"/>
+          </a:xfrm>
+          <a:prstGeom prst="rect">
+            <a:avLst/>
+          </a:prstGeom>
+          <a:noFill/>
+        </p:spPr>
+        <p:txBody>
+          <a:bodyPr wrap="square">
+            <a:spAutoFit/>
+          </a:bodyPr>
+          <a:lstStyle/>
+          <a:p>
+            <a:pPr algn="l">
+              <a:spcAft>
+                <a:spcPts val="0"/>
+              </a:spcAft>
+            </a:pPr>
+            <a:r>
+              <a:rPr sz="1300" b="1">
+                <a:solidFill>
+                  <a:srgbClr val="0B2C4A"/>
+                </a:solidFill>
+                <a:latin typeface="Calibri"/>
+              </a:rPr>
+              <a:t>Easy to over-claim</a:t>
+            </a:r>
+          </a:p>
+        </p:txBody>
+      </p:sp>
+      <p:sp>
+        <p:nvSpPr>
+          <p:cNvPr id="17441" name="TextBox 17440"/>
+          <p:cNvSpPr txBox="1"/>
+          <p:nvPr/>
+        </p:nvSpPr>
+        <p:spPr>
+          <a:xfrm>
+            <a:off x="6190488" y="5541264"/>
+            <a:ext cx="2615184" cy="493776"/>
+          </a:xfrm>
+          <a:prstGeom prst="rect">
+            <a:avLst/>
+          </a:prstGeom>
+          <a:noFill/>
+        </p:spPr>
+        <p:txBody>
+          <a:bodyPr wrap="square">
+            <a:spAutoFit/>
+          </a:bodyPr>
+          <a:lstStyle/>
+          <a:p>
+            <a:pPr algn="l">
+              <a:spcAft>
+                <a:spcPts val="0"/>
+              </a:spcAft>
+            </a:pPr>
+            <a:r>
+              <a:rPr sz="1200" b="0">
+                <a:solidFill>
+                  <a:srgbClr val="1A1A1A"/>
+                </a:solidFill>
+                <a:latin typeface="Calibri"/>
+              </a:rPr>
+              <a:t>No collapse %. Tilt is not ground sink.</a:t>
+            </a:r>
+          </a:p>
+        </p:txBody>
+      </p:sp>
+      <p:sp>
+        <p:nvSpPr>
+          <p:cNvPr id="17442" name="Rounded Rectangle 17441"/>
+          <p:cNvSpPr/>
+          <p:nvPr/>
+        </p:nvSpPr>
+        <p:spPr>
+          <a:xfrm>
+            <a:off x="9006840" y="4956048"/>
+            <a:ext cx="2834640" cy="1152144"/>
+          </a:xfrm>
+          <a:prstGeom prst="roundRect">
+            <a:avLst>
+              <a:gd name="adj" fmla="val 8000"/>
+            </a:avLst>
+          </a:prstGeom>
+          <a:solidFill>
+            <a:srgbClr val="F4F7FA"/>
+          </a:solidFill>
+          <a:ln>
+            <a:noFill/>
+          </a:ln>
+        </p:spPr>
+        <p:style>
+          <a:lnRef idx="1">
+            <a:schemeClr val="accent1"/>
+          </a:lnRef>
+          <a:fillRef idx="3">
+            <a:schemeClr val="accent1"/>
+          </a:fillRef>
+          <a:effectRef idx="2">
+            <a:schemeClr val="accent1"/>
+          </a:effectRef>
+          <a:fontRef idx="minor">
+            <a:schemeClr val="lt1"/>
+          </a:fontRef>
+        </p:style>
+        <p:txBody>
+          <a:bodyPr rtlCol="0" anchor="ctr"/>
+          <a:lstStyle/>
+          <a:p>
+            <a:pPr algn="ctr"/>
+          </a:p>
+        </p:txBody>
+      </p:sp>
+      <p:pic>
+        <p:nvPicPr>
+          <p:cNvPr id="17443" name="Picture 17442" descr="icon_inspect.png"/>
+          <p:cNvPicPr>
+            <a:picLocks noChangeAspect="1"/>
+          </p:cNvPicPr>
+          <p:nvPr/>
+        </p:nvPicPr>
+        <p:blipFill>
+          <a:blip r:embed="rId12"/>
+          <a:stretch>
+            <a:fillRect/>
+          </a:stretch>
+        </p:blipFill>
+        <p:spPr>
+          <a:xfrm>
+            <a:off x="9116568" y="5084064"/>
+            <a:ext cx="384048" cy="384048"/>
+          </a:xfrm>
+          <a:prstGeom prst="rect">
+            <a:avLst/>
+          </a:prstGeom>
+        </p:spPr>
+      </p:pic>
+      <p:sp>
+        <p:nvSpPr>
+          <p:cNvPr id="17444" name="TextBox 17443"/>
+          <p:cNvSpPr txBox="1"/>
+          <p:nvPr/>
+        </p:nvSpPr>
+        <p:spPr>
+          <a:xfrm>
+            <a:off x="9573768" y="5065776"/>
+            <a:ext cx="2157984" cy="292608"/>
+          </a:xfrm>
+          <a:prstGeom prst="rect">
+            <a:avLst/>
+          </a:prstGeom>
+          <a:noFill/>
+        </p:spPr>
+        <p:txBody>
+          <a:bodyPr wrap="square">
+            <a:spAutoFit/>
+          </a:bodyPr>
+          <a:lstStyle/>
+          <a:p>
+            <a:pPr algn="l">
+              <a:spcAft>
+                <a:spcPts val="0"/>
+              </a:spcAft>
+            </a:pPr>
+            <a:r>
+              <a:rPr sz="1300" b="1">
+                <a:solidFill>
+                  <a:srgbClr val="0B2C4A"/>
+                </a:solidFill>
+                <a:latin typeface="Calibri"/>
+              </a:rPr>
+              <a:t>Toy electronics</a:t>
+            </a:r>
+          </a:p>
+        </p:txBody>
+      </p:sp>
+      <p:sp>
+        <p:nvSpPr>
+          <p:cNvPr id="17445" name="TextBox 17444"/>
+          <p:cNvSpPr txBox="1"/>
+          <p:nvPr/>
+        </p:nvSpPr>
+        <p:spPr>
+          <a:xfrm>
+            <a:off x="9116568" y="5541264"/>
+            <a:ext cx="2615184" cy="493776"/>
+          </a:xfrm>
+          <a:prstGeom prst="rect">
+            <a:avLst/>
+          </a:prstGeom>
+          <a:noFill/>
+        </p:spPr>
+        <p:txBody>
+          <a:bodyPr wrap="square">
+            <a:spAutoFit/>
+          </a:bodyPr>
+          <a:lstStyle/>
+          <a:p>
+            <a:pPr algn="l">
+              <a:spcAft>
+                <a:spcPts val="0"/>
+              </a:spcAft>
+            </a:pPr>
+            <a:r>
+              <a:rPr sz="1200" b="0">
+                <a:solidFill>
+                  <a:srgbClr val="1A1A1A"/>
+                </a:solidFill>
+                <a:latin typeface="Calibri"/>
+              </a:rPr>
+              <a:t>Table model only. Not mine-approved gear.</a:t>
+            </a:r>
+          </a:p>
+        </p:txBody>
+      </p:sp>
     </p:spTree>
     <p:extLst>
       <p:ext uri="{BB962C8B-B14F-4D97-AF65-F5344CB8AC3E}">
@@ -10651,17 +10342,27 @@
             <p:ph type="title"/>
           </p:nvPr>
         </p:nvSpPr>
-        <p:spPr/>
-        <p:txBody>
-          <a:bodyPr/>
+        <p:spPr>
+          <a:xfrm>
+            <a:off x="1719072" y="91440"/>
+            <a:ext cx="7818120" cy="804672"/>
+          </a:xfrm>
+        </p:spPr>
+        <p:txBody>
+          <a:bodyPr wrap="square"/>
           <a:lstStyle/>
           <a:p>
-            <a:pPr eaLnBrk="1" hangingPunct="1"/>
-            <a:r>
-              <a:rPr lang="en-US" sz="3600" b="1" dirty="0">
-                <a:latin typeface="Times New Roman" panose="02020603050405020304" pitchFamily="18" charset="0"/>
-                <a:ea typeface="ＭＳ Ｐゴシック" pitchFamily="1" charset="-128"/>
-                <a:cs typeface="Times New Roman" panose="02020603050405020304" pitchFamily="18" charset="0"/>
+            <a:pPr eaLnBrk="1" hangingPunct="1" algn="l">
+              <a:spcAft>
+                <a:spcPts val="0"/>
+              </a:spcAft>
+            </a:pPr>
+            <a:r>
+              <a:rPr sz="2600" b="1">
+                <a:solidFill>
+                  <a:srgbClr val="0B2C4A"/>
+                </a:solidFill>
+                <a:latin typeface="Calibri"/>
               </a:rPr>
               <a:t>IMPACT AND BENEFITS</a:t>
             </a:r>
@@ -10895,6 +10596,12 @@
           <a:prstGeom prst="ellipse">
             <a:avLst/>
           </a:prstGeom>
+          <a:solidFill>
+            <a:srgbClr val="F47B20"/>
+          </a:solidFill>
+          <a:ln>
+            <a:noFill/>
+          </a:ln>
         </p:spPr>
         <p:style>
           <a:lnRef idx="2">
@@ -10916,7 +10623,7 @@
           <a:p>
             <a:pPr algn="ctr">
               <a:spcAft>
-                <a:spcPts val="400"/>
+                <a:spcPts val="0"/>
               </a:spcAft>
             </a:pPr>
             <a:r>
@@ -10970,8 +10677,8 @@
         </p:nvSpPr>
         <p:spPr>
           <a:xfrm>
-            <a:off x="320040" y="1024128"/>
-            <a:ext cx="11521440" cy="411480"/>
+            <a:off x="320040" y="987552"/>
+            <a:ext cx="11521440" cy="365760"/>
           </a:xfrm>
           <a:prstGeom prst="rect">
             <a:avLst/>
@@ -10979,12 +10686,14 @@
           <a:noFill/>
         </p:spPr>
         <p:txBody>
-          <a:bodyPr wrap="square" anchor="t"/>
+          <a:bodyPr wrap="square">
+            <a:spAutoFit/>
+          </a:bodyPr>
           <a:lstStyle/>
           <a:p>
             <a:pPr algn="l">
               <a:spcAft>
-                <a:spcPts val="200"/>
+                <a:spcPts val="0"/>
               </a:spcAft>
             </a:pPr>
             <a:r>
@@ -10994,7 +10703,7 @@
                 </a:solidFill>
                 <a:latin typeface="Calibri"/>
               </a:rPr>
-              <a:t>Target on demo day: a mine safety officer on a tabletop model. Ministry of Coal is the PS owner. Impact = better notice + evidence + remote look — not disaster prevention numbers we cannot prove.</a:t>
+              <a:t>Target on demo day: a mine safety officer on a tabletop model. Ministry of Coal owns the PS. Impact = notice + evidence + remote look — not disaster-prevention numbers we cannot prove.</a:t>
             </a:r>
           </a:p>
         </p:txBody>
@@ -11007,8 +10716,8 @@
         </p:nvSpPr>
         <p:spPr>
           <a:xfrm>
-            <a:off x="320040" y="1508760"/>
-            <a:ext cx="2788920" cy="2148840"/>
+            <a:off x="320040" y="1408176"/>
+            <a:ext cx="2788920" cy="2212848"/>
           </a:xfrm>
           <a:prstGeom prst="roundRect">
             <a:avLst>
@@ -11018,10 +10727,8 @@
           <a:solidFill>
             <a:srgbClr val="0B2C4A"/>
           </a:solidFill>
-          <a:ln w="9525">
-            <a:solidFill>
-              <a:srgbClr val="0B2C4A"/>
-            </a:solidFill>
+          <a:ln>
+            <a:noFill/>
           </a:ln>
         </p:spPr>
         <p:style>
@@ -11054,8 +10761,8 @@
         </p:nvSpPr>
         <p:spPr>
           <a:xfrm>
-            <a:off x="429768" y="1572768"/>
-            <a:ext cx="2560320" cy="320040"/>
+            <a:off x="429768" y="1481328"/>
+            <a:ext cx="2560320" cy="310896"/>
           </a:xfrm>
           <a:prstGeom prst="rect">
             <a:avLst/>
@@ -11063,12 +10770,14 @@
           <a:noFill/>
         </p:spPr>
         <p:txBody>
-          <a:bodyPr wrap="square" anchor="t"/>
+          <a:bodyPr wrap="square">
+            <a:spAutoFit/>
+          </a:bodyPr>
           <a:lstStyle/>
           <a:p>
             <a:pPr algn="l">
               <a:spcAft>
-                <a:spcPts val="200"/>
+                <a:spcPts val="0"/>
               </a:spcAft>
             </a:pPr>
             <a:r>
@@ -11091,8 +10800,8 @@
         </p:nvSpPr>
         <p:spPr>
           <a:xfrm>
-            <a:off x="429768" y="1938528"/>
-            <a:ext cx="2560320" cy="1600200"/>
+            <a:off x="429768" y="1828800"/>
+            <a:ext cx="2560320" cy="1691640"/>
           </a:xfrm>
           <a:prstGeom prst="rect">
             <a:avLst/>
@@ -11100,12 +10809,14 @@
           <a:noFill/>
         </p:spPr>
         <p:txBody>
-          <a:bodyPr wrap="square" anchor="t"/>
+          <a:bodyPr wrap="square">
+            <a:spAutoFit/>
+          </a:bodyPr>
           <a:lstStyle/>
           <a:p>
             <a:pPr algn="l">
               <a:spcAft>
-                <a:spcPts val="200"/>
+                <a:spcPts val="0"/>
               </a:spcAft>
             </a:pPr>
             <a:r>
@@ -11115,7 +10826,7 @@
                 </a:solidFill>
                 <a:latin typeface="Calibri"/>
               </a:rPr>
-              <a:t>Officer sees Node A vs Node B, rule reason, AI score, forecast MAE, then drives the rover because a warning appeared.</a:t>
+              <a:t>Officer sees A vs B, rule reason, AI score, forecast MAE, then drives the rover because a warning appeared.</a:t>
             </a:r>
           </a:p>
         </p:txBody>
@@ -11128,8 +10839,8 @@
         </p:nvSpPr>
         <p:spPr>
           <a:xfrm>
-            <a:off x="3246120" y="1508760"/>
-            <a:ext cx="2788920" cy="2148840"/>
+            <a:off x="3246120" y="1408176"/>
+            <a:ext cx="2788920" cy="2212848"/>
           </a:xfrm>
           <a:prstGeom prst="roundRect">
             <a:avLst>
@@ -11139,10 +10850,8 @@
           <a:solidFill>
             <a:srgbClr val="0E7C7B"/>
           </a:solidFill>
-          <a:ln w="9525">
-            <a:solidFill>
-              <a:srgbClr val="0E7C7B"/>
-            </a:solidFill>
+          <a:ln>
+            <a:noFill/>
           </a:ln>
         </p:spPr>
         <p:style>
@@ -11175,8 +10884,8 @@
         </p:nvSpPr>
         <p:spPr>
           <a:xfrm>
-            <a:off x="3355848" y="1572768"/>
-            <a:ext cx="2560320" cy="320040"/>
+            <a:off x="3355848" y="1481328"/>
+            <a:ext cx="2560320" cy="310896"/>
           </a:xfrm>
           <a:prstGeom prst="rect">
             <a:avLst/>
@@ -11184,12 +10893,14 @@
           <a:noFill/>
         </p:spPr>
         <p:txBody>
-          <a:bodyPr wrap="square" anchor="t"/>
+          <a:bodyPr wrap="square">
+            <a:spAutoFit/>
+          </a:bodyPr>
           <a:lstStyle/>
           <a:p>
             <a:pPr algn="l">
               <a:spcAft>
-                <a:spcPts val="200"/>
+                <a:spcPts val="0"/>
               </a:spcAft>
             </a:pPr>
             <a:r>
@@ -11212,8 +10923,8 @@
         </p:nvSpPr>
         <p:spPr>
           <a:xfrm>
-            <a:off x="3355848" y="1938528"/>
-            <a:ext cx="2560320" cy="1600200"/>
+            <a:off x="3355848" y="1828800"/>
+            <a:ext cx="2560320" cy="1691640"/>
           </a:xfrm>
           <a:prstGeom prst="rect">
             <a:avLst/>
@@ -11221,12 +10932,14 @@
           <a:noFill/>
         </p:spPr>
         <p:txBody>
-          <a:bodyPr wrap="square" anchor="t"/>
+          <a:bodyPr wrap="square">
+            <a:spAutoFit/>
+          </a:bodyPr>
           <a:lstStyle/>
           <a:p>
             <a:pPr algn="l">
               <a:spcAft>
-                <a:spcPts val="200"/>
+                <a:spcPts val="0"/>
               </a:spcAft>
             </a:pPr>
             <a:r>
@@ -11236,7 +10949,7 @@
                 </a:solidFill>
                 <a:latin typeface="Calibri"/>
               </a:rPr>
-              <a:t>Fewer unnecessary entries into the model tunnel; decision stays with the human. Ack records awareness; it does not wipe history.</a:t>
+              <a:t>Fewer unnecessary entries into the model tunnel. Decision stays human. Ack records awareness; it does not wipe history.</a:t>
             </a:r>
           </a:p>
         </p:txBody>
@@ -11249,8 +10962,8 @@
         </p:nvSpPr>
         <p:spPr>
           <a:xfrm>
-            <a:off x="6172200" y="1508760"/>
-            <a:ext cx="2788920" cy="2148840"/>
+            <a:off x="6172200" y="1408176"/>
+            <a:ext cx="2788920" cy="2212848"/>
           </a:xfrm>
           <a:prstGeom prst="roundRect">
             <a:avLst>
@@ -11260,10 +10973,8 @@
           <a:solidFill>
             <a:srgbClr val="F47B20"/>
           </a:solidFill>
-          <a:ln w="9525">
-            <a:solidFill>
-              <a:srgbClr val="F47B20"/>
-            </a:solidFill>
+          <a:ln>
+            <a:noFill/>
           </a:ln>
         </p:spPr>
         <p:style>
@@ -11296,8 +11007,8 @@
         </p:nvSpPr>
         <p:spPr>
           <a:xfrm>
-            <a:off x="6281928" y="1572768"/>
-            <a:ext cx="2560320" cy="320040"/>
+            <a:off x="6281928" y="1481328"/>
+            <a:ext cx="2560320" cy="310896"/>
           </a:xfrm>
           <a:prstGeom prst="rect">
             <a:avLst/>
@@ -11305,12 +11016,14 @@
           <a:noFill/>
         </p:spPr>
         <p:txBody>
-          <a:bodyPr wrap="square" anchor="t"/>
+          <a:bodyPr wrap="square">
+            <a:spAutoFit/>
+          </a:bodyPr>
           <a:lstStyle/>
           <a:p>
             <a:pPr algn="l">
               <a:spcAft>
-                <a:spcPts val="200"/>
+                <a:spcPts val="0"/>
               </a:spcAft>
             </a:pPr>
             <a:r>
@@ -11320,7 +11033,7 @@
                 </a:solidFill>
                 <a:latin typeface="Calibri"/>
               </a:rPr>
-              <a:t>Operational</a:t>
+              <a:t>Economic / ops</a:t>
             </a:r>
           </a:p>
         </p:txBody>
@@ -11333,8 +11046,8 @@
         </p:nvSpPr>
         <p:spPr>
           <a:xfrm>
-            <a:off x="6281928" y="1938528"/>
-            <a:ext cx="2560320" cy="1600200"/>
+            <a:off x="6281928" y="1828800"/>
+            <a:ext cx="2560320" cy="1691640"/>
           </a:xfrm>
           <a:prstGeom prst="rect">
             <a:avLst/>
@@ -11342,12 +11055,14 @@
           <a:noFill/>
         </p:spPr>
         <p:txBody>
-          <a:bodyPr wrap="square" anchor="t"/>
+          <a:bodyPr wrap="square">
+            <a:spAutoFit/>
+          </a:bodyPr>
           <a:lstStyle/>
           <a:p>
             <a:pPr algn="l">
               <a:spcAft>
-                <a:spcPts val="200"/>
+                <a:spcPts val="0"/>
               </a:spcAft>
             </a:pPr>
             <a:r>
@@ -11357,7 +11072,7 @@
                 </a:solidFill>
                 <a:latin typeface="Calibri"/>
               </a:rPr>
-              <a:t>One laptop website. USB nodes still work if venue Wi-Fi is bad. Rover uses its own AP.</a:t>
+              <a:t>Standing ESP32-class watch vs waiting for a specialist survey. One laptop site. USB still works if venue Wi-Fi is bad.</a:t>
             </a:r>
           </a:p>
         </p:txBody>
@@ -11370,8 +11085,8 @@
         </p:nvSpPr>
         <p:spPr>
           <a:xfrm>
-            <a:off x="9098280" y="1508760"/>
-            <a:ext cx="2788920" cy="2148840"/>
+            <a:off x="9098280" y="1408176"/>
+            <a:ext cx="2788920" cy="2212848"/>
           </a:xfrm>
           <a:prstGeom prst="roundRect">
             <a:avLst>
@@ -11379,12 +11094,10 @@
             </a:avLst>
           </a:prstGeom>
           <a:solidFill>
-            <a:srgbClr val="1E7A46"/>
+            <a:srgbClr val="C48A12"/>
           </a:solidFill>
-          <a:ln w="9525">
-            <a:solidFill>
-              <a:srgbClr val="1E7A46"/>
-            </a:solidFill>
+          <a:ln>
+            <a:noFill/>
           </a:ln>
         </p:spPr>
         <p:style>
@@ -11417,8 +11130,8 @@
         </p:nvSpPr>
         <p:spPr>
           <a:xfrm>
-            <a:off x="9208008" y="1572768"/>
-            <a:ext cx="2560320" cy="320040"/>
+            <a:off x="9208008" y="1481328"/>
+            <a:ext cx="2560320" cy="310896"/>
           </a:xfrm>
           <a:prstGeom prst="rect">
             <a:avLst/>
@@ -11426,12 +11139,14 @@
           <a:noFill/>
         </p:spPr>
         <p:txBody>
-          <a:bodyPr wrap="square" anchor="t"/>
+          <a:bodyPr wrap="square">
+            <a:spAutoFit/>
+          </a:bodyPr>
           <a:lstStyle/>
           <a:p>
             <a:pPr algn="l">
               <a:spcAft>
-                <a:spcPts val="200"/>
+                <a:spcPts val="0"/>
               </a:spcAft>
             </a:pPr>
             <a:r>
@@ -11441,7 +11156,7 @@
                 </a:solidFill>
                 <a:latin typeface="Calibri"/>
               </a:rPr>
-              <a:t>Environment / limits</a:t>
+              <a:t>Environment / limit</a:t>
             </a:r>
           </a:p>
         </p:txBody>
@@ -11454,8 +11169,8 @@
         </p:nvSpPr>
         <p:spPr>
           <a:xfrm>
-            <a:off x="9208008" y="1938528"/>
-            <a:ext cx="2560320" cy="1600200"/>
+            <a:off x="9208008" y="1828800"/>
+            <a:ext cx="2560320" cy="1691640"/>
           </a:xfrm>
           <a:prstGeom prst="rect">
             <a:avLst/>
@@ -11463,12 +11178,14 @@
           <a:noFill/>
         </p:spPr>
         <p:txBody>
-          <a:bodyPr wrap="square" anchor="t"/>
+          <a:bodyPr wrap="square">
+            <a:spAutoFit/>
+          </a:bodyPr>
           <a:lstStyle/>
           <a:p>
             <a:pPr algn="l">
               <a:spcAft>
-                <a:spcPts val="200"/>
+                <a:spcPts val="0"/>
               </a:spcAft>
             </a:pPr>
             <a:r>
@@ -11483,17 +11200,56 @@
           </a:p>
         </p:txBody>
       </p:sp>
+      <p:sp>
+        <p:nvSpPr>
+          <p:cNvPr id="17424" name="TextBox 17423"/>
+          <p:cNvSpPr txBox="1"/>
+          <p:nvPr/>
+        </p:nvSpPr>
+        <p:spPr>
+          <a:xfrm>
+            <a:off x="320040" y="3730752"/>
+            <a:ext cx="11521440" cy="219456"/>
+          </a:xfrm>
+          <a:prstGeom prst="rect">
+            <a:avLst/>
+          </a:prstGeom>
+          <a:noFill/>
+        </p:spPr>
+        <p:txBody>
+          <a:bodyPr wrap="square">
+            <a:spAutoFit/>
+          </a:bodyPr>
+          <a:lstStyle/>
+          <a:p>
+            <a:pPr algn="l">
+              <a:spcAft>
+                <a:spcPts val="0"/>
+              </a:spcAft>
+            </a:pPr>
+            <a:r>
+              <a:rPr sz="1200" b="1">
+                <a:solidFill>
+                  <a:srgbClr val="0B2C4A"/>
+                </a:solidFill>
+                <a:latin typeface="Calibri"/>
+              </a:rPr>
+              <a:t>Benefits a judge can verify on the table  ·  nothing we invent</a:t>
+            </a:r>
+          </a:p>
+        </p:txBody>
+      </p:sp>
       <p:graphicFrame>
         <p:nvGraphicFramePr>
-          <p:cNvPr id="17424" name="Table 17423"/>
+          <p:cNvPr id="17425" name="Table 17424"/>
           <p:cNvGraphicFramePr>
             <a:graphicFrameLocks noGrp="1"/>
           </p:cNvGraphicFramePr>
           <p:nvPr/>
         </p:nvGraphicFramePr>
         <p:xfrm>
-          <a:off x="320040" y="3794760"/>
-          <a:ext cx="11521440" cy="1737360"/>
+          <a:off x="320040" y="3968496"/>
+          <a:ext cx="11521438" cy="2212845"/>
         </p:xfrm>
         <a:graphic>
           <a:graphicData uri="http://schemas.openxmlformats.org/drawingml/2006/table">
@@ -11502,11 +11258,11 @@
                 <a:tableStyleId>{5C22544A-7EE6-4342-B048-85BDC9FD1C3A}</a:tableStyleId>
               </a:tblPr>
               <a:tblGrid>
-                <a:gridCol w="3840480"/>
-                <a:gridCol w="3840480"/>
-                <a:gridCol w="3840480"/>
+                <a:gridCol w="2979682"/>
+                <a:gridCol w="4568846"/>
+                <a:gridCol w="3972910"/>
               </a:tblGrid>
-              <a:tr h="347472">
+              <a:tr h="442569">
                 <a:tc>
                   <a:txBody>
                     <a:bodyPr/>
@@ -11514,7 +11270,7 @@
                     <a:p>
                       <a:pPr algn="l"/>
                       <a:r>
-                        <a:rPr sz="1000" b="1">
+                        <a:rPr sz="1100" b="1">
                           <a:solidFill>
                             <a:srgbClr val="FFFFFF"/>
                           </a:solidFill>
@@ -11537,7 +11293,7 @@
                     <a:p>
                       <a:pPr algn="l"/>
                       <a:r>
-                        <a:rPr sz="1000" b="1">
+                        <a:rPr sz="1100" b="1">
                           <a:solidFill>
                             <a:srgbClr val="FFFFFF"/>
                           </a:solidFill>
@@ -11560,7 +11316,7 @@
                     <a:p>
                       <a:pPr algn="l"/>
                       <a:r>
-                        <a:rPr sz="1000" b="1">
+                        <a:rPr sz="1100" b="1">
                           <a:solidFill>
                             <a:srgbClr val="FFFFFF"/>
                           </a:solidFill>
@@ -11577,7 +11333,7 @@
                   </a:tcPr>
                 </a:tc>
               </a:tr>
-              <a:tr h="347472">
+              <a:tr h="442569">
                 <a:tc>
                   <a:txBody>
                     <a:bodyPr/>
@@ -11585,7 +11341,7 @@
                     <a:p>
                       <a:pPr algn="l"/>
                       <a:r>
-                        <a:rPr sz="1000" b="1">
+                        <a:rPr sz="1100" b="1">
                           <a:solidFill>
                             <a:srgbClr val="1A1A1A"/>
                           </a:solidFill>
@@ -11608,13 +11364,13 @@
                     <a:p>
                       <a:pPr algn="l"/>
                       <a:r>
-                        <a:rPr sz="1000" b="0">
+                        <a:rPr sz="1100" b="0">
                           <a:solidFill>
                             <a:srgbClr val="1A1A1A"/>
                           </a:solidFill>
                           <a:latin typeface="Calibri"/>
                         </a:rPr>
-                        <a:t>Tilt/slider move → WATCH then latched ALERT in ~3 s</a:t>
+                        <a:t>Controlled tilt/slider → WATCH then latched ALERT</a:t>
                       </a:r>
                     </a:p>
                   </a:txBody>
@@ -11631,7 +11387,7 @@
                     <a:p>
                       <a:pPr algn="l"/>
                       <a:r>
-                        <a:rPr sz="1000" b="0">
+                        <a:rPr sz="1100" b="0">
                           <a:solidFill>
                             <a:srgbClr val="1A1A1A"/>
                           </a:solidFill>
@@ -11648,7 +11404,7 @@
                   </a:tcPr>
                 </a:tc>
               </a:tr>
-              <a:tr h="347472">
+              <a:tr h="442569">
                 <a:tc>
                   <a:txBody>
                     <a:bodyPr/>
@@ -11656,7 +11412,7 @@
                     <a:p>
                       <a:pPr algn="l"/>
                       <a:r>
-                        <a:rPr sz="1000" b="1">
+                        <a:rPr sz="1100" b="1">
                           <a:solidFill>
                             <a:srgbClr val="1A1A1A"/>
                           </a:solidFill>
@@ -11679,13 +11435,13 @@
                     <a:p>
                       <a:pPr algn="l"/>
                       <a:r>
-                        <a:rPr sz="1000" b="0">
+                        <a:rPr sz="1100" b="0">
                           <a:solidFill>
                             <a:srgbClr val="1A1A1A"/>
                           </a:solidFill>
                           <a:latin typeface="Calibri"/>
                         </a:rPr>
-                        <a:t>Charts + A-vs-B sentence + IF feature + Ridge MAE</a:t>
+                        <a:t>Charts + A-vs-B + IF feature + Ridge MAE</a:t>
                       </a:r>
                     </a:p>
                   </a:txBody>
@@ -11702,7 +11458,7 @@
                     <a:p>
                       <a:pPr algn="l"/>
                       <a:r>
-                        <a:rPr sz="1000" b="0">
+                        <a:rPr sz="1100" b="0">
                           <a:solidFill>
                             <a:srgbClr val="1A1A1A"/>
                           </a:solidFill>
@@ -11719,7 +11475,7 @@
                   </a:tcPr>
                 </a:tc>
               </a:tr>
-              <a:tr h="347472">
+              <a:tr h="442569">
                 <a:tc>
                   <a:txBody>
                     <a:bodyPr/>
@@ -11727,7 +11483,7 @@
                     <a:p>
                       <a:pPr algn="l"/>
                       <a:r>
-                        <a:rPr sz="1000" b="1">
+                        <a:rPr sz="1100" b="1">
                           <a:solidFill>
                             <a:srgbClr val="1A1A1A"/>
                           </a:solidFill>
@@ -11750,7 +11506,7 @@
                     <a:p>
                       <a:pPr algn="l"/>
                       <a:r>
-                        <a:rPr sz="1000" b="0">
+                        <a:rPr sz="1100" b="0">
                           <a:solidFill>
                             <a:srgbClr val="1A1A1A"/>
                           </a:solidFill>
@@ -11773,7 +11529,7 @@
                     <a:p>
                       <a:pPr algn="l"/>
                       <a:r>
-                        <a:rPr sz="1000" b="0">
+                        <a:rPr sz="1100" b="0">
                           <a:solidFill>
                             <a:srgbClr val="1A1A1A"/>
                           </a:solidFill>
@@ -11790,7 +11546,7 @@
                   </a:tcPr>
                 </a:tc>
               </a:tr>
-              <a:tr h="347472">
+              <a:tr h="442569">
                 <a:tc>
                   <a:txBody>
                     <a:bodyPr/>
@@ -11798,7 +11554,7 @@
                     <a:p>
                       <a:pPr algn="l"/>
                       <a:r>
-                        <a:rPr sz="1000" b="1">
+                        <a:rPr sz="1100" b="1">
                           <a:solidFill>
                             <a:srgbClr val="1A1A1A"/>
                           </a:solidFill>
@@ -11821,13 +11577,13 @@
                     <a:p>
                       <a:pPr algn="l"/>
                       <a:r>
-                        <a:rPr sz="1000" b="0">
+                        <a:rPr sz="1100" b="0">
                           <a:solidFill>
                             <a:srgbClr val="1A1A1A"/>
                           </a:solidFill>
                           <a:latin typeface="Calibri"/>
                         </a:rPr>
-                        <a:t>Same workflow; surveyed mounts + labelled events later</a:t>
+                        <a:t>Same workflow later with surveyed mounts</a:t>
                       </a:r>
                     </a:p>
                   </a:txBody>
@@ -11844,7 +11600,7 @@
                     <a:p>
                       <a:pPr algn="l"/>
                       <a:r>
-                        <a:rPr sz="1000" b="0">
+                        <a:rPr sz="1100" b="0">
                           <a:solidFill>
                             <a:srgbClr val="1A1A1A"/>
                           </a:solidFill>
@@ -11984,19 +11740,29 @@
             <p:ph type="title"/>
           </p:nvPr>
         </p:nvSpPr>
-        <p:spPr/>
-        <p:txBody>
-          <a:bodyPr/>
+        <p:spPr>
+          <a:xfrm>
+            <a:off x="1719072" y="91440"/>
+            <a:ext cx="7818120" cy="804672"/>
+          </a:xfrm>
+        </p:spPr>
+        <p:txBody>
+          <a:bodyPr wrap="square"/>
           <a:lstStyle/>
           <a:p>
-            <a:pPr eaLnBrk="1" hangingPunct="1"/>
-            <a:r>
-              <a:rPr lang="en-US" sz="3600" b="1" dirty="0">
-                <a:latin typeface="Times New Roman" panose="02020603050405020304" pitchFamily="18" charset="0"/>
-                <a:ea typeface="ＭＳ Ｐゴシック" pitchFamily="1" charset="-128"/>
-                <a:cs typeface="Times New Roman" panose="02020603050405020304" pitchFamily="18" charset="0"/>
+            <a:pPr eaLnBrk="1" hangingPunct="1" algn="l">
+              <a:spcAft>
+                <a:spcPts val="0"/>
+              </a:spcAft>
+            </a:pPr>
+            <a:r>
+              <a:rPr sz="2600" b="1">
+                <a:solidFill>
+                  <a:srgbClr val="0B2C4A"/>
+                </a:solidFill>
+                <a:latin typeface="Calibri"/>
               </a:rPr>
-              <a:t>RESEARCH  AND REFERENCES</a:t>
+              <a:t>RESEARCH AND REFERENCES</a:t>
             </a:r>
           </a:p>
         </p:txBody>
@@ -12242,6 +12008,12 @@
           <a:prstGeom prst="ellipse">
             <a:avLst/>
           </a:prstGeom>
+          <a:solidFill>
+            <a:srgbClr val="F47B20"/>
+          </a:solidFill>
+          <a:ln>
+            <a:noFill/>
+          </a:ln>
         </p:spPr>
         <p:style>
           <a:lnRef idx="2">
@@ -12263,7 +12035,7 @@
           <a:p>
             <a:pPr algn="ctr">
               <a:spcAft>
-                <a:spcPts val="400"/>
+                <a:spcPts val="0"/>
               </a:spcAft>
             </a:pPr>
             <a:r>
@@ -12317,8 +12089,8 @@
         </p:nvSpPr>
         <p:spPr>
           <a:xfrm>
-            <a:off x="320040" y="1024128"/>
-            <a:ext cx="11521440" cy="365760"/>
+            <a:off x="320040" y="987552"/>
+            <a:ext cx="11521440" cy="292608"/>
           </a:xfrm>
           <a:prstGeom prst="rect">
             <a:avLst/>
@@ -12326,12 +12098,14 @@
           <a:noFill/>
         </p:spPr>
         <p:txBody>
-          <a:bodyPr wrap="square" anchor="t"/>
+          <a:bodyPr wrap="square">
+            <a:spAutoFit/>
+          </a:bodyPr>
           <a:lstStyle/>
           <a:p>
             <a:pPr algn="l">
               <a:spcAft>
-                <a:spcPts val="200"/>
+                <a:spcPts val="0"/>
               </a:spcAft>
             </a:pPr>
             <a:r>
@@ -12355,8 +12129,8 @@
           <p:nvPr/>
         </p:nvGraphicFramePr>
         <p:xfrm>
-          <a:off x="320040" y="1389888"/>
-          <a:ext cx="11521440" cy="3246120"/>
+          <a:off x="320040" y="1298448"/>
+          <a:ext cx="11521439" cy="4160520"/>
         </p:xfrm>
         <a:graphic>
           <a:graphicData uri="http://schemas.openxmlformats.org/drawingml/2006/table">
@@ -12365,11 +12139,11 @@
                 <a:tableStyleId>{5C22544A-7EE6-4342-B048-85BDC9FD1C3A}</a:tableStyleId>
               </a:tblPr>
               <a:tblGrid>
-                <a:gridCol w="3840480"/>
-                <a:gridCol w="3840480"/>
-                <a:gridCol w="3840480"/>
+                <a:gridCol w="2411464"/>
+                <a:gridCol w="3572539"/>
+                <a:gridCol w="5537436"/>
               </a:tblGrid>
-              <a:tr h="360680">
+              <a:tr h="416052">
                 <a:tc>
                   <a:txBody>
                     <a:bodyPr/>
@@ -12377,7 +12151,7 @@
                     <a:p>
                       <a:pPr algn="l"/>
                       <a:r>
-                        <a:rPr sz="1000" b="1">
+                        <a:rPr sz="1100" b="1">
                           <a:solidFill>
                             <a:srgbClr val="FFFFFF"/>
                           </a:solidFill>
@@ -12400,7 +12174,7 @@
                     <a:p>
                       <a:pPr algn="l"/>
                       <a:r>
-                        <a:rPr sz="1000" b="1">
+                        <a:rPr sz="1100" b="1">
                           <a:solidFill>
                             <a:srgbClr val="FFFFFF"/>
                           </a:solidFill>
@@ -12423,13 +12197,13 @@
                     <a:p>
                       <a:pPr algn="l"/>
                       <a:r>
-                        <a:rPr sz="1000" b="1">
+                        <a:rPr sz="1100" b="1">
                           <a:solidFill>
                             <a:srgbClr val="FFFFFF"/>
                           </a:solidFill>
                           <a:latin typeface="Calibri"/>
                         </a:rPr>
-                        <a:t>Link / citation</a:t>
+                        <a:t>Citation / link (no invented stats)</a:t>
                       </a:r>
                     </a:p>
                   </a:txBody>
@@ -12440,7 +12214,7 @@
                   </a:tcPr>
                 </a:tc>
               </a:tr>
-              <a:tr h="360680">
+              <a:tr h="416052">
                 <a:tc>
                   <a:txBody>
                     <a:bodyPr/>
@@ -12448,7 +12222,7 @@
                     <a:p>
                       <a:pPr algn="l"/>
                       <a:r>
-                        <a:rPr sz="1000" b="1">
+                        <a:rPr sz="1100" b="1">
                           <a:solidFill>
                             <a:srgbClr val="1A1A1A"/>
                           </a:solidFill>
@@ -12471,13 +12245,13 @@
                     <a:p>
                       <a:pPr algn="l"/>
                       <a:r>
-                        <a:rPr sz="1000" b="0">
+                        <a:rPr sz="1100" b="0">
                           <a:solidFill>
                             <a:srgbClr val="1A1A1A"/>
                           </a:solidFill>
                           <a:latin typeface="Calibri"/>
                         </a:rPr>
-                        <a:t>Official catalogue ID (not SIH2026025)</a:t>
+                        <a:t>Official catalogue ID — never SIH2026025</a:t>
                       </a:r>
                     </a:p>
                   </a:txBody>
@@ -12494,13 +12268,13 @@
                     <a:p>
                       <a:pPr algn="l"/>
                       <a:r>
-                        <a:rPr sz="1000" b="0">
+                        <a:rPr sz="1100" b="0">
                           <a:solidFill>
                             <a:srgbClr val="1A1A1A"/>
                           </a:solidFill>
                           <a:latin typeface="Calibri"/>
                         </a:rPr>
-                        <a:t>SIH 2026 portal / Ministry of Coal, Hardware, Disaster Management</a:t>
+                        <a:t>SIH 2026 portal · Ministry of Coal · Hardware · Disaster Management</a:t>
                       </a:r>
                     </a:p>
                   </a:txBody>
@@ -12511,7 +12285,7 @@
                   </a:tcPr>
                 </a:tc>
               </a:tr>
-              <a:tr h="360680">
+              <a:tr h="416052">
                 <a:tc>
                   <a:txBody>
                     <a:bodyPr/>
@@ -12519,7 +12293,7 @@
                     <a:p>
                       <a:pPr algn="l"/>
                       <a:r>
-                        <a:rPr sz="1000" b="1">
+                        <a:rPr sz="1100" b="1">
                           <a:solidFill>
                             <a:srgbClr val="1A1A1A"/>
                           </a:solidFill>
@@ -12542,7 +12316,7 @@
                     <a:p>
                       <a:pPr algn="l"/>
                       <a:r>
-                        <a:rPr sz="1000" b="0">
+                        <a:rPr sz="1100" b="0">
                           <a:solidFill>
                             <a:srgbClr val="1A1A1A"/>
                           </a:solidFill>
@@ -12565,7 +12339,7 @@
                     <a:p>
                       <a:pPr algn="l"/>
                       <a:r>
-                        <a:rPr sz="1000" b="0">
+                        <a:rPr sz="1100" b="0">
                           <a:solidFill>
                             <a:srgbClr val="1A1A1A"/>
                           </a:solidFill>
@@ -12582,7 +12356,7 @@
                   </a:tcPr>
                 </a:tc>
               </a:tr>
-              <a:tr h="360680">
+              <a:tr h="416052">
                 <a:tc>
                   <a:txBody>
                     <a:bodyPr/>
@@ -12590,13 +12364,13 @@
                     <a:p>
                       <a:pPr algn="l"/>
                       <a:r>
-                        <a:rPr sz="1000" b="1">
+                        <a:rPr sz="1100" b="1">
                           <a:solidFill>
                             <a:srgbClr val="1A1A1A"/>
                           </a:solidFill>
                           <a:latin typeface="Calibri"/>
                         </a:rPr>
-                        <a:t>Ridge forecast</a:t>
+                        <a:t>30 s forecast</a:t>
                       </a:r>
                     </a:p>
                   </a:txBody>
@@ -12613,7 +12387,7 @@
                     <a:p>
                       <a:pPr algn="l"/>
                       <a:r>
-                        <a:rPr sz="1000" b="0">
+                        <a:rPr sz="1100" b="0">
                           <a:solidFill>
                             <a:srgbClr val="1A1A1A"/>
                           </a:solidFill>
@@ -12636,13 +12410,13 @@
                     <a:p>
                       <a:pPr algn="l"/>
                       <a:r>
-                        <a:rPr sz="1000" b="0">
+                        <a:rPr sz="1100" b="0">
                           <a:solidFill>
                             <a:srgbClr val="1A1A1A"/>
                           </a:solidFill>
                           <a:latin typeface="Calibri"/>
                         </a:rPr>
-                        <a:t>scikit-learn Ridge; MAE on a held recent window</a:t>
+                        <a:t>scikit-learn Ridge / holdout MAE on a recent window</a:t>
                       </a:r>
                     </a:p>
                   </a:txBody>
@@ -12653,7 +12427,7 @@
                   </a:tcPr>
                 </a:tc>
               </a:tr>
-              <a:tr h="360680">
+              <a:tr h="416052">
                 <a:tc>
                   <a:txBody>
                     <a:bodyPr/>
@@ -12661,7 +12435,7 @@
                     <a:p>
                       <a:pPr algn="l"/>
                       <a:r>
-                        <a:rPr sz="1000" b="1">
+                        <a:rPr sz="1100" b="1">
                           <a:solidFill>
                             <a:srgbClr val="1A1A1A"/>
                           </a:solidFill>
@@ -12684,7 +12458,7 @@
                     <a:p>
                       <a:pPr algn="l"/>
                       <a:r>
-                        <a:rPr sz="1000" b="0">
+                        <a:rPr sz="1100" b="0">
                           <a:solidFill>
                             <a:srgbClr val="1A1A1A"/>
                           </a:solidFill>
@@ -12707,7 +12481,7 @@
                     <a:p>
                       <a:pPr algn="l"/>
                       <a:r>
-                        <a:rPr sz="1000" b="0">
+                        <a:rPr sz="1100" b="0">
                           <a:solidFill>
                             <a:srgbClr val="1A1A1A"/>
                           </a:solidFill>
@@ -12724,7 +12498,7 @@
                   </a:tcPr>
                 </a:tc>
               </a:tr>
-              <a:tr h="360680">
+              <a:tr h="416052">
                 <a:tc>
                   <a:txBody>
                     <a:bodyPr/>
@@ -12732,13 +12506,13 @@
                     <a:p>
                       <a:pPr algn="l"/>
                       <a:r>
-                        <a:rPr sz="1000" b="1">
+                        <a:rPr sz="1100" b="1">
                           <a:solidFill>
                             <a:srgbClr val="1A1A1A"/>
                           </a:solidFill>
                           <a:latin typeface="Calibri"/>
                         </a:rPr>
-                        <a:t>ESP-NOW</a:t>
+                        <a:t>ESP-NOW + ADC1</a:t>
                       </a:r>
                     </a:p>
                   </a:txBody>
@@ -12755,13 +12529,13 @@
                     <a:p>
                       <a:pPr algn="l"/>
                       <a:r>
-                        <a:rPr sz="1000" b="0">
+                        <a:rPr sz="1100" b="0">
                           <a:solidFill>
                             <a:srgbClr val="1A1A1A"/>
                           </a:solidFill>
                           <a:latin typeface="Calibri"/>
                         </a:rPr>
-                        <a:t>Node radio on channel 1, tabletop</a:t>
+                        <a:t>Node radio ch1; slider on GPIO34</a:t>
                       </a:r>
                     </a:p>
                   </a:txBody>
@@ -12778,13 +12552,13 @@
                     <a:p>
                       <a:pPr algn="l"/>
                       <a:r>
-                        <a:rPr sz="1000" b="0">
+                        <a:rPr sz="1100" b="0">
                           <a:solidFill>
                             <a:srgbClr val="1A1A1A"/>
                           </a:solidFill>
                           <a:latin typeface="Calibri"/>
                         </a:rPr>
-                        <a:t>Espressif ESP-NOW User Guide</a:t>
+                        <a:t>Espressif ESP-NOW User Guide; ESP32 ADC notes</a:t>
                       </a:r>
                     </a:p>
                   </a:txBody>
@@ -12795,7 +12569,7 @@
                   </a:tcPr>
                 </a:tc>
               </a:tr>
-              <a:tr h="360680">
+              <a:tr h="416052">
                 <a:tc>
                   <a:txBody>
                     <a:bodyPr/>
@@ -12803,7 +12577,7 @@
                     <a:p>
                       <a:pPr algn="l"/>
                       <a:r>
-                        <a:rPr sz="1000" b="1">
+                        <a:rPr sz="1100" b="1">
                           <a:solidFill>
                             <a:srgbClr val="1A1A1A"/>
                           </a:solidFill>
@@ -12826,7 +12600,7 @@
                     <a:p>
                       <a:pPr algn="l"/>
                       <a:r>
-                        <a:rPr sz="1000" b="0">
+                        <a:rPr sz="1100" b="0">
                           <a:solidFill>
                             <a:srgbClr val="1A1A1A"/>
                           </a:solidFill>
@@ -12849,7 +12623,7 @@
                     <a:p>
                       <a:pPr algn="l"/>
                       <a:r>
-                        <a:rPr sz="1000" b="0">
+                        <a:rPr sz="1100" b="0">
                           <a:solidFill>
                             <a:srgbClr val="1A1A1A"/>
                           </a:solidFill>
@@ -12866,7 +12640,7 @@
                   </a:tcPr>
                 </a:tc>
               </a:tr>
-              <a:tr h="360680">
+              <a:tr h="416052">
                 <a:tc>
                   <a:txBody>
                     <a:bodyPr/>
@@ -12874,13 +12648,13 @@
                     <a:p>
                       <a:pPr algn="l"/>
                       <a:r>
-                        <a:rPr sz="1000" b="1">
+                        <a:rPr sz="1100" b="1">
                           <a:solidFill>
                             <a:srgbClr val="1A1A1A"/>
                           </a:solidFill>
                           <a:latin typeface="Calibri"/>
                         </a:rPr>
-                        <a:t>MQ-7</a:t>
+                        <a:t>MQ-7 / IR</a:t>
                       </a:r>
                     </a:p>
                   </a:txBody>
@@ -12897,13 +12671,13 @@
                     <a:p>
                       <a:pPr algn="l"/>
                       <a:r>
-                        <a:rPr sz="1000" b="0">
+                        <a:rPr sz="1100" b="0">
                           <a:solidFill>
                             <a:srgbClr val="1A1A1A"/>
                           </a:solidFill>
                           <a:latin typeface="Calibri"/>
                         </a:rPr>
-                        <a:t>Rover inspection only, raw ADC</a:t>
+                        <a:t>Rover inspect only</a:t>
                       </a:r>
                     </a:p>
                   </a:txBody>
@@ -12920,13 +12694,13 @@
                     <a:p>
                       <a:pPr algn="l"/>
                       <a:r>
-                        <a:rPr sz="1000" b="0">
+                        <a:rPr sz="1100" b="0">
                           <a:solidFill>
                             <a:srgbClr val="1A1A1A"/>
                           </a:solidFill>
                           <a:latin typeface="Calibri"/>
                         </a:rPr>
-                        <a:t>Winsen/Hanwei MQ-7 datasheet — we do not output ppm</a:t>
+                        <a:t>MQ-7 datasheet — raw ADC, not ppm. IR = digital LOW flag, not ranging</a:t>
                       </a:r>
                     </a:p>
                   </a:txBody>
@@ -12937,7 +12711,7 @@
                   </a:tcPr>
                 </a:tc>
               </a:tr>
-              <a:tr h="360680">
+              <a:tr h="416052">
                 <a:tc>
                   <a:txBody>
                     <a:bodyPr/>
@@ -12945,13 +12719,13 @@
                     <a:p>
                       <a:pPr algn="l"/>
                       <a:r>
-                        <a:rPr sz="1000" b="1">
+                        <a:rPr sz="1100" b="1">
                           <a:solidFill>
                             <a:srgbClr val="1A1A1A"/>
                           </a:solidFill>
                           <a:latin typeface="Calibri"/>
                         </a:rPr>
-                        <a:t>Problem domain</a:t>
+                        <a:t>Implementation</a:t>
                       </a:r>
                     </a:p>
                   </a:txBody>
@@ -12968,13 +12742,13 @@
                     <a:p>
                       <a:pPr algn="l"/>
                       <a:r>
-                        <a:rPr sz="1000" b="0">
+                        <a:rPr sz="1100" b="0">
                           <a:solidFill>
                             <a:srgbClr val="1A1A1A"/>
                           </a:solidFill>
                           <a:latin typeface="Calibri"/>
                         </a:rPr>
-                        <a:t>Why coal mines care about movement</a:t>
+                        <a:t>Partial working software + firmware</a:t>
                       </a:r>
                     </a:p>
                   </a:txBody>
@@ -12991,13 +12765,13 @@
                     <a:p>
                       <a:pPr algn="l"/>
                       <a:r>
-                        <a:rPr sz="1000" b="0">
+                        <a:rPr sz="1100" b="0">
                           <a:solidFill>
                             <a:srgbClr val="1A1A1A"/>
                           </a:solidFill>
                           <a:latin typeface="Calibri"/>
                         </a:rPr>
-                        <a:t>Ministry of Coal / DGMS published guidance on subsidence &amp; strata — context only</a:t>
+                        <a:t>https://github.com/Rithvik-7/WECOOK-MOLE</a:t>
                       </a:r>
                     </a:p>
                   </a:txBody>
@@ -13008,6 +12782,77 @@
                   </a:tcPr>
                 </a:tc>
               </a:tr>
+              <a:tr h="416052">
+                <a:tc>
+                  <a:txBody>
+                    <a:bodyPr/>
+                    <a:lstStyle/>
+                    <a:p>
+                      <a:pPr algn="l"/>
+                      <a:r>
+                        <a:rPr sz="1100" b="1">
+                          <a:solidFill>
+                            <a:srgbClr val="1A1A1A"/>
+                          </a:solidFill>
+                          <a:latin typeface="Calibri"/>
+                        </a:rPr>
+                        <a:t>Domain context only</a:t>
+                      </a:r>
+                    </a:p>
+                  </a:txBody>
+                  <a:tcPr anchor="ctr">
+                    <a:solidFill>
+                      <a:srgbClr val="FFFFFF"/>
+                    </a:solidFill>
+                  </a:tcPr>
+                </a:tc>
+                <a:tc>
+                  <a:txBody>
+                    <a:bodyPr/>
+                    <a:lstStyle/>
+                    <a:p>
+                      <a:pPr algn="l"/>
+                      <a:r>
+                        <a:rPr sz="1100" b="0">
+                          <a:solidFill>
+                            <a:srgbClr val="1A1A1A"/>
+                          </a:solidFill>
+                          <a:latin typeface="Calibri"/>
+                        </a:rPr>
+                        <a:t>Why mines care about movement</a:t>
+                      </a:r>
+                    </a:p>
+                  </a:txBody>
+                  <a:tcPr anchor="ctr">
+                    <a:solidFill>
+                      <a:srgbClr val="FFFFFF"/>
+                    </a:solidFill>
+                  </a:tcPr>
+                </a:tc>
+                <a:tc>
+                  <a:txBody>
+                    <a:bodyPr/>
+                    <a:lstStyle/>
+                    <a:p>
+                      <a:pPr algn="l"/>
+                      <a:r>
+                        <a:rPr sz="1100" b="0">
+                          <a:solidFill>
+                            <a:srgbClr val="1A1A1A"/>
+                          </a:solidFill>
+                          <a:latin typeface="Calibri"/>
+                        </a:rPr>
+                        <a:t>Coal Mines Regulations, 2017; DGMS (S&amp;T) Circ. 01/2017 cl. 6.1 — not implemented here</a:t>
+                      </a:r>
+                    </a:p>
+                  </a:txBody>
+                  <a:tcPr anchor="ctr">
+                    <a:solidFill>
+                      <a:srgbClr val="FFFFFF"/>
+                    </a:solidFill>
+                  </a:tcPr>
+                </a:tc>
+              </a:tr>
             </a:tbl>
           </a:graphicData>
         </a:graphic>
@@ -13020,8 +12865,8 @@
         </p:nvSpPr>
         <p:spPr>
           <a:xfrm>
-            <a:off x="320040" y="4736592"/>
-            <a:ext cx="11521440" cy="777240"/>
+            <a:off x="320040" y="5532120"/>
+            <a:ext cx="11521440" cy="658368"/>
           </a:xfrm>
           <a:prstGeom prst="roundRect">
             <a:avLst>
@@ -13031,10 +12876,8 @@
           <a:solidFill>
             <a:srgbClr val="F4F7FA"/>
           </a:solidFill>
-          <a:ln w="9525">
-            <a:solidFill>
-              <a:srgbClr val="D5DEE8"/>
-            </a:solidFill>
+          <a:ln>
+            <a:noFill/>
           </a:ln>
         </p:spPr>
         <p:style>
@@ -13067,8 +12910,8 @@
         </p:nvSpPr>
         <p:spPr>
           <a:xfrm>
-            <a:off x="457200" y="4800600"/>
-            <a:ext cx="11247120" cy="658368"/>
+            <a:off x="438912" y="5577840"/>
+            <a:ext cx="11292840" cy="566928"/>
           </a:xfrm>
           <a:prstGeom prst="rect">
             <a:avLst/>
@@ -13076,7 +12919,9 @@
           <a:noFill/>
         </p:spPr>
         <p:txBody>
-          <a:bodyPr wrap="square" anchor="t"/>
+          <a:bodyPr wrap="square">
+            <a:spAutoFit/>
+          </a:bodyPr>
           <a:lstStyle/>
           <a:p>
             <a:pPr algn="l">
@@ -13085,13 +12930,13 @@
               </a:spcAft>
             </a:pPr>
             <a:r>
-              <a:rPr sz="1200" b="0">
+              <a:rPr sz="1200" b="1">
                 <a:solidFill>
                   <a:srgbClr val="0B2C4A"/>
                 </a:solidFill>
                 <a:latin typeface="Calibri"/>
               </a:rPr>
-              <a:t>One-line close: MOLE is a working tabletop loop — nodes detect, rules latch, Isolation Forest + Ridge explain, rover inspects.</a:t>
+              <a:t>Close: nodes detect → rules latch → Isolation Forest + Ridge explain → rover inspects.</a:t>
             </a:r>
           </a:p>
           <a:p>
@@ -13101,13 +12946,13 @@
               </a:spcAft>
             </a:pPr>
             <a:r>
-              <a:rPr sz="1200" b="0">
+              <a:rPr sz="1200" b="1">
                 <a:solidFill>
                   <a:srgbClr val="0B2C4A"/>
                 </a:solidFill>
                 <a:latin typeface="Calibri"/>
               </a:rPr>
-              <a:t>Upload as PDF. Team ID: fill after portal. Delete no extra slides — this file is already 6.</a:t>
+              <a:t>Upload PDF of these 6 slides only. Team ID: fill on portal. No extra slide.</a:t>
             </a:r>
           </a:p>
         </p:txBody>
